--- a/decks/day2/module-1-foundry-iq.pptx
+++ b/decks/day2/module-1-foundry-iq.pptx
@@ -3496,7 +3496,7 @@
                 <a:ea typeface="Calibri" pitchFamily="34" charset="-122"/>
                 <a:cs typeface="Calibri" pitchFamily="34" charset="-120"/>
               </a:rPr>
-              <a:t>Attendees do the SDK path in today's lab.</a:t>
+              <a:t>You'll do the SDK path in today's lab.</a:t>
             </a:r>
             <a:endParaRPr lang="en-US" sz="1300" dirty="0"/>
           </a:p>
@@ -4816,7 +4816,7 @@
                 <a:ea typeface="Calibri" pitchFamily="34" charset="-122"/>
                 <a:cs typeface="Calibri" pitchFamily="34" charset="-120"/>
               </a:rPr>
-              <a:t>Ignoring citations — attendees skip verifying the model actually cites the retrieval, hallucinations sneak back in</a:t>
+              <a:t>Ignoring citations — you skip verifying the model actually cites the retrieval, hallucinations sneak back in</a:t>
             </a:r>
             <a:endParaRPr lang="en-US" sz="1300" dirty="0"/>
           </a:p>

--- a/decks/day2/module-1-foundry-iq.pptx
+++ b/decks/day2/module-1-foundry-iq.pptx
@@ -793,7 +793,7 @@
               <a:rPr lang="en-US" dirty="0"/>
               <a:t>• Reinforce Day 1's Portal-for-learning / CLI-for-production framing
 • Verify the exact CLI/REST surface before delivering — this space moves fast
-• Lab uses the Python SDK (azure-search-documents) for creation
+• Today's lab uses the portal deliberately (blob-backed KB is faster to set up in the portal than in code, and RBAC is the same either way)
 • Portal is still valid for exploration and debugging</a:t>
             </a:r>
             <a:endParaRPr lang="en-US" dirty="0"/>
@@ -1618,7 +1618,7 @@
               <a:rPr lang="en-US" dirty="0"/>
               <a:t>• This is the pitch — attendees compare to their own hand-rolled RAG mentally
 • Four steps: plan, execute, rank, return
-• LLM planning is optional (minimal effort skips it) — next slide covers this
+• Planning only happens with an LLM attached to the KB at Low or Medium effort — next slide covers when to pick each level
 • Parallel execution is a real perf win over serial retrieve-then-rerank
 • The 'pipeline you get for free' framing lands the value prop</a:t>
             </a:r>
@@ -1708,11 +1708,12 @@
           <a:p>
             <a:r>
               <a:rPr lang="en-US" dirty="0"/>
-              <a:t>• Effort is per query — not fixed at agent level
-• Simple lookups use minimal; complex multi-hop uses medium
-• Attendees will overreach and use medium for everything — remind them of cost/latency
-• Preview label on low/medium — check current status
-• Real-world pattern: A/B test minimal vs. low on your actual query mix</a:t>
+              <a:t>• The big message: Low is the default, but Minimal is often better for agent-consumed IQ
+• Attendees will assume higher effort = better. Push back — the agent LLM does the reasoning at Minimal, you pay less and get lower latency
+• Query planning requires an LLM attached to the knowledge base at the KB level (not per-request)
+• Answer synthesis is separate from planning — you can have planning on and still return extractive data to feed the agent
+• Iterative retry is Medium-only, capped at one retry, uses a semantic classifier to decide if a retry is warranted
+• Source-per-KB limit is now 10 on all tiers in the current preview API (earlier preview versions capped Low at 3 and Medium at 5)</a:t>
             </a:r>
             <a:endParaRPr lang="en-US" dirty="0"/>
           </a:p>
@@ -3312,7 +3313,7 @@
                 <a:ea typeface="Calibri" pitchFamily="34" charset="-122"/>
                 <a:cs typeface="Calibri" pitchFamily="34" charset="-120"/>
               </a:rPr>
-              <a:t>IaC-first: create from code</a:t>
+              <a:t>Portal for learning, IaC for production</a:t>
             </a:r>
             <a:endParaRPr lang="en-US" sz="2800" dirty="0"/>
           </a:p>
@@ -3351,7 +3352,7 @@
                 <a:ea typeface="Calibri" pitchFamily="34" charset="-122"/>
                 <a:cs typeface="Calibri" pitchFamily="34" charset="-120"/>
               </a:rPr>
-              <a:t>Same operating norm as Day 1 — resource creation lives in code, not the portal.</a:t>
+              <a:t>Same operating norm as Day 1 — production resource creation lives in code, not the portal.</a:t>
             </a:r>
             <a:endParaRPr lang="en-US" sz="1400" dirty="0"/>
           </a:p>
@@ -3457,7 +3458,7 @@
                 <a:ea typeface="Calibri" pitchFamily="34" charset="-122"/>
                 <a:cs typeface="Calibri" pitchFamily="34" charset="-120"/>
               </a:rPr>
-              <a:t>Portal — fine for exploration; not the workshop path</a:t>
+              <a:t>Portal — fine for exploration; use it for today's lab so we don't spend the workshop on IaC</a:t>
             </a:r>
             <a:endParaRPr lang="en-US" sz="1500" dirty="0"/>
           </a:p>
@@ -3472,7 +3473,7 @@
         <p:spPr>
           <a:xfrm>
             <a:off x="365760" y="4160520"/>
-            <a:ext cx="8412480" cy="365760"/>
+            <a:ext cx="8412480" cy="640080"/>
           </a:xfrm>
           <a:prstGeom prst="rect">
             <a:avLst/>
@@ -3488,7 +3489,7 @@
               <a:buNone/>
             </a:pPr>
             <a:r>
-              <a:rPr lang="en-US" sz="1300" b="1" i="1" dirty="0">
+              <a:rPr lang="en-US" sz="1200" b="1" i="1" dirty="0">
                 <a:solidFill>
                   <a:srgbClr val="1E2761"/>
                 </a:solidFill>
@@ -3496,9 +3497,9 @@
                 <a:ea typeface="Calibri" pitchFamily="34" charset="-122"/>
                 <a:cs typeface="Calibri" pitchFamily="34" charset="-120"/>
               </a:rPr>
-              <a:t>You'll do the SDK path in today's lab.</a:t>
-            </a:r>
-            <a:endParaRPr lang="en-US" sz="1300" dirty="0"/>
+              <a:t>Today's lab uses the portal for the KB setup so you can focus on retrieval quality and agent behavior. Real production paths belong in IaC — that's the norm we set on Day 1.</a:t>
+            </a:r>
+            <a:endParaRPr lang="en-US" sz="1200" dirty="0"/>
           </a:p>
         </p:txBody>
       </p:sp>
@@ -8815,7 +8816,7 @@
                 <a:ea typeface="Calibri" pitchFamily="34" charset="-122"/>
                 <a:cs typeface="Calibri" pitchFamily="34" charset="-120"/>
               </a:rPr>
-              <a:t>Plan — an LLM (optional) decomposes the question into sub-queries and picks which sources to hit</a:t>
+              <a:t>Plan — at Low or Medium effort, an LLM decomposes the question into sub-queries and picks which sources to hit. At Minimal, this step is skipped and the raw query goes straight to every source.</a:t>
             </a:r>
             <a:endParaRPr lang="en-US" sz="1500" dirty="0"/>
           </a:p>
@@ -9047,22 +9048,1150 @@
                 <a:ea typeface="Calibri" pitchFamily="34" charset="-122"/>
                 <a:cs typeface="Calibri" pitchFamily="34" charset="-120"/>
               </a:rPr>
-              <a:t>Retrieval reasoning effort</a:t>
+              <a:t>Retrieval reasoning effort — pick the level per question</a:t>
             </a:r>
             <a:endParaRPr lang="en-US" sz="2800" dirty="0"/>
           </a:p>
         </p:txBody>
       </p:sp>
-      <p:sp>
-        <p:nvSpPr>
-          <p:cNvPr id="5" name="Text 3"/>
+      <p:graphicFrame>
+        <p:nvGraphicFramePr>
+          <p:cNvPr id="9" name="Table 0"/>
+          <p:cNvGraphicFramePr>
+            <a:graphicFrameLocks noGrp="1"/>
+          </p:cNvGraphicFramePr>
+          <p:nvPr>
+            <p:extLst>
+              <p:ext uri="{D42A27DB-BD31-4B8C-83A1-F6EECF244321}">
+                <p14:modId xmlns:p14="http://schemas.microsoft.com/office/powerpoint/2010/main" val="1579011935"/>
+              </p:ext>
+            </p:extLst>
+          </p:nvPr>
+        </p:nvGraphicFramePr>
+        <p:xfrm>
+          <a:off x="365760" y="1097280"/>
+          <a:ext cx="8412480" cy="914400"/>
+        </p:xfrm>
+        <a:graphic>
+          <a:graphicData uri="http://schemas.openxmlformats.org/drawingml/2006/table">
+            <a:tbl>
+              <a:tblPr/>
+              <a:tblGrid>
+                <a:gridCol w="1188720"/>
+                <a:gridCol w="1828800"/>
+                <a:gridCol w="1463040"/>
+                <a:gridCol w="3931920"/>
+              </a:tblGrid>
+              <a:tr h="320040">
+                <a:tc>
+                  <a:txBody>
+                    <a:bodyPr/>
+                    <a:lstStyle/>
+                    <a:p>
+                      <a:pPr indent="0" marL="0">
+                        <a:buNone/>
+                      </a:pPr>
+                      <a:r>
+                        <a:rPr lang="en-US" sz="1100" b="1" dirty="0">
+                          <a:solidFill>
+                            <a:srgbClr val="FFFFFF"/>
+                          </a:solidFill>
+                          <a:latin typeface="Calibri" pitchFamily="34" charset="0"/>
+                          <a:ea typeface="Calibri" pitchFamily="34" charset="-122"/>
+                          <a:cs typeface="Calibri" pitchFamily="34" charset="-120"/>
+                        </a:rPr>
+                        <a:t>Level</a:t>
+                      </a:r>
+                      <a:endParaRPr lang="en-US" sz="1100" dirty="0">
+                        <a:latin typeface="Calibri" charset="0"/>
+                        <a:ea typeface="Calibri" charset="0"/>
+                        <a:cs typeface="Calibri" charset="0"/>
+                      </a:endParaRPr>
+                    </a:p>
+                  </a:txBody>
+                  <a:tcPr marL="54864" marR="54864" marT="54864" marB="54864" anchor="ctr">
+                    <a:lnL w="6350" cap="flat" cmpd="sng" algn="ctr">
+                      <a:solidFill>
+                        <a:srgbClr val="D1D5DB"/>
+                      </a:solidFill>
+                      <a:prstDash val="solid"/>
+                      <a:round/>
+                      <a:headEnd type="none" w="med" len="med"/>
+                      <a:tailEnd type="none" w="med" len="med"/>
+                    </a:lnL>
+                    <a:lnR w="6350" cap="flat" cmpd="sng" algn="ctr">
+                      <a:solidFill>
+                        <a:srgbClr val="D1D5DB"/>
+                      </a:solidFill>
+                      <a:prstDash val="solid"/>
+                      <a:round/>
+                      <a:headEnd type="none" w="med" len="med"/>
+                      <a:tailEnd type="none" w="med" len="med"/>
+                    </a:lnR>
+                    <a:lnT w="6350" cap="flat" cmpd="sng" algn="ctr">
+                      <a:solidFill>
+                        <a:srgbClr val="D1D5DB"/>
+                      </a:solidFill>
+                      <a:prstDash val="solid"/>
+                      <a:round/>
+                      <a:headEnd type="none" w="med" len="med"/>
+                      <a:tailEnd type="none" w="med" len="med"/>
+                    </a:lnT>
+                    <a:lnB w="6350" cap="flat" cmpd="sng" algn="ctr">
+                      <a:solidFill>
+                        <a:srgbClr val="D1D5DB"/>
+                      </a:solidFill>
+                      <a:prstDash val="solid"/>
+                      <a:round/>
+                      <a:headEnd type="none" w="med" len="med"/>
+                      <a:tailEnd type="none" w="med" len="med"/>
+                    </a:lnB>
+                    <a:solidFill>
+                      <a:srgbClr val="1E2761"/>
+                    </a:solidFill>
+                  </a:tcPr>
+                </a:tc>
+                <a:tc>
+                  <a:txBody>
+                    <a:bodyPr/>
+                    <a:lstStyle/>
+                    <a:p>
+                      <a:pPr indent="0" marL="0">
+                        <a:buNone/>
+                      </a:pPr>
+                      <a:r>
+                        <a:rPr lang="en-US" sz="1100" b="1" dirty="0">
+                          <a:solidFill>
+                            <a:srgbClr val="FFFFFF"/>
+                          </a:solidFill>
+                          <a:latin typeface="Calibri" pitchFamily="34" charset="0"/>
+                          <a:ea typeface="Calibri" pitchFamily="34" charset="-122"/>
+                          <a:cs typeface="Calibri" pitchFamily="34" charset="-120"/>
+                        </a:rPr>
+                        <a:t>LLM planning</a:t>
+                      </a:r>
+                      <a:endParaRPr lang="en-US" sz="1100" dirty="0">
+                        <a:latin typeface="Calibri" charset="0"/>
+                        <a:ea typeface="Calibri" charset="0"/>
+                        <a:cs typeface="Calibri" charset="0"/>
+                      </a:endParaRPr>
+                    </a:p>
+                  </a:txBody>
+                  <a:tcPr marL="54864" marR="54864" marT="54864" marB="54864" anchor="ctr">
+                    <a:lnL w="6350" cap="flat" cmpd="sng" algn="ctr">
+                      <a:solidFill>
+                        <a:srgbClr val="D1D5DB"/>
+                      </a:solidFill>
+                      <a:prstDash val="solid"/>
+                      <a:round/>
+                      <a:headEnd type="none" w="med" len="med"/>
+                      <a:tailEnd type="none" w="med" len="med"/>
+                    </a:lnL>
+                    <a:lnR w="6350" cap="flat" cmpd="sng" algn="ctr">
+                      <a:solidFill>
+                        <a:srgbClr val="D1D5DB"/>
+                      </a:solidFill>
+                      <a:prstDash val="solid"/>
+                      <a:round/>
+                      <a:headEnd type="none" w="med" len="med"/>
+                      <a:tailEnd type="none" w="med" len="med"/>
+                    </a:lnR>
+                    <a:lnT w="6350" cap="flat" cmpd="sng" algn="ctr">
+                      <a:solidFill>
+                        <a:srgbClr val="D1D5DB"/>
+                      </a:solidFill>
+                      <a:prstDash val="solid"/>
+                      <a:round/>
+                      <a:headEnd type="none" w="med" len="med"/>
+                      <a:tailEnd type="none" w="med" len="med"/>
+                    </a:lnT>
+                    <a:lnB w="6350" cap="flat" cmpd="sng" algn="ctr">
+                      <a:solidFill>
+                        <a:srgbClr val="D1D5DB"/>
+                      </a:solidFill>
+                      <a:prstDash val="solid"/>
+                      <a:round/>
+                      <a:headEnd type="none" w="med" len="med"/>
+                      <a:tailEnd type="none" w="med" len="med"/>
+                    </a:lnB>
+                    <a:solidFill>
+                      <a:srgbClr val="1E2761"/>
+                    </a:solidFill>
+                  </a:tcPr>
+                </a:tc>
+                <a:tc>
+                  <a:txBody>
+                    <a:bodyPr/>
+                    <a:lstStyle/>
+                    <a:p>
+                      <a:pPr indent="0" marL="0">
+                        <a:buNone/>
+                      </a:pPr>
+                      <a:r>
+                        <a:rPr lang="en-US" sz="1100" b="1" dirty="0">
+                          <a:solidFill>
+                            <a:srgbClr val="FFFFFF"/>
+                          </a:solidFill>
+                          <a:latin typeface="Calibri" pitchFamily="34" charset="0"/>
+                          <a:ea typeface="Calibri" pitchFamily="34" charset="-122"/>
+                          <a:cs typeface="Calibri" pitchFamily="34" charset="-120"/>
+                        </a:rPr>
+                        <a:t>Answer synthesis</a:t>
+                      </a:r>
+                      <a:endParaRPr lang="en-US" sz="1100" dirty="0">
+                        <a:latin typeface="Calibri" charset="0"/>
+                        <a:ea typeface="Calibri" charset="0"/>
+                        <a:cs typeface="Calibri" charset="0"/>
+                      </a:endParaRPr>
+                    </a:p>
+                  </a:txBody>
+                  <a:tcPr marL="54864" marR="54864" marT="54864" marB="54864" anchor="ctr">
+                    <a:lnL w="6350" cap="flat" cmpd="sng" algn="ctr">
+                      <a:solidFill>
+                        <a:srgbClr val="D1D5DB"/>
+                      </a:solidFill>
+                      <a:prstDash val="solid"/>
+                      <a:round/>
+                      <a:headEnd type="none" w="med" len="med"/>
+                      <a:tailEnd type="none" w="med" len="med"/>
+                    </a:lnL>
+                    <a:lnR w="6350" cap="flat" cmpd="sng" algn="ctr">
+                      <a:solidFill>
+                        <a:srgbClr val="D1D5DB"/>
+                      </a:solidFill>
+                      <a:prstDash val="solid"/>
+                      <a:round/>
+                      <a:headEnd type="none" w="med" len="med"/>
+                      <a:tailEnd type="none" w="med" len="med"/>
+                    </a:lnR>
+                    <a:lnT w="6350" cap="flat" cmpd="sng" algn="ctr">
+                      <a:solidFill>
+                        <a:srgbClr val="D1D5DB"/>
+                      </a:solidFill>
+                      <a:prstDash val="solid"/>
+                      <a:round/>
+                      <a:headEnd type="none" w="med" len="med"/>
+                      <a:tailEnd type="none" w="med" len="med"/>
+                    </a:lnT>
+                    <a:lnB w="6350" cap="flat" cmpd="sng" algn="ctr">
+                      <a:solidFill>
+                        <a:srgbClr val="D1D5DB"/>
+                      </a:solidFill>
+                      <a:prstDash val="solid"/>
+                      <a:round/>
+                      <a:headEnd type="none" w="med" len="med"/>
+                      <a:tailEnd type="none" w="med" len="med"/>
+                    </a:lnB>
+                    <a:solidFill>
+                      <a:srgbClr val="1E2761"/>
+                    </a:solidFill>
+                  </a:tcPr>
+                </a:tc>
+                <a:tc>
+                  <a:txBody>
+                    <a:bodyPr/>
+                    <a:lstStyle/>
+                    <a:p>
+                      <a:pPr indent="0" marL="0">
+                        <a:buNone/>
+                      </a:pPr>
+                      <a:r>
+                        <a:rPr lang="en-US" sz="1100" b="1" dirty="0">
+                          <a:solidFill>
+                            <a:srgbClr val="FFFFFF"/>
+                          </a:solidFill>
+                          <a:latin typeface="Calibri" pitchFamily="34" charset="0"/>
+                          <a:ea typeface="Calibri" pitchFamily="34" charset="-122"/>
+                          <a:cs typeface="Calibri" pitchFamily="34" charset="-120"/>
+                        </a:rPr>
+                        <a:t>When to pick</a:t>
+                      </a:r>
+                      <a:endParaRPr lang="en-US" sz="1100" dirty="0">
+                        <a:latin typeface="Calibri" charset="0"/>
+                        <a:ea typeface="Calibri" charset="0"/>
+                        <a:cs typeface="Calibri" charset="0"/>
+                      </a:endParaRPr>
+                    </a:p>
+                  </a:txBody>
+                  <a:tcPr marL="54864" marR="54864" marT="54864" marB="54864" anchor="ctr">
+                    <a:lnL w="6350" cap="flat" cmpd="sng" algn="ctr">
+                      <a:solidFill>
+                        <a:srgbClr val="D1D5DB"/>
+                      </a:solidFill>
+                      <a:prstDash val="solid"/>
+                      <a:round/>
+                      <a:headEnd type="none" w="med" len="med"/>
+                      <a:tailEnd type="none" w="med" len="med"/>
+                    </a:lnL>
+                    <a:lnR w="6350" cap="flat" cmpd="sng" algn="ctr">
+                      <a:solidFill>
+                        <a:srgbClr val="D1D5DB"/>
+                      </a:solidFill>
+                      <a:prstDash val="solid"/>
+                      <a:round/>
+                      <a:headEnd type="none" w="med" len="med"/>
+                      <a:tailEnd type="none" w="med" len="med"/>
+                    </a:lnR>
+                    <a:lnT w="6350" cap="flat" cmpd="sng" algn="ctr">
+                      <a:solidFill>
+                        <a:srgbClr val="D1D5DB"/>
+                      </a:solidFill>
+                      <a:prstDash val="solid"/>
+                      <a:round/>
+                      <a:headEnd type="none" w="med" len="med"/>
+                      <a:tailEnd type="none" w="med" len="med"/>
+                    </a:lnT>
+                    <a:lnB w="6350" cap="flat" cmpd="sng" algn="ctr">
+                      <a:solidFill>
+                        <a:srgbClr val="D1D5DB"/>
+                      </a:solidFill>
+                      <a:prstDash val="solid"/>
+                      <a:round/>
+                      <a:headEnd type="none" w="med" len="med"/>
+                      <a:tailEnd type="none" w="med" len="med"/>
+                    </a:lnB>
+                    <a:solidFill>
+                      <a:srgbClr val="1E2761"/>
+                    </a:solidFill>
+                  </a:tcPr>
+                </a:tc>
+              </a:tr>
+              <a:tr h="320040">
+                <a:tc>
+                  <a:txBody>
+                    <a:bodyPr/>
+                    <a:lstStyle/>
+                    <a:p>
+                      <a:pPr indent="0" marL="0">
+                        <a:buNone/>
+                      </a:pPr>
+                      <a:r>
+                        <a:rPr lang="en-US" sz="1100" dirty="0">
+                          <a:solidFill>
+                            <a:srgbClr val="212121"/>
+                          </a:solidFill>
+                          <a:latin typeface="Calibri" pitchFamily="34" charset="0"/>
+                          <a:ea typeface="Calibri" pitchFamily="34" charset="-122"/>
+                          <a:cs typeface="Calibri" pitchFamily="34" charset="-120"/>
+                        </a:rPr>
+                        <a:t>minimal</a:t>
+                      </a:r>
+                      <a:endParaRPr lang="en-US" sz="1100" dirty="0">
+                        <a:latin typeface="Calibri" charset="0"/>
+                        <a:ea typeface="Calibri" charset="0"/>
+                        <a:cs typeface="Calibri" charset="0"/>
+                      </a:endParaRPr>
+                    </a:p>
+                  </a:txBody>
+                  <a:tcPr marL="54864" marR="54864" marT="54864" marB="54864" anchor="ctr">
+                    <a:lnL w="6350" cap="flat" cmpd="sng" algn="ctr">
+                      <a:solidFill>
+                        <a:srgbClr val="D1D5DB"/>
+                      </a:solidFill>
+                      <a:prstDash val="solid"/>
+                      <a:round/>
+                      <a:headEnd type="none" w="med" len="med"/>
+                      <a:tailEnd type="none" w="med" len="med"/>
+                    </a:lnL>
+                    <a:lnR w="6350" cap="flat" cmpd="sng" algn="ctr">
+                      <a:solidFill>
+                        <a:srgbClr val="D1D5DB"/>
+                      </a:solidFill>
+                      <a:prstDash val="solid"/>
+                      <a:round/>
+                      <a:headEnd type="none" w="med" len="med"/>
+                      <a:tailEnd type="none" w="med" len="med"/>
+                    </a:lnR>
+                    <a:lnT w="6350" cap="flat" cmpd="sng" algn="ctr">
+                      <a:solidFill>
+                        <a:srgbClr val="D1D5DB"/>
+                      </a:solidFill>
+                      <a:prstDash val="solid"/>
+                      <a:round/>
+                      <a:headEnd type="none" w="med" len="med"/>
+                      <a:tailEnd type="none" w="med" len="med"/>
+                    </a:lnT>
+                    <a:lnB w="6350" cap="flat" cmpd="sng" algn="ctr">
+                      <a:solidFill>
+                        <a:srgbClr val="D1D5DB"/>
+                      </a:solidFill>
+                      <a:prstDash val="solid"/>
+                      <a:round/>
+                      <a:headEnd type="none" w="med" len="med"/>
+                      <a:tailEnd type="none" w="med" len="med"/>
+                    </a:lnB>
+                    <a:solidFill>
+                      <a:srgbClr val="FFFFFF"/>
+                    </a:solidFill>
+                  </a:tcPr>
+                </a:tc>
+                <a:tc>
+                  <a:txBody>
+                    <a:bodyPr/>
+                    <a:lstStyle/>
+                    <a:p>
+                      <a:pPr indent="0" marL="0">
+                        <a:buNone/>
+                      </a:pPr>
+                      <a:r>
+                        <a:rPr lang="en-US" sz="1100" dirty="0">
+                          <a:solidFill>
+                            <a:srgbClr val="212121"/>
+                          </a:solidFill>
+                          <a:latin typeface="Calibri" pitchFamily="34" charset="0"/>
+                          <a:ea typeface="Calibri" pitchFamily="34" charset="-122"/>
+                          <a:cs typeface="Calibri" pitchFamily="34" charset="-120"/>
+                        </a:rPr>
+                        <a:t>No — single-shot search, all sources</a:t>
+                      </a:r>
+                      <a:endParaRPr lang="en-US" sz="1100" dirty="0">
+                        <a:latin typeface="Calibri" charset="0"/>
+                        <a:ea typeface="Calibri" charset="0"/>
+                        <a:cs typeface="Calibri" charset="0"/>
+                      </a:endParaRPr>
+                    </a:p>
+                  </a:txBody>
+                  <a:tcPr marL="54864" marR="54864" marT="54864" marB="54864" anchor="ctr">
+                    <a:lnL w="6350" cap="flat" cmpd="sng" algn="ctr">
+                      <a:solidFill>
+                        <a:srgbClr val="D1D5DB"/>
+                      </a:solidFill>
+                      <a:prstDash val="solid"/>
+                      <a:round/>
+                      <a:headEnd type="none" w="med" len="med"/>
+                      <a:tailEnd type="none" w="med" len="med"/>
+                    </a:lnL>
+                    <a:lnR w="6350" cap="flat" cmpd="sng" algn="ctr">
+                      <a:solidFill>
+                        <a:srgbClr val="D1D5DB"/>
+                      </a:solidFill>
+                      <a:prstDash val="solid"/>
+                      <a:round/>
+                      <a:headEnd type="none" w="med" len="med"/>
+                      <a:tailEnd type="none" w="med" len="med"/>
+                    </a:lnR>
+                    <a:lnT w="6350" cap="flat" cmpd="sng" algn="ctr">
+                      <a:solidFill>
+                        <a:srgbClr val="D1D5DB"/>
+                      </a:solidFill>
+                      <a:prstDash val="solid"/>
+                      <a:round/>
+                      <a:headEnd type="none" w="med" len="med"/>
+                      <a:tailEnd type="none" w="med" len="med"/>
+                    </a:lnT>
+                    <a:lnB w="6350" cap="flat" cmpd="sng" algn="ctr">
+                      <a:solidFill>
+                        <a:srgbClr val="D1D5DB"/>
+                      </a:solidFill>
+                      <a:prstDash val="solid"/>
+                      <a:round/>
+                      <a:headEnd type="none" w="med" len="med"/>
+                      <a:tailEnd type="none" w="med" len="med"/>
+                    </a:lnB>
+                    <a:solidFill>
+                      <a:srgbClr val="FFFFFF"/>
+                    </a:solidFill>
+                  </a:tcPr>
+                </a:tc>
+                <a:tc>
+                  <a:txBody>
+                    <a:bodyPr/>
+                    <a:lstStyle/>
+                    <a:p>
+                      <a:pPr indent="0" marL="0">
+                        <a:buNone/>
+                      </a:pPr>
+                      <a:r>
+                        <a:rPr lang="en-US" sz="1100" dirty="0">
+                          <a:solidFill>
+                            <a:srgbClr val="212121"/>
+                          </a:solidFill>
+                          <a:latin typeface="Calibri" pitchFamily="34" charset="0"/>
+                          <a:ea typeface="Calibri" pitchFamily="34" charset="-122"/>
+                          <a:cs typeface="Calibri" pitchFamily="34" charset="-120"/>
+                        </a:rPr>
+                        <a:t>No — extractive only</a:t>
+                      </a:r>
+                      <a:endParaRPr lang="en-US" sz="1100" dirty="0">
+                        <a:latin typeface="Calibri" charset="0"/>
+                        <a:ea typeface="Calibri" charset="0"/>
+                        <a:cs typeface="Calibri" charset="0"/>
+                      </a:endParaRPr>
+                    </a:p>
+                  </a:txBody>
+                  <a:tcPr marL="54864" marR="54864" marT="54864" marB="54864" anchor="ctr">
+                    <a:lnL w="6350" cap="flat" cmpd="sng" algn="ctr">
+                      <a:solidFill>
+                        <a:srgbClr val="D1D5DB"/>
+                      </a:solidFill>
+                      <a:prstDash val="solid"/>
+                      <a:round/>
+                      <a:headEnd type="none" w="med" len="med"/>
+                      <a:tailEnd type="none" w="med" len="med"/>
+                    </a:lnL>
+                    <a:lnR w="6350" cap="flat" cmpd="sng" algn="ctr">
+                      <a:solidFill>
+                        <a:srgbClr val="D1D5DB"/>
+                      </a:solidFill>
+                      <a:prstDash val="solid"/>
+                      <a:round/>
+                      <a:headEnd type="none" w="med" len="med"/>
+                      <a:tailEnd type="none" w="med" len="med"/>
+                    </a:lnR>
+                    <a:lnT w="6350" cap="flat" cmpd="sng" algn="ctr">
+                      <a:solidFill>
+                        <a:srgbClr val="D1D5DB"/>
+                      </a:solidFill>
+                      <a:prstDash val="solid"/>
+                      <a:round/>
+                      <a:headEnd type="none" w="med" len="med"/>
+                      <a:tailEnd type="none" w="med" len="med"/>
+                    </a:lnT>
+                    <a:lnB w="6350" cap="flat" cmpd="sng" algn="ctr">
+                      <a:solidFill>
+                        <a:srgbClr val="D1D5DB"/>
+                      </a:solidFill>
+                      <a:prstDash val="solid"/>
+                      <a:round/>
+                      <a:headEnd type="none" w="med" len="med"/>
+                      <a:tailEnd type="none" w="med" len="med"/>
+                    </a:lnB>
+                    <a:solidFill>
+                      <a:srgbClr val="FFFFFF"/>
+                    </a:solidFill>
+                  </a:tcPr>
+                </a:tc>
+                <a:tc>
+                  <a:txBody>
+                    <a:bodyPr/>
+                    <a:lstStyle/>
+                    <a:p>
+                      <a:pPr indent="0" marL="0">
+                        <a:buNone/>
+                      </a:pPr>
+                      <a:r>
+                        <a:rPr lang="en-US" sz="1100" dirty="0">
+                          <a:solidFill>
+                            <a:srgbClr val="212121"/>
+                          </a:solidFill>
+                          <a:latin typeface="Calibri" pitchFamily="34" charset="0"/>
+                          <a:ea typeface="Calibri" pitchFamily="34" charset="-122"/>
+                          <a:cs typeface="Calibri" pitchFamily="34" charset="-120"/>
+                        </a:rPr>
+                        <a:t>Predictable, low latency, low cost. Often the right answer for agent-consumed IQ — your agent's own model does the reasoning</a:t>
+                      </a:r>
+                      <a:endParaRPr lang="en-US" sz="1100" dirty="0">
+                        <a:latin typeface="Calibri" charset="0"/>
+                        <a:ea typeface="Calibri" charset="0"/>
+                        <a:cs typeface="Calibri" charset="0"/>
+                      </a:endParaRPr>
+                    </a:p>
+                  </a:txBody>
+                  <a:tcPr marL="54864" marR="54864" marT="54864" marB="54864" anchor="ctr">
+                    <a:lnL w="6350" cap="flat" cmpd="sng" algn="ctr">
+                      <a:solidFill>
+                        <a:srgbClr val="D1D5DB"/>
+                      </a:solidFill>
+                      <a:prstDash val="solid"/>
+                      <a:round/>
+                      <a:headEnd type="none" w="med" len="med"/>
+                      <a:tailEnd type="none" w="med" len="med"/>
+                    </a:lnL>
+                    <a:lnR w="6350" cap="flat" cmpd="sng" algn="ctr">
+                      <a:solidFill>
+                        <a:srgbClr val="D1D5DB"/>
+                      </a:solidFill>
+                      <a:prstDash val="solid"/>
+                      <a:round/>
+                      <a:headEnd type="none" w="med" len="med"/>
+                      <a:tailEnd type="none" w="med" len="med"/>
+                    </a:lnR>
+                    <a:lnT w="6350" cap="flat" cmpd="sng" algn="ctr">
+                      <a:solidFill>
+                        <a:srgbClr val="D1D5DB"/>
+                      </a:solidFill>
+                      <a:prstDash val="solid"/>
+                      <a:round/>
+                      <a:headEnd type="none" w="med" len="med"/>
+                      <a:tailEnd type="none" w="med" len="med"/>
+                    </a:lnT>
+                    <a:lnB w="6350" cap="flat" cmpd="sng" algn="ctr">
+                      <a:solidFill>
+                        <a:srgbClr val="D1D5DB"/>
+                      </a:solidFill>
+                      <a:prstDash val="solid"/>
+                      <a:round/>
+                      <a:headEnd type="none" w="med" len="med"/>
+                      <a:tailEnd type="none" w="med" len="med"/>
+                    </a:lnB>
+                    <a:solidFill>
+                      <a:srgbClr val="FFFFFF"/>
+                    </a:solidFill>
+                  </a:tcPr>
+                </a:tc>
+              </a:tr>
+              <a:tr h="320040">
+                <a:tc>
+                  <a:txBody>
+                    <a:bodyPr/>
+                    <a:lstStyle/>
+                    <a:p>
+                      <a:pPr indent="0" marL="0">
+                        <a:buNone/>
+                      </a:pPr>
+                      <a:r>
+                        <a:rPr lang="en-US" sz="1100" dirty="0">
+                          <a:solidFill>
+                            <a:srgbClr val="212121"/>
+                          </a:solidFill>
+                          <a:latin typeface="Calibri" pitchFamily="34" charset="0"/>
+                          <a:ea typeface="Calibri" pitchFamily="34" charset="-122"/>
+                          <a:cs typeface="Calibri" pitchFamily="34" charset="-120"/>
+                        </a:rPr>
+                        <a:t>low (default)</a:t>
+                      </a:r>
+                      <a:endParaRPr lang="en-US" sz="1100" dirty="0">
+                        <a:latin typeface="Calibri" charset="0"/>
+                        <a:ea typeface="Calibri" charset="0"/>
+                        <a:cs typeface="Calibri" charset="0"/>
+                      </a:endParaRPr>
+                    </a:p>
+                  </a:txBody>
+                  <a:tcPr marL="54864" marR="54864" marT="54864" marB="54864" anchor="ctr">
+                    <a:lnL w="6350" cap="flat" cmpd="sng" algn="ctr">
+                      <a:solidFill>
+                        <a:srgbClr val="D1D5DB"/>
+                      </a:solidFill>
+                      <a:prstDash val="solid"/>
+                      <a:round/>
+                      <a:headEnd type="none" w="med" len="med"/>
+                      <a:tailEnd type="none" w="med" len="med"/>
+                    </a:lnL>
+                    <a:lnR w="6350" cap="flat" cmpd="sng" algn="ctr">
+                      <a:solidFill>
+                        <a:srgbClr val="D1D5DB"/>
+                      </a:solidFill>
+                      <a:prstDash val="solid"/>
+                      <a:round/>
+                      <a:headEnd type="none" w="med" len="med"/>
+                      <a:tailEnd type="none" w="med" len="med"/>
+                    </a:lnR>
+                    <a:lnT w="6350" cap="flat" cmpd="sng" algn="ctr">
+                      <a:solidFill>
+                        <a:srgbClr val="D1D5DB"/>
+                      </a:solidFill>
+                      <a:prstDash val="solid"/>
+                      <a:round/>
+                      <a:headEnd type="none" w="med" len="med"/>
+                      <a:tailEnd type="none" w="med" len="med"/>
+                    </a:lnT>
+                    <a:lnB w="6350" cap="flat" cmpd="sng" algn="ctr">
+                      <a:solidFill>
+                        <a:srgbClr val="D1D5DB"/>
+                      </a:solidFill>
+                      <a:prstDash val="solid"/>
+                      <a:round/>
+                      <a:headEnd type="none" w="med" len="med"/>
+                      <a:tailEnd type="none" w="med" len="med"/>
+                    </a:lnB>
+                    <a:solidFill>
+                      <a:srgbClr val="F3F4F6"/>
+                    </a:solidFill>
+                  </a:tcPr>
+                </a:tc>
+                <a:tc>
+                  <a:txBody>
+                    <a:bodyPr/>
+                    <a:lstStyle/>
+                    <a:p>
+                      <a:pPr indent="0" marL="0">
+                        <a:buNone/>
+                      </a:pPr>
+                      <a:r>
+                        <a:rPr lang="en-US" sz="1100" dirty="0">
+                          <a:solidFill>
+                            <a:srgbClr val="212121"/>
+                          </a:solidFill>
+                          <a:latin typeface="Calibri" pitchFamily="34" charset="0"/>
+                          <a:ea typeface="Calibri" pitchFamily="34" charset="-122"/>
+                          <a:cs typeface="Calibri" pitchFamily="34" charset="-120"/>
+                        </a:rPr>
+                        <a:t>Yes — one planning pass</a:t>
+                      </a:r>
+                      <a:endParaRPr lang="en-US" sz="1100" dirty="0">
+                        <a:latin typeface="Calibri" charset="0"/>
+                        <a:ea typeface="Calibri" charset="0"/>
+                        <a:cs typeface="Calibri" charset="0"/>
+                      </a:endParaRPr>
+                    </a:p>
+                  </a:txBody>
+                  <a:tcPr marL="54864" marR="54864" marT="54864" marB="54864" anchor="ctr">
+                    <a:lnL w="6350" cap="flat" cmpd="sng" algn="ctr">
+                      <a:solidFill>
+                        <a:srgbClr val="D1D5DB"/>
+                      </a:solidFill>
+                      <a:prstDash val="solid"/>
+                      <a:round/>
+                      <a:headEnd type="none" w="med" len="med"/>
+                      <a:tailEnd type="none" w="med" len="med"/>
+                    </a:lnL>
+                    <a:lnR w="6350" cap="flat" cmpd="sng" algn="ctr">
+                      <a:solidFill>
+                        <a:srgbClr val="D1D5DB"/>
+                      </a:solidFill>
+                      <a:prstDash val="solid"/>
+                      <a:round/>
+                      <a:headEnd type="none" w="med" len="med"/>
+                      <a:tailEnd type="none" w="med" len="med"/>
+                    </a:lnR>
+                    <a:lnT w="6350" cap="flat" cmpd="sng" algn="ctr">
+                      <a:solidFill>
+                        <a:srgbClr val="D1D5DB"/>
+                      </a:solidFill>
+                      <a:prstDash val="solid"/>
+                      <a:round/>
+                      <a:headEnd type="none" w="med" len="med"/>
+                      <a:tailEnd type="none" w="med" len="med"/>
+                    </a:lnT>
+                    <a:lnB w="6350" cap="flat" cmpd="sng" algn="ctr">
+                      <a:solidFill>
+                        <a:srgbClr val="D1D5DB"/>
+                      </a:solidFill>
+                      <a:prstDash val="solid"/>
+                      <a:round/>
+                      <a:headEnd type="none" w="med" len="med"/>
+                      <a:tailEnd type="none" w="med" len="med"/>
+                    </a:lnB>
+                    <a:solidFill>
+                      <a:srgbClr val="F3F4F6"/>
+                    </a:solidFill>
+                  </a:tcPr>
+                </a:tc>
+                <a:tc>
+                  <a:txBody>
+                    <a:bodyPr/>
+                    <a:lstStyle/>
+                    <a:p>
+                      <a:pPr indent="0" marL="0">
+                        <a:buNone/>
+                      </a:pPr>
+                      <a:r>
+                        <a:rPr lang="en-US" sz="1100" dirty="0">
+                          <a:solidFill>
+                            <a:srgbClr val="212121"/>
+                          </a:solidFill>
+                          <a:latin typeface="Calibri" pitchFamily="34" charset="0"/>
+                          <a:ea typeface="Calibri" pitchFamily="34" charset="-122"/>
+                          <a:cs typeface="Calibri" pitchFamily="34" charset="-120"/>
+                        </a:rPr>
+                        <a:t>Optional (5K tokens)</a:t>
+                      </a:r>
+                      <a:endParaRPr lang="en-US" sz="1100" dirty="0">
+                        <a:latin typeface="Calibri" charset="0"/>
+                        <a:ea typeface="Calibri" charset="0"/>
+                        <a:cs typeface="Calibri" charset="0"/>
+                      </a:endParaRPr>
+                    </a:p>
+                  </a:txBody>
+                  <a:tcPr marL="54864" marR="54864" marT="54864" marB="54864" anchor="ctr">
+                    <a:lnL w="6350" cap="flat" cmpd="sng" algn="ctr">
+                      <a:solidFill>
+                        <a:srgbClr val="D1D5DB"/>
+                      </a:solidFill>
+                      <a:prstDash val="solid"/>
+                      <a:round/>
+                      <a:headEnd type="none" w="med" len="med"/>
+                      <a:tailEnd type="none" w="med" len="med"/>
+                    </a:lnL>
+                    <a:lnR w="6350" cap="flat" cmpd="sng" algn="ctr">
+                      <a:solidFill>
+                        <a:srgbClr val="D1D5DB"/>
+                      </a:solidFill>
+                      <a:prstDash val="solid"/>
+                      <a:round/>
+                      <a:headEnd type="none" w="med" len="med"/>
+                      <a:tailEnd type="none" w="med" len="med"/>
+                    </a:lnR>
+                    <a:lnT w="6350" cap="flat" cmpd="sng" algn="ctr">
+                      <a:solidFill>
+                        <a:srgbClr val="D1D5DB"/>
+                      </a:solidFill>
+                      <a:prstDash val="solid"/>
+                      <a:round/>
+                      <a:headEnd type="none" w="med" len="med"/>
+                      <a:tailEnd type="none" w="med" len="med"/>
+                    </a:lnT>
+                    <a:lnB w="6350" cap="flat" cmpd="sng" algn="ctr">
+                      <a:solidFill>
+                        <a:srgbClr val="D1D5DB"/>
+                      </a:solidFill>
+                      <a:prstDash val="solid"/>
+                      <a:round/>
+                      <a:headEnd type="none" w="med" len="med"/>
+                      <a:tailEnd type="none" w="med" len="med"/>
+                    </a:lnB>
+                    <a:solidFill>
+                      <a:srgbClr val="F3F4F6"/>
+                    </a:solidFill>
+                  </a:tcPr>
+                </a:tc>
+                <a:tc>
+                  <a:txBody>
+                    <a:bodyPr/>
+                    <a:lstStyle/>
+                    <a:p>
+                      <a:pPr indent="0" marL="0">
+                        <a:buNone/>
+                      </a:pPr>
+                      <a:r>
+                        <a:rPr lang="en-US" sz="1100" dirty="0">
+                          <a:solidFill>
+                            <a:srgbClr val="212121"/>
+                          </a:solidFill>
+                          <a:latin typeface="Calibri" pitchFamily="34" charset="0"/>
+                          <a:ea typeface="Calibri" pitchFamily="34" charset="-122"/>
+                          <a:cs typeface="Calibri" pitchFamily="34" charset="-120"/>
+                        </a:rPr>
+                        <a:t>Balance of latency and depth. Good starting point for most labs</a:t>
+                      </a:r>
+                      <a:endParaRPr lang="en-US" sz="1100" dirty="0">
+                        <a:latin typeface="Calibri" charset="0"/>
+                        <a:ea typeface="Calibri" charset="0"/>
+                        <a:cs typeface="Calibri" charset="0"/>
+                      </a:endParaRPr>
+                    </a:p>
+                  </a:txBody>
+                  <a:tcPr marL="54864" marR="54864" marT="54864" marB="54864" anchor="ctr">
+                    <a:lnL w="6350" cap="flat" cmpd="sng" algn="ctr">
+                      <a:solidFill>
+                        <a:srgbClr val="D1D5DB"/>
+                      </a:solidFill>
+                      <a:prstDash val="solid"/>
+                      <a:round/>
+                      <a:headEnd type="none" w="med" len="med"/>
+                      <a:tailEnd type="none" w="med" len="med"/>
+                    </a:lnL>
+                    <a:lnR w="6350" cap="flat" cmpd="sng" algn="ctr">
+                      <a:solidFill>
+                        <a:srgbClr val="D1D5DB"/>
+                      </a:solidFill>
+                      <a:prstDash val="solid"/>
+                      <a:round/>
+                      <a:headEnd type="none" w="med" len="med"/>
+                      <a:tailEnd type="none" w="med" len="med"/>
+                    </a:lnR>
+                    <a:lnT w="6350" cap="flat" cmpd="sng" algn="ctr">
+                      <a:solidFill>
+                        <a:srgbClr val="D1D5DB"/>
+                      </a:solidFill>
+                      <a:prstDash val="solid"/>
+                      <a:round/>
+                      <a:headEnd type="none" w="med" len="med"/>
+                      <a:tailEnd type="none" w="med" len="med"/>
+                    </a:lnT>
+                    <a:lnB w="6350" cap="flat" cmpd="sng" algn="ctr">
+                      <a:solidFill>
+                        <a:srgbClr val="D1D5DB"/>
+                      </a:solidFill>
+                      <a:prstDash val="solid"/>
+                      <a:round/>
+                      <a:headEnd type="none" w="med" len="med"/>
+                      <a:tailEnd type="none" w="med" len="med"/>
+                    </a:lnB>
+                    <a:solidFill>
+                      <a:srgbClr val="F3F4F6"/>
+                    </a:solidFill>
+                  </a:tcPr>
+                </a:tc>
+              </a:tr>
+              <a:tr h="320040">
+                <a:tc>
+                  <a:txBody>
+                    <a:bodyPr/>
+                    <a:lstStyle/>
+                    <a:p>
+                      <a:pPr indent="0" marL="0">
+                        <a:buNone/>
+                      </a:pPr>
+                      <a:r>
+                        <a:rPr lang="en-US" sz="1100" dirty="0">
+                          <a:solidFill>
+                            <a:srgbClr val="212121"/>
+                          </a:solidFill>
+                          <a:latin typeface="Calibri" pitchFamily="34" charset="0"/>
+                          <a:ea typeface="Calibri" pitchFamily="34" charset="-122"/>
+                          <a:cs typeface="Calibri" pitchFamily="34" charset="-120"/>
+                        </a:rPr>
+                        <a:t>medium</a:t>
+                      </a:r>
+                      <a:endParaRPr lang="en-US" sz="1100" dirty="0">
+                        <a:latin typeface="Calibri" charset="0"/>
+                        <a:ea typeface="Calibri" charset="0"/>
+                        <a:cs typeface="Calibri" charset="0"/>
+                      </a:endParaRPr>
+                    </a:p>
+                  </a:txBody>
+                  <a:tcPr marL="54864" marR="54864" marT="54864" marB="54864" anchor="ctr">
+                    <a:lnL w="6350" cap="flat" cmpd="sng" algn="ctr">
+                      <a:solidFill>
+                        <a:srgbClr val="D1D5DB"/>
+                      </a:solidFill>
+                      <a:prstDash val="solid"/>
+                      <a:round/>
+                      <a:headEnd type="none" w="med" len="med"/>
+                      <a:tailEnd type="none" w="med" len="med"/>
+                    </a:lnL>
+                    <a:lnR w="6350" cap="flat" cmpd="sng" algn="ctr">
+                      <a:solidFill>
+                        <a:srgbClr val="D1D5DB"/>
+                      </a:solidFill>
+                      <a:prstDash val="solid"/>
+                      <a:round/>
+                      <a:headEnd type="none" w="med" len="med"/>
+                      <a:tailEnd type="none" w="med" len="med"/>
+                    </a:lnR>
+                    <a:lnT w="6350" cap="flat" cmpd="sng" algn="ctr">
+                      <a:solidFill>
+                        <a:srgbClr val="D1D5DB"/>
+                      </a:solidFill>
+                      <a:prstDash val="solid"/>
+                      <a:round/>
+                      <a:headEnd type="none" w="med" len="med"/>
+                      <a:tailEnd type="none" w="med" len="med"/>
+                    </a:lnT>
+                    <a:lnB w="6350" cap="flat" cmpd="sng" algn="ctr">
+                      <a:solidFill>
+                        <a:srgbClr val="D1D5DB"/>
+                      </a:solidFill>
+                      <a:prstDash val="solid"/>
+                      <a:round/>
+                      <a:headEnd type="none" w="med" len="med"/>
+                      <a:tailEnd type="none" w="med" len="med"/>
+                    </a:lnB>
+                    <a:solidFill>
+                      <a:srgbClr val="FFFFFF"/>
+                    </a:solidFill>
+                  </a:tcPr>
+                </a:tc>
+                <a:tc>
+                  <a:txBody>
+                    <a:bodyPr/>
+                    <a:lstStyle/>
+                    <a:p>
+                      <a:pPr indent="0" marL="0">
+                        <a:buNone/>
+                      </a:pPr>
+                      <a:r>
+                        <a:rPr lang="en-US" sz="1100" dirty="0">
+                          <a:solidFill>
+                            <a:srgbClr val="212121"/>
+                          </a:solidFill>
+                          <a:latin typeface="Calibri" pitchFamily="34" charset="0"/>
+                          <a:ea typeface="Calibri" pitchFamily="34" charset="-122"/>
+                          <a:cs typeface="Calibri" pitchFamily="34" charset="-120"/>
+                        </a:rPr>
+                        <a:t>Yes — planning plus one iterative retry</a:t>
+                      </a:r>
+                      <a:endParaRPr lang="en-US" sz="1100" dirty="0">
+                        <a:latin typeface="Calibri" charset="0"/>
+                        <a:ea typeface="Calibri" charset="0"/>
+                        <a:cs typeface="Calibri" charset="0"/>
+                      </a:endParaRPr>
+                    </a:p>
+                  </a:txBody>
+                  <a:tcPr marL="54864" marR="54864" marT="54864" marB="54864" anchor="ctr">
+                    <a:lnL w="6350" cap="flat" cmpd="sng" algn="ctr">
+                      <a:solidFill>
+                        <a:srgbClr val="D1D5DB"/>
+                      </a:solidFill>
+                      <a:prstDash val="solid"/>
+                      <a:round/>
+                      <a:headEnd type="none" w="med" len="med"/>
+                      <a:tailEnd type="none" w="med" len="med"/>
+                    </a:lnL>
+                    <a:lnR w="6350" cap="flat" cmpd="sng" algn="ctr">
+                      <a:solidFill>
+                        <a:srgbClr val="D1D5DB"/>
+                      </a:solidFill>
+                      <a:prstDash val="solid"/>
+                      <a:round/>
+                      <a:headEnd type="none" w="med" len="med"/>
+                      <a:tailEnd type="none" w="med" len="med"/>
+                    </a:lnR>
+                    <a:lnT w="6350" cap="flat" cmpd="sng" algn="ctr">
+                      <a:solidFill>
+                        <a:srgbClr val="D1D5DB"/>
+                      </a:solidFill>
+                      <a:prstDash val="solid"/>
+                      <a:round/>
+                      <a:headEnd type="none" w="med" len="med"/>
+                      <a:tailEnd type="none" w="med" len="med"/>
+                    </a:lnT>
+                    <a:lnB w="6350" cap="flat" cmpd="sng" algn="ctr">
+                      <a:solidFill>
+                        <a:srgbClr val="D1D5DB"/>
+                      </a:solidFill>
+                      <a:prstDash val="solid"/>
+                      <a:round/>
+                      <a:headEnd type="none" w="med" len="med"/>
+                      <a:tailEnd type="none" w="med" len="med"/>
+                    </a:lnB>
+                    <a:solidFill>
+                      <a:srgbClr val="FFFFFF"/>
+                    </a:solidFill>
+                  </a:tcPr>
+                </a:tc>
+                <a:tc>
+                  <a:txBody>
+                    <a:bodyPr/>
+                    <a:lstStyle/>
+                    <a:p>
+                      <a:pPr indent="0" marL="0">
+                        <a:buNone/>
+                      </a:pPr>
+                      <a:r>
+                        <a:rPr lang="en-US" sz="1100" dirty="0">
+                          <a:solidFill>
+                            <a:srgbClr val="212121"/>
+                          </a:solidFill>
+                          <a:latin typeface="Calibri" pitchFamily="34" charset="0"/>
+                          <a:ea typeface="Calibri" pitchFamily="34" charset="-122"/>
+                          <a:cs typeface="Calibri" pitchFamily="34" charset="-120"/>
+                        </a:rPr>
+                        <a:t>Optional (10K tokens)</a:t>
+                      </a:r>
+                      <a:endParaRPr lang="en-US" sz="1100" dirty="0">
+                        <a:latin typeface="Calibri" charset="0"/>
+                        <a:ea typeface="Calibri" charset="0"/>
+                        <a:cs typeface="Calibri" charset="0"/>
+                      </a:endParaRPr>
+                    </a:p>
+                  </a:txBody>
+                  <a:tcPr marL="54864" marR="54864" marT="54864" marB="54864" anchor="ctr">
+                    <a:lnL w="6350" cap="flat" cmpd="sng" algn="ctr">
+                      <a:solidFill>
+                        <a:srgbClr val="D1D5DB"/>
+                      </a:solidFill>
+                      <a:prstDash val="solid"/>
+                      <a:round/>
+                      <a:headEnd type="none" w="med" len="med"/>
+                      <a:tailEnd type="none" w="med" len="med"/>
+                    </a:lnL>
+                    <a:lnR w="6350" cap="flat" cmpd="sng" algn="ctr">
+                      <a:solidFill>
+                        <a:srgbClr val="D1D5DB"/>
+                      </a:solidFill>
+                      <a:prstDash val="solid"/>
+                      <a:round/>
+                      <a:headEnd type="none" w="med" len="med"/>
+                      <a:tailEnd type="none" w="med" len="med"/>
+                    </a:lnR>
+                    <a:lnT w="6350" cap="flat" cmpd="sng" algn="ctr">
+                      <a:solidFill>
+                        <a:srgbClr val="D1D5DB"/>
+                      </a:solidFill>
+                      <a:prstDash val="solid"/>
+                      <a:round/>
+                      <a:headEnd type="none" w="med" len="med"/>
+                      <a:tailEnd type="none" w="med" len="med"/>
+                    </a:lnT>
+                    <a:lnB w="6350" cap="flat" cmpd="sng" algn="ctr">
+                      <a:solidFill>
+                        <a:srgbClr val="D1D5DB"/>
+                      </a:solidFill>
+                      <a:prstDash val="solid"/>
+                      <a:round/>
+                      <a:headEnd type="none" w="med" len="med"/>
+                      <a:tailEnd type="none" w="med" len="med"/>
+                    </a:lnB>
+                    <a:solidFill>
+                      <a:srgbClr val="FFFFFF"/>
+                    </a:solidFill>
+                  </a:tcPr>
+                </a:tc>
+                <a:tc>
+                  <a:txBody>
+                    <a:bodyPr/>
+                    <a:lstStyle/>
+                    <a:p>
+                      <a:pPr indent="0" marL="0">
+                        <a:buNone/>
+                      </a:pPr>
+                      <a:r>
+                        <a:rPr lang="en-US" sz="1100" dirty="0">
+                          <a:solidFill>
+                            <a:srgbClr val="212121"/>
+                          </a:solidFill>
+                          <a:latin typeface="Calibri" pitchFamily="34" charset="0"/>
+                          <a:ea typeface="Calibri" pitchFamily="34" charset="-122"/>
+                          <a:cs typeface="Calibri" pitchFamily="34" charset="-120"/>
+                        </a:rPr>
+                        <a:t>Deep multi-hop questions where recall matters. Select regions only</a:t>
+                      </a:r>
+                      <a:endParaRPr lang="en-US" sz="1100" dirty="0">
+                        <a:latin typeface="Calibri" charset="0"/>
+                        <a:ea typeface="Calibri" charset="0"/>
+                        <a:cs typeface="Calibri" charset="0"/>
+                      </a:endParaRPr>
+                    </a:p>
+                  </a:txBody>
+                  <a:tcPr marL="54864" marR="54864" marT="54864" marB="54864" anchor="ctr">
+                    <a:lnL w="6350" cap="flat" cmpd="sng" algn="ctr">
+                      <a:solidFill>
+                        <a:srgbClr val="D1D5DB"/>
+                      </a:solidFill>
+                      <a:prstDash val="solid"/>
+                      <a:round/>
+                      <a:headEnd type="none" w="med" len="med"/>
+                      <a:tailEnd type="none" w="med" len="med"/>
+                    </a:lnL>
+                    <a:lnR w="6350" cap="flat" cmpd="sng" algn="ctr">
+                      <a:solidFill>
+                        <a:srgbClr val="D1D5DB"/>
+                      </a:solidFill>
+                      <a:prstDash val="solid"/>
+                      <a:round/>
+                      <a:headEnd type="none" w="med" len="med"/>
+                      <a:tailEnd type="none" w="med" len="med"/>
+                    </a:lnR>
+                    <a:lnT w="6350" cap="flat" cmpd="sng" algn="ctr">
+                      <a:solidFill>
+                        <a:srgbClr val="D1D5DB"/>
+                      </a:solidFill>
+                      <a:prstDash val="solid"/>
+                      <a:round/>
+                      <a:headEnd type="none" w="med" len="med"/>
+                      <a:tailEnd type="none" w="med" len="med"/>
+                    </a:lnT>
+                    <a:lnB w="6350" cap="flat" cmpd="sng" algn="ctr">
+                      <a:solidFill>
+                        <a:srgbClr val="D1D5DB"/>
+                      </a:solidFill>
+                      <a:prstDash val="solid"/>
+                      <a:round/>
+                      <a:headEnd type="none" w="med" len="med"/>
+                      <a:tailEnd type="none" w="med" len="med"/>
+                    </a:lnB>
+                    <a:solidFill>
+                      <a:srgbClr val="FFFFFF"/>
+                    </a:solidFill>
+                  </a:tcPr>
+                </a:tc>
+              </a:tr>
+            </a:tbl>
+          </a:graphicData>
+        </a:graphic>
+      </p:graphicFrame>
+      <p:sp>
+        <p:nvSpPr>
+          <p:cNvPr id="6" name="Text 3"/>
           <p:cNvSpPr/>
           <p:nvPr/>
         </p:nvSpPr>
         <p:spPr>
           <a:xfrm>
-            <a:off x="365760" y="1051560"/>
-            <a:ext cx="8412480" cy="365760"/>
+            <a:off x="365760" y="3794760"/>
+            <a:ext cx="8412480" cy="320040"/>
           </a:xfrm>
           <a:prstGeom prst="rect">
             <a:avLst/>
@@ -9078,30 +10207,30 @@
               <a:buNone/>
             </a:pPr>
             <a:r>
-              <a:rPr lang="en-US" sz="1500" dirty="0">
-                <a:solidFill>
-                  <a:srgbClr val="212121"/>
+              <a:rPr lang="en-US" sz="1200" i="1" dirty="0">
+                <a:solidFill>
+                  <a:srgbClr val="6B7280"/>
                 </a:solidFill>
                 <a:latin typeface="Calibri" pitchFamily="34" charset="0"/>
                 <a:ea typeface="Calibri" pitchFamily="34" charset="-122"/>
                 <a:cs typeface="Calibri" pitchFamily="34" charset="-120"/>
               </a:rPr>
-              <a:t>You control how much LLM planning happens per query.</a:t>
-            </a:r>
-            <a:endParaRPr lang="en-US" sz="1500" dirty="0"/>
+              <a:t>Up to 10 knowledge sources per KB on all tiers (2026-05-01-preview).</a:t>
+            </a:r>
+            <a:endParaRPr lang="en-US" sz="1200" dirty="0"/>
           </a:p>
         </p:txBody>
       </p:sp>
       <p:sp>
         <p:nvSpPr>
-          <p:cNvPr id="6" name="Text 4"/>
+          <p:cNvPr id="7" name="Text 4"/>
           <p:cNvSpPr/>
           <p:nvPr/>
         </p:nvSpPr>
         <p:spPr>
           <a:xfrm>
-            <a:off x="365760" y="1554480"/>
-            <a:ext cx="8412480" cy="2011680"/>
+            <a:off x="365760" y="4160520"/>
+            <a:ext cx="8412480" cy="320040"/>
           </a:xfrm>
           <a:prstGeom prst="rect">
             <a:avLst/>
@@ -9113,112 +10242,27 @@
           <a:bodyPr wrap="square" rtlCol="0" anchor="ctr"/>
           <a:lstStyle/>
           <a:p>
-            <a:pPr marL="342900" indent="-342900">
-              <a:spcAft>
-                <a:spcPts val="600"/>
-              </a:spcAft>
-              <a:buSzPct val="100000"/>
-              <a:buChar char="•"/>
-            </a:pPr>
-            <a:r>
-              <a:rPr lang="en-US" sz="1500" dirty="0">
-                <a:solidFill>
-                  <a:srgbClr val="212121"/>
+            <a:pPr indent="0" marL="0">
+              <a:buNone/>
+            </a:pPr>
+            <a:r>
+              <a:rPr lang="en-US" sz="1200" i="1" dirty="0">
+                <a:solidFill>
+                  <a:srgbClr val="6B7280"/>
                 </a:solidFill>
                 <a:latin typeface="Calibri" pitchFamily="34" charset="0"/>
                 <a:ea typeface="Calibri" pitchFamily="34" charset="-122"/>
                 <a:cs typeface="Calibri" pitchFamily="34" charset="-120"/>
               </a:rPr>
-              <a:t>minimal — no LLM planning. Fast, cheap. One direct query. GA.</a:t>
-            </a:r>
-            <a:endParaRPr lang="en-US" sz="1500" dirty="0"/>
-          </a:p>
-          <a:p>
-            <a:pPr marL="342900" indent="-342900">
-              <a:spcAft>
-                <a:spcPts val="600"/>
-              </a:spcAft>
-              <a:buSzPct val="100000"/>
-              <a:buChar char="•"/>
-            </a:pPr>
-            <a:r>
-              <a:rPr lang="en-US" sz="1500" dirty="0">
-                <a:solidFill>
-                  <a:srgbClr val="212121"/>
-                </a:solidFill>
-                <a:latin typeface="Calibri" pitchFamily="34" charset="0"/>
-                <a:ea typeface="Calibri" pitchFamily="34" charset="-122"/>
-                <a:cs typeface="Calibri" pitchFamily="34" charset="-120"/>
-              </a:rPr>
-              <a:t>low — LLM plans the sub-queries and picks sources. Preview.</a:t>
-            </a:r>
-            <a:endParaRPr lang="en-US" sz="1500" dirty="0"/>
-          </a:p>
-          <a:p>
-            <a:pPr marL="342900" indent="-342900">
-              <a:spcAft>
-                <a:spcPts val="600"/>
-              </a:spcAft>
-              <a:buSzPct val="100000"/>
-              <a:buChar char="•"/>
-            </a:pPr>
-            <a:r>
-              <a:rPr lang="en-US" sz="1500" dirty="0">
-                <a:solidFill>
-                  <a:srgbClr val="212121"/>
-                </a:solidFill>
-                <a:latin typeface="Calibri" pitchFamily="34" charset="0"/>
-                <a:ea typeface="Calibri" pitchFamily="34" charset="-122"/>
-                <a:cs typeface="Calibri" pitchFamily="34" charset="-120"/>
-              </a:rPr>
-              <a:t>medium — LLM plans plus iterates for deeper results. Preview.</a:t>
-            </a:r>
-            <a:endParaRPr lang="en-US" sz="1500" dirty="0"/>
+              <a:t>Currently preview in the Foundry and Azure portals; parts of agentic retrieval are GA on the 2026-04-01 REST API.</a:t>
+            </a:r>
+            <a:endParaRPr lang="en-US" sz="1200" dirty="0"/>
           </a:p>
         </p:txBody>
       </p:sp>
       <p:sp>
         <p:nvSpPr>
-          <p:cNvPr id="7" name="Text 5"/>
-          <p:cNvSpPr/>
-          <p:nvPr/>
-        </p:nvSpPr>
-        <p:spPr>
-          <a:xfrm>
-            <a:off x="365760" y="3794760"/>
-            <a:ext cx="8412480" cy="457200"/>
-          </a:xfrm>
-          <a:prstGeom prst="rect">
-            <a:avLst/>
-          </a:prstGeom>
-          <a:noFill/>
-          <a:ln/>
-        </p:spPr>
-        <p:txBody>
-          <a:bodyPr wrap="square" rtlCol="0" anchor="ctr"/>
-          <a:lstStyle/>
-          <a:p>
-            <a:pPr indent="0" marL="0">
-              <a:buNone/>
-            </a:pPr>
-            <a:r>
-              <a:rPr lang="en-US" sz="1300" i="1" dirty="0">
-                <a:solidFill>
-                  <a:srgbClr val="6B7280"/>
-                </a:solidFill>
-                <a:latin typeface="Calibri" pitchFamily="34" charset="0"/>
-                <a:ea typeface="Calibri" pitchFamily="34" charset="-122"/>
-                <a:cs typeface="Calibri" pitchFamily="34" charset="-120"/>
-              </a:rPr>
-              <a:t>Higher effort = better answers on complex questions, higher latency and cost. Choose per query, not per agent.</a:t>
-            </a:r>
-            <a:endParaRPr lang="en-US" sz="1300" dirty="0"/>
-          </a:p>
-        </p:txBody>
-      </p:sp>
-      <p:sp>
-        <p:nvSpPr>
-          <p:cNvPr id="8" name="Text 6"/>
+          <p:cNvPr id="8" name="Text 5"/>
           <p:cNvSpPr/>
           <p:nvPr/>
         </p:nvSpPr>
@@ -9241,7 +10285,7 @@
               <a:buNone/>
             </a:pPr>
             <a:r>
-              <a:rPr lang="en-US" sz="1100" i="1" dirty="0">
+              <a:rPr lang="en-US" sz="1000" i="1" dirty="0">
                 <a:solidFill>
                   <a:srgbClr val="6B7280"/>
                 </a:solidFill>
@@ -9249,9 +10293,9 @@
                 <a:ea typeface="Calibri" pitchFamily="34" charset="-122"/>
                 <a:cs typeface="Calibri" pitchFamily="34" charset="-120"/>
               </a:rPr>
-              <a:t>Preview: verify status in Learn before wiring into production paths.</a:t>
-            </a:r>
-            <a:endParaRPr lang="en-US" sz="1100" dirty="0"/>
+              <a:t>Source: learn.microsoft.com/azure/search/agentic-retrieval-how-to-set-retrieval-reasoning-effort</a:t>
+            </a:r>
+            <a:endParaRPr lang="en-US" sz="1000" dirty="0"/>
           </a:p>
         </p:txBody>
       </p:sp>

--- a/decks/day2/module-1-foundry-iq.pptx
+++ b/decks/day2/module-1-foundry-iq.pptx
@@ -20,9 +20,11 @@
     <p:sldId id="268" r:id="rId14"/>
     <p:sldId id="269" r:id="rId15"/>
     <p:sldId id="270" r:id="rId16"/>
+    <p:sldId id="271" r:id="rId17"/>
+    <p:sldId id="272" r:id="rId18"/>
   </p:sldIdLst>
   <p:notesMasterIdLst>
-    <p:notesMasterId r:id="rId17"/>
+    <p:notesMasterId r:id="rId19"/>
   </p:notesMasterIdLst>
   <p:sldSz cx="9144000" cy="5143500"/>
   <p:notesSz cx="5143500" cy="9144000"/>
@@ -608,10 +610,16 @@
           <a:p>
             <a:r>
               <a:rPr lang="en-US" dirty="0"/>
-              <a:t>• Left = today; right = Module 2 territory
-• Two-way street: real systems often use IQ for most content + custom RAG for one specialty index
-• Ask attendees which side their planned scenarios fall on — many will straddle
-• Set up Module 2 by ending on 'if your case is on the right side, Module 2 covers it'</a:t>
+              <a:t>• DEMO 1.2 · ~5 min
+• PREREQ: contoso-docs-kb has an LLM attached and reasoning effort ≥ Low (not the workshop default of Minimal — temporarily crank it up for the demo)
+• Two tabs open: (1) Foundry Playground with docs-assistant, (2) Azure AI Search portal → your Search service → Agentic retrieval → your KB → chat box
+• Warm both pipelines with a throw-away query at least an hour before
+• Step 1 (~45s, Tab 1): ask the multi-hop question about payment_review + billing impact + pro plan rate limits; agent answers with citations
+• Step 2 (~30s, Tab 1): open the trace — point at the single MCP tool_call for the knowledge_base; 'from the agent's view IQ is opaque'
+• Step 3 (~2 min, Tab 2): paste the same question; click the debug icon on the response; walk the activity log entry-by-entry — read each azureBlobArguments.search aloud (three planned sub-queries)
+• Step 4 (~30s): single-hop contrast question in the same box — one azureBlob entry; planner adapted
+• Fallback: dry-run screenshots of both activity logs (multi-hop 3-subquery + single-hop 1-subquery)
+• Payoff line: 'Foundry summary vs. AI Search mechanism — same call, two levels of detail.'</a:t>
             </a:r>
             <a:endParaRPr lang="en-US" dirty="0"/>
           </a:p>
@@ -699,11 +707,11 @@
           <a:p>
             <a:r>
               <a:rPr lang="en-US" dirty="0"/>
-              <a:t>• Reassure — 'you don't write retrieval code in your agent'
-• For Prompt agent / Hosted agent, the KB is wired in the agent's config in Foundry
-• For Path C (your own code), you either use the KB REST API directly or the AI Search SDK
-• Lab today wires a KB to attendees' Day 1 Prompt agent
-• Don't dwell on the C# equivalent here — just mention it exists</a:t>
+              <a:t>• This is the enterprise-hardening pitch
+• Hand-rolling per-user permission filtering on top of AI Search is a lot of work
+• IQ does it at query time — caller's Entra identity flows through
+• Sensitivity labels: preview; verify status before promising it in a design
+• Ask attendees: 'anyone hit this problem before?' — usually a few nods from architects</a:t>
             </a:r>
             <a:endParaRPr lang="en-US" dirty="0"/>
           </a:p>
@@ -791,10 +799,10 @@
           <a:p>
             <a:r>
               <a:rPr lang="en-US" dirty="0"/>
-              <a:t>• Reinforce Day 1's Portal-for-learning / CLI-for-production framing
-• Verify the exact CLI/REST surface before delivering — this space moves fast
-• Today's lab uses the portal deliberately (blob-backed KB is faster to set up in the portal than in code, and RBAC is the same either way)
-• Portal is still valid for exploration and debugging</a:t>
+              <a:t>• Left = today; right = Module 2 territory
+• Two-way street: real systems often use IQ for most content + custom RAG for one specialty index
+• Ask attendees which side their planned scenarios fall on — many will straddle
+• Set up Module 2 by ending on 'if your case is on the right side, Module 2 covers it'</a:t>
             </a:r>
             <a:endParaRPr lang="en-US" dirty="0"/>
           </a:p>
@@ -882,10 +890,11 @@
           <a:p>
             <a:r>
               <a:rPr lang="en-US" dirty="0"/>
-              <a:t>• Awareness-only slide — attendees have probably heard 'Fabric IQ' and 'Work IQ' too
-• The nice pitch: all three are addressable via Foundry IQ knowledge sources
-• Not teaching Fabric IQ or Work IQ today — just placing them on the map
-• If attendees ask 'what about Copilot Studio agents' — those can consume a Foundry IQ KB too (per Learn)</a:t>
+              <a:t>• Reassure — 'you don't write retrieval code in your agent'
+• For Prompt agent / Hosted agent, the KB is wired in the agent's config in Foundry
+• For Path C (your own code), you either use the KB REST API directly or the AI Search SDK
+• Lab today wires a KB to attendees' Day 1 Prompt agent
+• Don't dwell on the C# equivalent here — just mention it exists</a:t>
             </a:r>
             <a:endParaRPr lang="en-US" dirty="0"/>
           </a:p>
@@ -973,10 +982,10 @@
           <a:p>
             <a:r>
               <a:rPr lang="en-US" dirty="0"/>
-              <a:t>• Pause here for questions — these are the traps attendees will hit in the lab and in production
-• The description trap is subtle — encourage writing descriptions like tool docstrings (Day 1 Module 3)
-• The permission trap is the design-time trap — decide up front, hard to retrofit
-• The citation trap is why Module 3 (eval) exists — evaluate groundedness, not just answer text</a:t>
+              <a:t>• Reinforce Day 1's Portal-for-learning / CLI-for-production framing
+• Verify the exact CLI/REST surface before delivering — this space moves fast
+• Today's lab uses the portal deliberately (blob-backed KB is faster to set up in the portal than in code, and RBAC is the same either way)
+• Portal is still valid for exploration and debugging</a:t>
             </a:r>
             <a:endParaRPr lang="en-US" dirty="0"/>
           </a:p>
@@ -1064,10 +1073,10 @@
           <a:p>
             <a:r>
               <a:rPr lang="en-US" dirty="0"/>
-              <a:t>• Quick recap — five bullets
-• Ask attendees to name the three building blocks out loud
-• Bridge to Module 2 (Custom RAG) — 'IQ isn't always the answer'
-• Time check — should be about 35 min in</a:t>
+              <a:t>• Awareness-only slide — attendees have probably heard 'Fabric IQ' and 'Work IQ' too
+• The nice pitch: all three are addressable via Foundry IQ knowledge sources
+• Not teaching Fabric IQ or Work IQ today — just placing them on the map
+• If attendees ask 'what about Copilot Studio agents' — those can consume a Foundry IQ KB too (per Learn)</a:t>
             </a:r>
             <a:endParaRPr lang="en-US" dirty="0"/>
           </a:p>
@@ -1091,6 +1100,188 @@
             <a:fld id="{F7021451-1387-4CA6-816F-3879F97B5CBC}" type="slidenum">
               <a:rPr lang="en-US"/>
               <a:t>15</a:t>
+            </a:fld>
+            <a:endParaRPr lang="en-US"/>
+          </a:p>
+        </p:txBody>
+      </p:sp>
+    </p:spTree>
+    <p:extLst>
+      <p:ext uri="{BB962C8B-B14F-4D97-AF65-F5344CB8AC3E}">
+        <p14:creationId xmlns:p14="http://schemas.microsoft.com/office/powerpoint/2010/main" val="1024086991"/>
+      </p:ext>
+    </p:extLst>
+  </p:cSld>
+  <p:clrMapOvr>
+    <a:masterClrMapping/>
+  </p:clrMapOvr>
+</p:notes>
+</file>
+
+<file path=ppt/notesSlides/notesSlide16.xml><?xml version="1.0" encoding="utf-8"?>
+<p:notes xmlns:a="http://schemas.openxmlformats.org/drawingml/2006/main" xmlns:r="http://schemas.openxmlformats.org/officeDocument/2006/relationships" xmlns:p="http://schemas.openxmlformats.org/presentationml/2006/main">
+  <p:cSld>
+    <p:spTree>
+      <p:nvGrpSpPr>
+        <p:cNvPr id="1" name=""/>
+        <p:cNvGrpSpPr/>
+        <p:nvPr/>
+      </p:nvGrpSpPr>
+      <p:grpSpPr>
+        <a:xfrm>
+          <a:off x="0" y="0"/>
+          <a:ext cx="0" cy="0"/>
+          <a:chOff x="0" y="0"/>
+          <a:chExt cx="0" cy="0"/>
+        </a:xfrm>
+      </p:grpSpPr>
+      <p:sp>
+        <p:nvSpPr>
+          <p:cNvPr id="2" name="Slide Image Placeholder 1"/>
+          <p:cNvSpPr>
+            <a:spLocks noGrp="1" noRot="1" noChangeAspect="1"/>
+          </p:cNvSpPr>
+          <p:nvPr>
+            <p:ph type="sldImg"/>
+          </p:nvPr>
+        </p:nvSpPr>
+        <p:spPr/>
+      </p:sp>
+      <p:sp>
+        <p:nvSpPr>
+          <p:cNvPr id="3" name="Notes Placeholder 2"/>
+          <p:cNvSpPr>
+            <a:spLocks noGrp="1"/>
+          </p:cNvSpPr>
+          <p:nvPr>
+            <p:ph type="body" idx="1"/>
+          </p:nvPr>
+        </p:nvSpPr>
+        <p:spPr/>
+        <p:txBody>
+          <a:bodyPr/>
+          <a:lstStyle/>
+          <a:p>
+            <a:r>
+              <a:rPr lang="en-US" dirty="0"/>
+              <a:t>• Pause here for questions — these are the traps attendees will hit in the lab and in production
+• The description trap is subtle — encourage writing descriptions like tool docstrings (Day 1 Module 3)
+• The permission trap is the design-time trap — decide up front, hard to retrofit
+• The citation trap is why Module 3 (eval) exists — evaluate groundedness, not just answer text</a:t>
+            </a:r>
+            <a:endParaRPr lang="en-US" dirty="0"/>
+          </a:p>
+        </p:txBody>
+      </p:sp>
+      <p:sp>
+        <p:nvSpPr>
+          <p:cNvPr id="4" name="Slide Number Placeholder 3"/>
+          <p:cNvSpPr>
+            <a:spLocks noGrp="1"/>
+          </p:cNvSpPr>
+          <p:nvPr>
+            <p:ph type="sldNum" sz="quarter" idx="10"/>
+          </p:nvPr>
+        </p:nvSpPr>
+        <p:spPr/>
+        <p:txBody>
+          <a:bodyPr/>
+          <a:lstStyle/>
+          <a:p>
+            <a:fld id="{F7021451-1387-4CA6-816F-3879F97B5CBC}" type="slidenum">
+              <a:rPr lang="en-US"/>
+              <a:t>16</a:t>
+            </a:fld>
+            <a:endParaRPr lang="en-US"/>
+          </a:p>
+        </p:txBody>
+      </p:sp>
+    </p:spTree>
+    <p:extLst>
+      <p:ext uri="{BB962C8B-B14F-4D97-AF65-F5344CB8AC3E}">
+        <p14:creationId xmlns:p14="http://schemas.microsoft.com/office/powerpoint/2010/main" val="1024086991"/>
+      </p:ext>
+    </p:extLst>
+  </p:cSld>
+  <p:clrMapOvr>
+    <a:masterClrMapping/>
+  </p:clrMapOvr>
+</p:notes>
+</file>
+
+<file path=ppt/notesSlides/notesSlide17.xml><?xml version="1.0" encoding="utf-8"?>
+<p:notes xmlns:a="http://schemas.openxmlformats.org/drawingml/2006/main" xmlns:r="http://schemas.openxmlformats.org/officeDocument/2006/relationships" xmlns:p="http://schemas.openxmlformats.org/presentationml/2006/main">
+  <p:cSld>
+    <p:spTree>
+      <p:nvGrpSpPr>
+        <p:cNvPr id="1" name=""/>
+        <p:cNvGrpSpPr/>
+        <p:nvPr/>
+      </p:nvGrpSpPr>
+      <p:grpSpPr>
+        <a:xfrm>
+          <a:off x="0" y="0"/>
+          <a:ext cx="0" cy="0"/>
+          <a:chOff x="0" y="0"/>
+          <a:chExt cx="0" cy="0"/>
+        </a:xfrm>
+      </p:grpSpPr>
+      <p:sp>
+        <p:nvSpPr>
+          <p:cNvPr id="2" name="Slide Image Placeholder 1"/>
+          <p:cNvSpPr>
+            <a:spLocks noGrp="1" noRot="1" noChangeAspect="1"/>
+          </p:cNvSpPr>
+          <p:nvPr>
+            <p:ph type="sldImg"/>
+          </p:nvPr>
+        </p:nvSpPr>
+        <p:spPr/>
+      </p:sp>
+      <p:sp>
+        <p:nvSpPr>
+          <p:cNvPr id="3" name="Notes Placeholder 2"/>
+          <p:cNvSpPr>
+            <a:spLocks noGrp="1"/>
+          </p:cNvSpPr>
+          <p:nvPr>
+            <p:ph type="body" idx="1"/>
+          </p:nvPr>
+        </p:nvSpPr>
+        <p:spPr/>
+        <p:txBody>
+          <a:bodyPr/>
+          <a:lstStyle/>
+          <a:p>
+            <a:r>
+              <a:rPr lang="en-US" dirty="0"/>
+              <a:t>• Quick recap — five bullets
+• Ask attendees to name the three building blocks out loud
+• Bridge to Module 2 (Custom RAG) — 'IQ isn't always the answer'
+• Time check — should be about 35 min in</a:t>
+            </a:r>
+            <a:endParaRPr lang="en-US" dirty="0"/>
+          </a:p>
+        </p:txBody>
+      </p:sp>
+      <p:sp>
+        <p:nvSpPr>
+          <p:cNvPr id="4" name="Slide Number Placeholder 3"/>
+          <p:cNvSpPr>
+            <a:spLocks noGrp="1"/>
+          </p:cNvSpPr>
+          <p:nvPr>
+            <p:ph type="sldNum" sz="quarter" idx="10"/>
+          </p:nvPr>
+        </p:nvSpPr>
+        <p:spPr/>
+        <p:txBody>
+          <a:bodyPr/>
+          <a:lstStyle/>
+          <a:p>
+            <a:fld id="{F7021451-1387-4CA6-816F-3879F97B5CBC}" type="slidenum">
+              <a:rPr lang="en-US"/>
+              <a:t>17</a:t>
             </a:fld>
             <a:endParaRPr lang="en-US"/>
           </a:p>
@@ -1431,12 +1622,15 @@
           <a:p>
             <a:r>
               <a:rPr lang="en-US" dirty="0"/>
-              <a:t>• Left column: content is ingested into AI Search up front, queried locally
-• Right column: content stays in the source system, retrieved at query time
-• Preview labels move — verify current status before delivering
-• Fabric Data Agent and Work IQ let you mix IQs (Foundry + Fabric + Work) via IQ
-• MCP server as a knowledge source is preview — different from MCP tools (Day 3)
-• Call out the ranking pipeline is unified — attendees think of these as one result set</a:t>
+              <a:t>• DEMO 1.1 · ~4 min
+• Storage account + contoso-docs blob container + 10 docs already uploaded before the module
+• Foundry portal at the project, Build → Knowledge already open
+• Step 1 (~60s): Knowledge → +Create a knowledge base → name it contoso-docs → paste the KB description → Add sources → +Azure Blob Storage → point at the container → System-assigned MI → text-embedding-3-small → Create
+• Speaker note: 'That description matters — the model uses it later to decide when to reach for this source.'
+• Step 2 (~90s, portal spinner): while ingestion runs, talk through what just happened — chunking + embeddings + index all delegated to Foundry, replacing what used to be an AI Search Index pipeline you'd wire up by hand
+• Step 3 (~45s): attach the KB to your Day 1 docs-assistant agent; open Playground; ask 'how do I generate an API key?'; point at the grounded answer + citation
+• Fallback: dry-run screenshots of every portal step + a successful grounded answer
+• Payoff line: 'IQ is three objects — source, base, agent. In the lab you'll do the same three things, but from the portal following the setup guide, not from code.'</a:t>
             </a:r>
             <a:endParaRPr lang="en-US" dirty="0"/>
           </a:p>
@@ -1524,11 +1718,12 @@
           <a:p>
             <a:r>
               <a:rPr lang="en-US" dirty="0"/>
-              <a:t>• Walk each row — ~5 sec per row
-• The trade-off attendees should internalize: cost/latency (indexed) vs. freshness/simplicity (remote)
-• Indexed also means you pay to keep an AI Search index warm
-• Remote means every query hits the source — could rate-limit or bill per call
-• The rule of thumb line is the takeaway</a:t>
+              <a:t>• Left column: content is ingested into AI Search up front, queried locally
+• Right column: content stays in the source system, retrieved at query time
+• Preview labels move — verify current status before delivering
+• Fabric Data Agent and Work IQ let you mix IQs (Foundry + Fabric + Work) via IQ
+• MCP server as a knowledge source is preview — different from MCP tools (Day 3)
+• Call out the ranking pipeline is unified — attendees think of these as one result set</a:t>
             </a:r>
             <a:endParaRPr lang="en-US" dirty="0"/>
           </a:p>
@@ -1616,11 +1811,11 @@
           <a:p>
             <a:r>
               <a:rPr lang="en-US" dirty="0"/>
-              <a:t>• This is the pitch — attendees compare to their own hand-rolled RAG mentally
-• Four steps: plan, execute, rank, return
-• Planning only happens with an LLM attached to the KB at Low or Medium effort — next slide covers when to pick each level
-• Parallel execution is a real perf win over serial retrieve-then-rerank
-• The 'pipeline you get for free' framing lands the value prop</a:t>
+              <a:t>• Walk each row — ~5 sec per row
+• The trade-off attendees should internalize: cost/latency (indexed) vs. freshness/simplicity (remote)
+• Indexed also means you pay to keep an AI Search index warm
+• Remote means every query hits the source — could rate-limit or bill per call
+• The rule of thumb line is the takeaway</a:t>
             </a:r>
             <a:endParaRPr lang="en-US" dirty="0"/>
           </a:p>
@@ -1708,12 +1903,11 @@
           <a:p>
             <a:r>
               <a:rPr lang="en-US" dirty="0"/>
-              <a:t>• The big message: Low is the default, but Minimal is often better for agent-consumed IQ
-• Attendees will assume higher effort = better. Push back — the agent LLM does the reasoning at Minimal, you pay less and get lower latency
-• Query planning requires an LLM attached to the knowledge base at the KB level (not per-request)
-• Answer synthesis is separate from planning — you can have planning on and still return extractive data to feed the agent
-• Iterative retry is Medium-only, capped at one retry, uses a semantic classifier to decide if a retry is warranted
-• Source-per-KB limit is now 10 on all tiers in the current preview API (earlier preview versions capped Low at 3 and Medium at 5)</a:t>
+              <a:t>• This is the pitch — attendees compare to their own hand-rolled RAG mentally
+• Four steps: plan, execute, rank, return
+• Planning only happens with an LLM attached to the KB at Low or Medium effort — next slide covers when to pick each level
+• Parallel execution is a real perf win over serial retrieve-then-rerank
+• The 'pipeline you get for free' framing lands the value prop</a:t>
             </a:r>
             <a:endParaRPr lang="en-US" dirty="0"/>
           </a:p>
@@ -1801,11 +1995,12 @@
           <a:p>
             <a:r>
               <a:rPr lang="en-US" dirty="0"/>
-              <a:t>• This is the enterprise-hardening pitch
-• Hand-rolling per-user permission filtering on top of AI Search is a lot of work
-• IQ does it at query time — caller's Entra identity flows through
-• Sensitivity labels: preview; verify status before promising it in a design
-• Ask attendees: 'anyone hit this problem before?' — usually a few nods from architects</a:t>
+              <a:t>• The big message: Low is the default, but Minimal is often better for agent-consumed IQ
+• Attendees will assume higher effort = better. Push back — the agent LLM does the reasoning at Minimal, you pay less and get lower latency
+• Query planning requires an LLM attached to the knowledge base at the KB level (not per-request)
+• Answer synthesis is separate from planning — you can have planning on and still return extractive data to feed the agent
+• Iterative retry is Medium-only, capped at one retry, uses a semantic classifier to decide if a retry is warranted
+• Source-per-KB limit is now 10 on all tiers in the current preview API (earlier preview versions capped Low at 3 and Medium at 5)</a:t>
             </a:r>
             <a:endParaRPr lang="en-US" dirty="0"/>
           </a:p>
@@ -2348,7 +2543,7 @@
     <p:bg>
       <p:bgPr>
         <a:solidFill>
-          <a:srgbClr val="FFFFFF"/>
+          <a:srgbClr val="CADCFC"/>
         </a:solidFill>
       </p:bgPr>
     </p:bg>
@@ -2375,7 +2570,7 @@
         <p:spPr>
           <a:xfrm>
             <a:off x="0" y="0"/>
-            <a:ext cx="54864" cy="5143500"/>
+            <a:ext cx="146304" cy="5143500"/>
           </a:xfrm>
           <a:prstGeom prst="rect">
             <a:avLst/>
@@ -2419,7 +2614,7 @@
                 <a:ea typeface="Calibri" pitchFamily="34" charset="-122"/>
                 <a:cs typeface="Calibri" pitchFamily="34" charset="-120"/>
               </a:rPr>
-              <a:t>Day 2 · Module 1</a:t>
+              <a:t>Day 2 · Module 1 · Demo</a:t>
             </a:r>
             <a:endParaRPr lang="en-US" sz="1000" dirty="0"/>
           </a:p>
@@ -2433,8 +2628,8 @@
         </p:nvSpPr>
         <p:spPr>
           <a:xfrm>
-            <a:off x="365760" y="320040"/>
-            <a:ext cx="6217920" cy="640080"/>
+            <a:off x="548640" y="1051560"/>
+            <a:ext cx="5486400" cy="502920"/>
           </a:xfrm>
           <a:prstGeom prst="rect">
             <a:avLst/>
@@ -2450,7 +2645,7 @@
               <a:buNone/>
             </a:pPr>
             <a:r>
-              <a:rPr lang="en-US" sz="2800" b="1" dirty="0">
+              <a:rPr lang="en-US" sz="3200" b="1" spc="800" kern="0" dirty="0">
                 <a:solidFill>
                   <a:srgbClr val="1E2761"/>
                 </a:solidFill>
@@ -2458,9 +2653,9 @@
                 <a:ea typeface="Calibri" pitchFamily="34" charset="-122"/>
                 <a:cs typeface="Calibri" pitchFamily="34" charset="-120"/>
               </a:rPr>
-              <a:t>When to use Foundry IQ</a:t>
-            </a:r>
-            <a:endParaRPr lang="en-US" sz="2800" dirty="0"/>
+              <a:t>DEMO</a:t>
+            </a:r>
+            <a:endParaRPr lang="en-US" sz="3200" dirty="0"/>
           </a:p>
         </p:txBody>
       </p:sp>
@@ -2472,8 +2667,8 @@
         </p:nvSpPr>
         <p:spPr>
           <a:xfrm>
-            <a:off x="365760" y="1097280"/>
-            <a:ext cx="4069080" cy="365760"/>
+            <a:off x="548640" y="1691640"/>
+            <a:ext cx="8046720" cy="914400"/>
           </a:xfrm>
           <a:prstGeom prst="rect">
             <a:avLst/>
@@ -2489,7 +2684,7 @@
               <a:buNone/>
             </a:pPr>
             <a:r>
-              <a:rPr lang="en-US" sz="2000" b="1" dirty="0">
+              <a:rPr lang="en-US" sz="3000" b="1" dirty="0">
                 <a:solidFill>
                   <a:srgbClr val="1E2761"/>
                 </a:solidFill>
@@ -2497,9 +2692,9 @@
                 <a:ea typeface="Calibri" pitchFamily="34" charset="-122"/>
                 <a:cs typeface="Calibri" pitchFamily="34" charset="-120"/>
               </a:rPr>
-              <a:t>Reach for IQ</a:t>
-            </a:r>
-            <a:endParaRPr lang="en-US" sz="2000" dirty="0"/>
+              <a:t>Query planning in slow motion</a:t>
+            </a:r>
+            <a:endParaRPr lang="en-US" sz="3000" dirty="0"/>
           </a:p>
         </p:txBody>
       </p:sp>
@@ -2511,8 +2706,8 @@
         </p:nvSpPr>
         <p:spPr>
           <a:xfrm>
-            <a:off x="4709160" y="1097280"/>
-            <a:ext cx="4069080" cy="365760"/>
+            <a:off x="6583680" y="1051560"/>
+            <a:ext cx="2194560" cy="502920"/>
           </a:xfrm>
           <a:prstGeom prst="rect">
             <a:avLst/>
@@ -2524,21 +2719,21 @@
           <a:bodyPr wrap="square" lIns="0" tIns="0" rIns="0" bIns="0" rtlCol="0" anchor="ctr"/>
           <a:lstStyle/>
           <a:p>
-            <a:pPr indent="0" marL="0">
+            <a:pPr algn="r" indent="0" marL="0">
               <a:buNone/>
             </a:pPr>
             <a:r>
-              <a:rPr lang="en-US" sz="2000" b="1" dirty="0">
-                <a:solidFill>
-                  <a:srgbClr val="1E2761"/>
-                </a:solidFill>
-                <a:latin typeface="Calibri" pitchFamily="34" charset="0"/>
-                <a:ea typeface="Calibri" pitchFamily="34" charset="-122"/>
-                <a:cs typeface="Calibri" pitchFamily="34" charset="-120"/>
-              </a:rPr>
-              <a:t>Reach for custom RAG (Module 2)</a:t>
-            </a:r>
-            <a:endParaRPr lang="en-US" sz="2000" dirty="0"/>
+              <a:rPr lang="en-US" sz="1800" i="1" dirty="0">
+                <a:solidFill>
+                  <a:srgbClr val="6B7280"/>
+                </a:solidFill>
+                <a:latin typeface="Calibri" pitchFamily="34" charset="0"/>
+                <a:ea typeface="Calibri" pitchFamily="34" charset="-122"/>
+                <a:cs typeface="Calibri" pitchFamily="34" charset="-120"/>
+              </a:rPr>
+              <a:t>~5 min</a:t>
+            </a:r>
+            <a:endParaRPr lang="en-US" sz="1800" dirty="0"/>
           </a:p>
         </p:txBody>
       </p:sp>
@@ -2550,8 +2745,8 @@
         </p:nvSpPr>
         <p:spPr>
           <a:xfrm>
-            <a:off x="365760" y="1554480"/>
-            <a:ext cx="4069080" cy="3291840"/>
+            <a:off x="548640" y="2788920"/>
+            <a:ext cx="8046720" cy="1371600"/>
           </a:xfrm>
           <a:prstGeom prst="rect">
             <a:avLst/>
@@ -2560,18 +2755,17 @@
           <a:ln/>
         </p:spPr>
         <p:txBody>
-          <a:bodyPr wrap="square" rtlCol="0" anchor="ctr"/>
+          <a:bodyPr wrap="square" lIns="0" tIns="0" rIns="0" bIns="0" rtlCol="0" anchor="ctr"/>
           <a:lstStyle/>
           <a:p>
-            <a:pPr marL="342900" indent="-342900">
+            <a:pPr indent="0" marL="0">
               <a:spcAft>
                 <a:spcPts val="600"/>
               </a:spcAft>
-              <a:buSzPct val="100000"/>
-              <a:buChar char="•"/>
-            </a:pPr>
-            <a:r>
-              <a:rPr lang="en-US" sz="1500" dirty="0">
+              <a:buNone/>
+            </a:pPr>
+            <a:r>
+              <a:rPr lang="en-US" sz="1600" dirty="0">
                 <a:solidFill>
                   <a:srgbClr val="212121"/>
                 </a:solidFill>
@@ -2579,93 +2773,9 @@
                 <a:ea typeface="Calibri" pitchFamily="34" charset="-122"/>
                 <a:cs typeface="Calibri" pitchFamily="34" charset="-120"/>
               </a:rPr>
-              <a:t>Content in a supported source (SharePoint, OneLake, blob, web, Fabric…)</a:t>
-            </a:r>
-            <a:endParaRPr lang="en-US" sz="1500" dirty="0"/>
-          </a:p>
-          <a:p>
-            <a:pPr marL="342900" indent="-342900">
-              <a:spcAft>
-                <a:spcPts val="600"/>
-              </a:spcAft>
-              <a:buSzPct val="100000"/>
-              <a:buChar char="•"/>
-            </a:pPr>
-            <a:r>
-              <a:rPr lang="en-US" sz="1500" dirty="0">
-                <a:solidFill>
-                  <a:srgbClr val="212121"/>
-                </a:solidFill>
-                <a:latin typeface="Calibri" pitchFamily="34" charset="0"/>
-                <a:ea typeface="Calibri" pitchFamily="34" charset="-122"/>
-                <a:cs typeface="Calibri" pitchFamily="34" charset="-120"/>
-              </a:rPr>
-              <a:t>Multiple agents will share the knowledge base</a:t>
-            </a:r>
-            <a:endParaRPr lang="en-US" sz="1500" dirty="0"/>
-          </a:p>
-          <a:p>
-            <a:pPr marL="342900" indent="-342900">
-              <a:spcAft>
-                <a:spcPts val="600"/>
-              </a:spcAft>
-              <a:buSzPct val="100000"/>
-              <a:buChar char="•"/>
-            </a:pPr>
-            <a:r>
-              <a:rPr lang="en-US" sz="1500" dirty="0">
-                <a:solidFill>
-                  <a:srgbClr val="212121"/>
-                </a:solidFill>
-                <a:latin typeface="Calibri" pitchFamily="34" charset="0"/>
-                <a:ea typeface="Calibri" pitchFamily="34" charset="-122"/>
-                <a:cs typeface="Calibri" pitchFamily="34" charset="-120"/>
-              </a:rPr>
-              <a:t>Need permission-aware answers per caller</a:t>
-            </a:r>
-            <a:endParaRPr lang="en-US" sz="1500" dirty="0"/>
-          </a:p>
-          <a:p>
-            <a:pPr marL="342900" indent="-342900">
-              <a:spcAft>
-                <a:spcPts val="600"/>
-              </a:spcAft>
-              <a:buSzPct val="100000"/>
-              <a:buChar char="•"/>
-            </a:pPr>
-            <a:r>
-              <a:rPr lang="en-US" sz="1500" dirty="0">
-                <a:solidFill>
-                  <a:srgbClr val="212121"/>
-                </a:solidFill>
-                <a:latin typeface="Calibri" pitchFamily="34" charset="0"/>
-                <a:ea typeface="Calibri" pitchFamily="34" charset="-122"/>
-                <a:cs typeface="Calibri" pitchFamily="34" charset="-120"/>
-              </a:rPr>
-              <a:t>Want managed indexing, chunking, embeddings, refresh</a:t>
-            </a:r>
-            <a:endParaRPr lang="en-US" sz="1500" dirty="0"/>
-          </a:p>
-          <a:p>
-            <a:pPr marL="342900" indent="-342900">
-              <a:spcAft>
-                <a:spcPts val="600"/>
-              </a:spcAft>
-              <a:buSzPct val="100000"/>
-              <a:buChar char="•"/>
-            </a:pPr>
-            <a:r>
-              <a:rPr lang="en-US" sz="1500" dirty="0">
-                <a:solidFill>
-                  <a:srgbClr val="212121"/>
-                </a:solidFill>
-                <a:latin typeface="Calibri" pitchFamily="34" charset="0"/>
-                <a:ea typeface="Calibri" pitchFamily="34" charset="-122"/>
-                <a:cs typeface="Calibri" pitchFamily="34" charset="-120"/>
-              </a:rPr>
-              <a:t>Want the agentic retrieval pipeline without writing it</a:t>
-            </a:r>
-            <a:endParaRPr lang="en-US" sz="1500" dirty="0"/>
+              <a:t>Pivot between two portals to see the same retrieval two ways. Foundry Playground: ask a multi-hop question, open the trace — one MCP tool_call is all you see. Azure AI Search chat playground for the same KB: same question, hit the debug icon on the response, and the activity log JSON shows modelQueryPlanning, three azureBlob sub-queries (with their planner-generated search strings), agenticReasoning, and modelAnswerSynthesis. Foundry gives you the summary; AI Search gives you the mechanism.</a:t>
+            </a:r>
+            <a:endParaRPr lang="en-US" sz="1600" dirty="0"/>
           </a:p>
         </p:txBody>
       </p:sp>
@@ -2677,8 +2787,8 @@
         </p:nvSpPr>
         <p:spPr>
           <a:xfrm>
-            <a:off x="4709160" y="1554480"/>
-            <a:ext cx="4069080" cy="3291840"/>
+            <a:off x="548640" y="4434840"/>
+            <a:ext cx="8046720" cy="320040"/>
           </a:xfrm>
           <a:prstGeom prst="rect">
             <a:avLst/>
@@ -2687,91 +2797,24 @@
           <a:ln/>
         </p:spPr>
         <p:txBody>
-          <a:bodyPr wrap="square" rtlCol="0" anchor="ctr"/>
+          <a:bodyPr wrap="square" lIns="0" tIns="0" rIns="0" bIns="0" rtlCol="0" anchor="ctr"/>
           <a:lstStyle/>
           <a:p>
-            <a:pPr marL="342900" indent="-342900">
-              <a:spcAft>
-                <a:spcPts val="600"/>
-              </a:spcAft>
-              <a:buSzPct val="100000"/>
-              <a:buChar char="•"/>
-            </a:pPr>
-            <a:r>
-              <a:rPr lang="en-US" sz="1500" dirty="0">
-                <a:solidFill>
-                  <a:srgbClr val="212121"/>
-                </a:solidFill>
-                <a:latin typeface="Calibri" pitchFamily="34" charset="0"/>
-                <a:ea typeface="Calibri" pitchFamily="34" charset="-122"/>
-                <a:cs typeface="Calibri" pitchFamily="34" charset="-120"/>
-              </a:rPr>
-              <a:t>Need control IQ doesn't yet give you (custom re-rankers, unusual chunk sizes, novel embeddings)</a:t>
-            </a:r>
-            <a:endParaRPr lang="en-US" sz="1500" dirty="0"/>
-          </a:p>
-          <a:p>
-            <a:pPr marL="342900" indent="-342900">
-              <a:spcAft>
-                <a:spcPts val="600"/>
-              </a:spcAft>
-              <a:buSzPct val="100000"/>
-              <a:buChar char="•"/>
-            </a:pPr>
-            <a:r>
-              <a:rPr lang="en-US" sz="1500" dirty="0">
-                <a:solidFill>
-                  <a:srgbClr val="212121"/>
-                </a:solidFill>
-                <a:latin typeface="Calibri" pitchFamily="34" charset="0"/>
-                <a:ea typeface="Calibri" pitchFamily="34" charset="-122"/>
-                <a:cs typeface="Calibri" pitchFamily="34" charset="-120"/>
-              </a:rPr>
-              <a:t>Your source isn't a supported connector</a:t>
-            </a:r>
-            <a:endParaRPr lang="en-US" sz="1500" dirty="0"/>
-          </a:p>
-          <a:p>
-            <a:pPr marL="342900" indent="-342900">
-              <a:spcAft>
-                <a:spcPts val="600"/>
-              </a:spcAft>
-              <a:buSzPct val="100000"/>
-              <a:buChar char="•"/>
-            </a:pPr>
-            <a:r>
-              <a:rPr lang="en-US" sz="1500" dirty="0">
-                <a:solidFill>
-                  <a:srgbClr val="212121"/>
-                </a:solidFill>
-                <a:latin typeface="Calibri" pitchFamily="34" charset="0"/>
-                <a:ea typeface="Calibri" pitchFamily="34" charset="-122"/>
-                <a:cs typeface="Calibri" pitchFamily="34" charset="-120"/>
-              </a:rPr>
-              <a:t>Already invested in an AI Search index with heavy customization</a:t>
-            </a:r>
-            <a:endParaRPr lang="en-US" sz="1500" dirty="0"/>
-          </a:p>
-          <a:p>
-            <a:pPr marL="342900" indent="-342900">
-              <a:spcAft>
-                <a:spcPts val="600"/>
-              </a:spcAft>
-              <a:buSzPct val="100000"/>
-              <a:buChar char="•"/>
-            </a:pPr>
-            <a:r>
-              <a:rPr lang="en-US" sz="1500" dirty="0">
-                <a:solidFill>
-                  <a:srgbClr val="212121"/>
-                </a:solidFill>
-                <a:latin typeface="Calibri" pitchFamily="34" charset="0"/>
-                <a:ea typeface="Calibri" pitchFamily="34" charset="-122"/>
-                <a:cs typeface="Calibri" pitchFamily="34" charset="-120"/>
-              </a:rPr>
-              <a:t>Latency SLA below what IQ's pipeline delivers</a:t>
-            </a:r>
-            <a:endParaRPr lang="en-US" sz="1500" dirty="0"/>
+            <a:pPr indent="0" marL="0">
+              <a:buNone/>
+            </a:pPr>
+            <a:r>
+              <a:rPr lang="en-US" sz="1100" i="1" dirty="0">
+                <a:solidFill>
+                  <a:srgbClr val="6B7280"/>
+                </a:solidFill>
+                <a:latin typeface="Calibri" pitchFamily="34" charset="0"/>
+                <a:ea typeface="Calibri" pitchFamily="34" charset="-122"/>
+                <a:cs typeface="Calibri" pitchFamily="34" charset="-120"/>
+              </a:rPr>
+              <a:t>Runbook: demos/day2/module-1-demo-2-query-planning-trace.md</a:t>
+            </a:r>
+            <a:endParaRPr lang="en-US" sz="1100" dirty="0"/>
           </a:p>
         </p:txBody>
       </p:sp>
@@ -2899,7 +2942,7 @@
                 <a:ea typeface="Calibri" pitchFamily="34" charset="-122"/>
                 <a:cs typeface="Calibri" pitchFamily="34" charset="-120"/>
               </a:rPr>
-              <a:t>Working with knowledge bases in MAF</a:t>
+              <a:t>Permission-aware retrieval</a:t>
             </a:r>
             <a:endParaRPr lang="en-US" sz="2800" dirty="0"/>
           </a:p>
@@ -2913,8 +2956,8 @@
         </p:nvSpPr>
         <p:spPr>
           <a:xfrm>
-            <a:off x="365760" y="1051560"/>
-            <a:ext cx="8412480" cy="548640"/>
+            <a:off x="365760" y="1097280"/>
+            <a:ext cx="8412480" cy="2926080"/>
           </a:xfrm>
           <a:prstGeom prst="rect">
             <a:avLst/>
@@ -2926,11 +2969,15 @@
           <a:bodyPr wrap="square" rtlCol="0" anchor="ctr"/>
           <a:lstStyle/>
           <a:p>
-            <a:pPr indent="0" marL="0">
-              <a:buNone/>
-            </a:pPr>
-            <a:r>
-              <a:rPr lang="en-US" sz="1300" dirty="0">
+            <a:pPr marL="342900" indent="-342900">
+              <a:spcAft>
+                <a:spcPts val="600"/>
+              </a:spcAft>
+              <a:buSzPct val="100000"/>
+              <a:buChar char="•"/>
+            </a:pPr>
+            <a:r>
+              <a:rPr lang="en-US" sz="1500" dirty="0">
                 <a:solidFill>
                   <a:srgbClr val="212121"/>
                 </a:solidFill>
@@ -2938,228 +2985,85 @@
                 <a:ea typeface="Calibri" pitchFamily="34" charset="-122"/>
                 <a:cs typeface="Calibri" pitchFamily="34" charset="-120"/>
               </a:rPr>
-              <a:t>From your MAF app, the knowledge base is just another dependency — no retrieval code in your agent:</a:t>
-            </a:r>
-            <a:endParaRPr lang="en-US" sz="1300" dirty="0"/>
+              <a:t>ACL sync — indexed sources pull access control lists from the source (SharePoint, OneLake) into the index</a:t>
+            </a:r>
+            <a:endParaRPr lang="en-US" sz="1500" dirty="0"/>
+          </a:p>
+          <a:p>
+            <a:pPr marL="342900" indent="-342900">
+              <a:spcAft>
+                <a:spcPts val="600"/>
+              </a:spcAft>
+              <a:buSzPct val="100000"/>
+              <a:buChar char="•"/>
+            </a:pPr>
+            <a:r>
+              <a:rPr lang="en-US" sz="1500" dirty="0">
+                <a:solidFill>
+                  <a:srgbClr val="212121"/>
+                </a:solidFill>
+                <a:latin typeface="Calibri" pitchFamily="34" charset="0"/>
+                <a:ea typeface="Calibri" pitchFamily="34" charset="-122"/>
+                <a:cs typeface="Calibri" pitchFamily="34" charset="-120"/>
+              </a:rPr>
+              <a:t>Sensitivity labels — Microsoft Purview labels flow through blob / OneLake / indexed SharePoint (preview)</a:t>
+            </a:r>
+            <a:endParaRPr lang="en-US" sz="1500" dirty="0"/>
+          </a:p>
+          <a:p>
+            <a:pPr marL="342900" indent="-342900">
+              <a:spcAft>
+                <a:spcPts val="600"/>
+              </a:spcAft>
+              <a:buSzPct val="100000"/>
+              <a:buChar char="•"/>
+            </a:pPr>
+            <a:r>
+              <a:rPr lang="en-US" sz="1500" dirty="0">
+                <a:solidFill>
+                  <a:srgbClr val="212121"/>
+                </a:solidFill>
+                <a:latin typeface="Calibri" pitchFamily="34" charset="0"/>
+                <a:ea typeface="Calibri" pitchFamily="34" charset="-122"/>
+                <a:cs typeface="Calibri" pitchFamily="34" charset="-120"/>
+              </a:rPr>
+              <a:t>Query-time enforcement — retrieval runs under the caller's Entra identity; only content the user is authorized to see comes back</a:t>
+            </a:r>
+            <a:endParaRPr lang="en-US" sz="1500" dirty="0"/>
+          </a:p>
+          <a:p>
+            <a:pPr marL="342900" indent="-342900">
+              <a:spcAft>
+                <a:spcPts val="600"/>
+              </a:spcAft>
+              <a:buSzPct val="100000"/>
+              <a:buChar char="•"/>
+            </a:pPr>
+            <a:r>
+              <a:rPr lang="en-US" sz="1500" dirty="0">
+                <a:solidFill>
+                  <a:srgbClr val="212121"/>
+                </a:solidFill>
+                <a:latin typeface="Calibri" pitchFamily="34" charset="0"/>
+                <a:ea typeface="Calibri" pitchFamily="34" charset="-122"/>
+                <a:cs typeface="Calibri" pitchFamily="34" charset="-120"/>
+              </a:rPr>
+              <a:t>Same knowledge base, different answers per user — no per-tenant infrastructure</a:t>
+            </a:r>
+            <a:endParaRPr lang="en-US" sz="1500" dirty="0"/>
           </a:p>
         </p:txBody>
       </p:sp>
       <p:sp>
         <p:nvSpPr>
-          <p:cNvPr id="6" name="Shape 4"/>
-          <p:cNvSpPr/>
-          <p:nvPr/>
-        </p:nvSpPr>
-        <p:spPr>
-          <a:xfrm>
-            <a:off x="365760" y="1691640"/>
-            <a:ext cx="8412480" cy="2468880"/>
-          </a:xfrm>
-          <a:prstGeom prst="rect">
-            <a:avLst/>
-          </a:prstGeom>
-          <a:solidFill>
-            <a:srgbClr val="F3F4F6"/>
-          </a:solidFill>
-          <a:ln w="6350">
-            <a:solidFill>
-              <a:srgbClr val="D1D5DB"/>
-            </a:solidFill>
-            <a:prstDash val="solid"/>
-          </a:ln>
-        </p:spPr>
-      </p:sp>
-      <p:sp>
-        <p:nvSpPr>
-          <p:cNvPr id="7" name="Text 5"/>
-          <p:cNvSpPr/>
-          <p:nvPr/>
-        </p:nvSpPr>
-        <p:spPr>
-          <a:xfrm>
-            <a:off x="502920" y="1783080"/>
-            <a:ext cx="8138160" cy="2286000"/>
-          </a:xfrm>
-          <a:prstGeom prst="rect">
-            <a:avLst/>
-          </a:prstGeom>
-          <a:noFill/>
-          <a:ln/>
-        </p:spPr>
-        <p:txBody>
-          <a:bodyPr wrap="square" lIns="0" tIns="0" rIns="0" bIns="0" rtlCol="0" anchor="t"/>
-          <a:lstStyle/>
-          <a:p>
-            <a:pPr indent="0" marL="0">
-              <a:buNone/>
-            </a:pPr>
-            <a:r>
-              <a:rPr lang="en-US" sz="1300" dirty="0">
-                <a:solidFill>
-                  <a:srgbClr val="212121"/>
-                </a:solidFill>
-                <a:latin typeface="Consolas" pitchFamily="34" charset="0"/>
-                <a:ea typeface="Consolas" pitchFamily="34" charset="-122"/>
-                <a:cs typeface="Consolas" pitchFamily="34" charset="-120"/>
-              </a:rPr>
-              <a:t>from agent_framework import Agent</a:t>
-            </a:r>
-            <a:endParaRPr lang="en-US" sz="1300" dirty="0"/>
-          </a:p>
-          <a:p>
-            <a:pPr indent="0" marL="0">
-              <a:buNone/>
-            </a:pPr>
-            <a:r>
-              <a:rPr lang="en-US" sz="1300" dirty="0">
-                <a:solidFill>
-                  <a:srgbClr val="212121"/>
-                </a:solidFill>
-                <a:latin typeface="Consolas" pitchFamily="34" charset="0"/>
-                <a:ea typeface="Consolas" pitchFamily="34" charset="-122"/>
-                <a:cs typeface="Consolas" pitchFamily="34" charset="-120"/>
-              </a:rPr>
-              <a:t>from agent_framework.foundry import FoundryChatClient</a:t>
-            </a:r>
-            <a:endParaRPr lang="en-US" sz="1300" dirty="0"/>
-          </a:p>
-          <a:p>
-            <a:pPr indent="0" marL="0">
-              <a:buNone/>
-            </a:pPr>
-            <a:r>
-              <a:rPr lang="en-US" sz="1300" dirty="0">
-                <a:solidFill>
-                  <a:srgbClr val="212121"/>
-                </a:solidFill>
-                <a:latin typeface="Consolas" pitchFamily="34" charset="0"/>
-                <a:ea typeface="Consolas" pitchFamily="34" charset="-122"/>
-                <a:cs typeface="Consolas" pitchFamily="34" charset="-120"/>
-              </a:rPr>
-              <a:t>from azure.identity import AzureCliCredential</a:t>
-            </a:r>
-            <a:endParaRPr lang="en-US" sz="1300" dirty="0"/>
-          </a:p>
-          <a:p>
-            <a:pPr indent="0" marL="0">
-              <a:buNone/>
-            </a:pPr>
-            <a:endParaRPr lang="en-US" sz="1300" dirty="0"/>
-          </a:p>
-          <a:p>
-            <a:pPr indent="0" marL="0">
-              <a:buNone/>
-            </a:pPr>
-            <a:r>
-              <a:rPr lang="en-US" sz="1300" dirty="0">
-                <a:solidFill>
-                  <a:srgbClr val="212121"/>
-                </a:solidFill>
-                <a:latin typeface="Consolas" pitchFamily="34" charset="0"/>
-                <a:ea typeface="Consolas" pitchFamily="34" charset="-122"/>
-                <a:cs typeface="Consolas" pitchFamily="34" charset="-120"/>
-              </a:rPr>
-              <a:t>agent = Agent(</a:t>
-            </a:r>
-            <a:endParaRPr lang="en-US" sz="1300" dirty="0"/>
-          </a:p>
-          <a:p>
-            <a:pPr indent="0" marL="0">
-              <a:buNone/>
-            </a:pPr>
-            <a:r>
-              <a:rPr lang="en-US" sz="1300" dirty="0">
-                <a:solidFill>
-                  <a:srgbClr val="212121"/>
-                </a:solidFill>
-                <a:latin typeface="Consolas" pitchFamily="34" charset="0"/>
-                <a:ea typeface="Consolas" pitchFamily="34" charset="-122"/>
-                <a:cs typeface="Consolas" pitchFamily="34" charset="-120"/>
-              </a:rPr>
-              <a:t>    client=FoundryChatClient(credential=AzureCliCredential()),</a:t>
-            </a:r>
-            <a:endParaRPr lang="en-US" sz="1300" dirty="0"/>
-          </a:p>
-          <a:p>
-            <a:pPr indent="0" marL="0">
-              <a:buNone/>
-            </a:pPr>
-            <a:r>
-              <a:rPr lang="en-US" sz="1300" dirty="0">
-                <a:solidFill>
-                  <a:srgbClr val="212121"/>
-                </a:solidFill>
-                <a:latin typeface="Consolas" pitchFamily="34" charset="0"/>
-                <a:ea typeface="Consolas" pitchFamily="34" charset="-122"/>
-                <a:cs typeface="Consolas" pitchFamily="34" charset="-120"/>
-              </a:rPr>
-              <a:t>    name="DocsAssistant",</a:t>
-            </a:r>
-            <a:endParaRPr lang="en-US" sz="1300" dirty="0"/>
-          </a:p>
-          <a:p>
-            <a:pPr indent="0" marL="0">
-              <a:buNone/>
-            </a:pPr>
-            <a:r>
-              <a:rPr lang="en-US" sz="1300" dirty="0">
-                <a:solidFill>
-                  <a:srgbClr val="212121"/>
-                </a:solidFill>
-                <a:latin typeface="Consolas" pitchFamily="34" charset="0"/>
-                <a:ea typeface="Consolas" pitchFamily="34" charset="-122"/>
-                <a:cs typeface="Consolas" pitchFamily="34" charset="-120"/>
-              </a:rPr>
-              <a:t>    instructions="Answer with citations from the docs knowledge base.",</a:t>
-            </a:r>
-            <a:endParaRPr lang="en-US" sz="1300" dirty="0"/>
-          </a:p>
-          <a:p>
-            <a:pPr indent="0" marL="0">
-              <a:buNone/>
-            </a:pPr>
-            <a:r>
-              <a:rPr lang="en-US" sz="1300" dirty="0">
-                <a:solidFill>
-                  <a:srgbClr val="212121"/>
-                </a:solidFill>
-                <a:latin typeface="Consolas" pitchFamily="34" charset="0"/>
-                <a:ea typeface="Consolas" pitchFamily="34" charset="-122"/>
-                <a:cs typeface="Consolas" pitchFamily="34" charset="-120"/>
-              </a:rPr>
-              <a:t>    # knowledge_base_id wired via Foundry project configuration</a:t>
-            </a:r>
-            <a:endParaRPr lang="en-US" sz="1300" dirty="0"/>
-          </a:p>
-          <a:p>
-            <a:pPr indent="0" marL="0">
-              <a:buNone/>
-            </a:pPr>
-            <a:r>
-              <a:rPr lang="en-US" sz="1300" dirty="0">
-                <a:solidFill>
-                  <a:srgbClr val="212121"/>
-                </a:solidFill>
-                <a:latin typeface="Consolas" pitchFamily="34" charset="0"/>
-                <a:ea typeface="Consolas" pitchFamily="34" charset="-122"/>
-                <a:cs typeface="Consolas" pitchFamily="34" charset="-120"/>
-              </a:rPr>
-              <a:t>)</a:t>
-            </a:r>
-            <a:endParaRPr lang="en-US" sz="1300" dirty="0"/>
-          </a:p>
-        </p:txBody>
-      </p:sp>
-      <p:sp>
-        <p:nvSpPr>
-          <p:cNvPr id="8" name="Text 6"/>
+          <p:cNvPr id="6" name="Text 4"/>
           <p:cNvSpPr/>
           <p:nvPr/>
         </p:nvSpPr>
         <p:spPr>
           <a:xfrm>
             <a:off x="365760" y="4343400"/>
-            <a:ext cx="8412480" cy="457200"/>
+            <a:ext cx="8412480" cy="365760"/>
           </a:xfrm>
           <a:prstGeom prst="rect">
             <a:avLst/>
@@ -3175,17 +3079,17 @@
               <a:buNone/>
             </a:pPr>
             <a:r>
-              <a:rPr lang="en-US" sz="1200" i="1" dirty="0">
-                <a:solidFill>
-                  <a:srgbClr val="6B7280"/>
-                </a:solidFill>
-                <a:latin typeface="Calibri" pitchFamily="34" charset="0"/>
-                <a:ea typeface="Calibri" pitchFamily="34" charset="-122"/>
-                <a:cs typeface="Calibri" pitchFamily="34" charset="-120"/>
-              </a:rPr>
-              <a:t>Prompt / Hosted agents: KB attached in agent config. Path C: call the knowledge-base REST API or AI Search SDK.</a:t>
-            </a:r>
-            <a:endParaRPr lang="en-US" sz="1200" dirty="0"/>
+              <a:rPr lang="en-US" sz="1300" b="1" i="1" dirty="0">
+                <a:solidFill>
+                  <a:srgbClr val="1E2761"/>
+                </a:solidFill>
+                <a:latin typeface="Calibri" pitchFamily="34" charset="0"/>
+                <a:ea typeface="Calibri" pitchFamily="34" charset="-122"/>
+                <a:cs typeface="Calibri" pitchFamily="34" charset="-120"/>
+              </a:rPr>
+              <a:t>Single biggest reason to prefer Foundry IQ over hand-rolling RAG on AI Search for enterprise content.</a:t>
+            </a:r>
+            <a:endParaRPr lang="en-US" sz="1300" dirty="0"/>
           </a:p>
         </p:txBody>
       </p:sp>
@@ -3313,7 +3217,7 @@
                 <a:ea typeface="Calibri" pitchFamily="34" charset="-122"/>
                 <a:cs typeface="Calibri" pitchFamily="34" charset="-120"/>
               </a:rPr>
-              <a:t>Portal for learning, IaC for production</a:t>
+              <a:t>When to use Foundry IQ</a:t>
             </a:r>
             <a:endParaRPr lang="en-US" sz="2800" dirty="0"/>
           </a:p>
@@ -3327,8 +3231,86 @@
         </p:nvSpPr>
         <p:spPr>
           <a:xfrm>
-            <a:off x="365760" y="1051560"/>
-            <a:ext cx="8412480" cy="457200"/>
+            <a:off x="365760" y="1097280"/>
+            <a:ext cx="4069080" cy="365760"/>
+          </a:xfrm>
+          <a:prstGeom prst="rect">
+            <a:avLst/>
+          </a:prstGeom>
+          <a:noFill/>
+          <a:ln/>
+        </p:spPr>
+        <p:txBody>
+          <a:bodyPr wrap="square" lIns="0" tIns="0" rIns="0" bIns="0" rtlCol="0" anchor="ctr"/>
+          <a:lstStyle/>
+          <a:p>
+            <a:pPr indent="0" marL="0">
+              <a:buNone/>
+            </a:pPr>
+            <a:r>
+              <a:rPr lang="en-US" sz="2000" b="1" dirty="0">
+                <a:solidFill>
+                  <a:srgbClr val="1E2761"/>
+                </a:solidFill>
+                <a:latin typeface="Calibri" pitchFamily="34" charset="0"/>
+                <a:ea typeface="Calibri" pitchFamily="34" charset="-122"/>
+                <a:cs typeface="Calibri" pitchFamily="34" charset="-120"/>
+              </a:rPr>
+              <a:t>Reach for IQ</a:t>
+            </a:r>
+            <a:endParaRPr lang="en-US" sz="2000" dirty="0"/>
+          </a:p>
+        </p:txBody>
+      </p:sp>
+      <p:sp>
+        <p:nvSpPr>
+          <p:cNvPr id="6" name="Text 4"/>
+          <p:cNvSpPr/>
+          <p:nvPr/>
+        </p:nvSpPr>
+        <p:spPr>
+          <a:xfrm>
+            <a:off x="4709160" y="1097280"/>
+            <a:ext cx="4069080" cy="365760"/>
+          </a:xfrm>
+          <a:prstGeom prst="rect">
+            <a:avLst/>
+          </a:prstGeom>
+          <a:noFill/>
+          <a:ln/>
+        </p:spPr>
+        <p:txBody>
+          <a:bodyPr wrap="square" lIns="0" tIns="0" rIns="0" bIns="0" rtlCol="0" anchor="ctr"/>
+          <a:lstStyle/>
+          <a:p>
+            <a:pPr indent="0" marL="0">
+              <a:buNone/>
+            </a:pPr>
+            <a:r>
+              <a:rPr lang="en-US" sz="2000" b="1" dirty="0">
+                <a:solidFill>
+                  <a:srgbClr val="1E2761"/>
+                </a:solidFill>
+                <a:latin typeface="Calibri" pitchFamily="34" charset="0"/>
+                <a:ea typeface="Calibri" pitchFamily="34" charset="-122"/>
+                <a:cs typeface="Calibri" pitchFamily="34" charset="-120"/>
+              </a:rPr>
+              <a:t>Reach for custom RAG (Module 2)</a:t>
+            </a:r>
+            <a:endParaRPr lang="en-US" sz="2000" dirty="0"/>
+          </a:p>
+        </p:txBody>
+      </p:sp>
+      <p:sp>
+        <p:nvSpPr>
+          <p:cNvPr id="7" name="Text 5"/>
+          <p:cNvSpPr/>
+          <p:nvPr/>
+        </p:nvSpPr>
+        <p:spPr>
+          <a:xfrm>
+            <a:off x="365760" y="1554480"/>
+            <a:ext cx="4069080" cy="3291840"/>
           </a:xfrm>
           <a:prstGeom prst="rect">
             <a:avLst/>
@@ -3340,11 +3322,15 @@
           <a:bodyPr wrap="square" rtlCol="0" anchor="ctr"/>
           <a:lstStyle/>
           <a:p>
-            <a:pPr indent="0" marL="0">
-              <a:buNone/>
-            </a:pPr>
-            <a:r>
-              <a:rPr lang="en-US" sz="1400" i="1" dirty="0">
+            <a:pPr marL="342900" indent="-342900">
+              <a:spcAft>
+                <a:spcPts val="600"/>
+              </a:spcAft>
+              <a:buSzPct val="100000"/>
+              <a:buChar char="•"/>
+            </a:pPr>
+            <a:r>
+              <a:rPr lang="en-US" sz="1500" dirty="0">
                 <a:solidFill>
                   <a:srgbClr val="212121"/>
                 </a:solidFill>
@@ -3352,22 +3338,106 @@
                 <a:ea typeface="Calibri" pitchFamily="34" charset="-122"/>
                 <a:cs typeface="Calibri" pitchFamily="34" charset="-120"/>
               </a:rPr>
-              <a:t>Same operating norm as Day 1 — production resource creation lives in code, not the portal.</a:t>
-            </a:r>
-            <a:endParaRPr lang="en-US" sz="1400" dirty="0"/>
+              <a:t>Content in a supported source (SharePoint, OneLake, blob, web, Fabric…)</a:t>
+            </a:r>
+            <a:endParaRPr lang="en-US" sz="1500" dirty="0"/>
+          </a:p>
+          <a:p>
+            <a:pPr marL="342900" indent="-342900">
+              <a:spcAft>
+                <a:spcPts val="600"/>
+              </a:spcAft>
+              <a:buSzPct val="100000"/>
+              <a:buChar char="•"/>
+            </a:pPr>
+            <a:r>
+              <a:rPr lang="en-US" sz="1500" dirty="0">
+                <a:solidFill>
+                  <a:srgbClr val="212121"/>
+                </a:solidFill>
+                <a:latin typeface="Calibri" pitchFamily="34" charset="0"/>
+                <a:ea typeface="Calibri" pitchFamily="34" charset="-122"/>
+                <a:cs typeface="Calibri" pitchFamily="34" charset="-120"/>
+              </a:rPr>
+              <a:t>Multiple agents will share the knowledge base</a:t>
+            </a:r>
+            <a:endParaRPr lang="en-US" sz="1500" dirty="0"/>
+          </a:p>
+          <a:p>
+            <a:pPr marL="342900" indent="-342900">
+              <a:spcAft>
+                <a:spcPts val="600"/>
+              </a:spcAft>
+              <a:buSzPct val="100000"/>
+              <a:buChar char="•"/>
+            </a:pPr>
+            <a:r>
+              <a:rPr lang="en-US" sz="1500" dirty="0">
+                <a:solidFill>
+                  <a:srgbClr val="212121"/>
+                </a:solidFill>
+                <a:latin typeface="Calibri" pitchFamily="34" charset="0"/>
+                <a:ea typeface="Calibri" pitchFamily="34" charset="-122"/>
+                <a:cs typeface="Calibri" pitchFamily="34" charset="-120"/>
+              </a:rPr>
+              <a:t>Need permission-aware answers per caller</a:t>
+            </a:r>
+            <a:endParaRPr lang="en-US" sz="1500" dirty="0"/>
+          </a:p>
+          <a:p>
+            <a:pPr marL="342900" indent="-342900">
+              <a:spcAft>
+                <a:spcPts val="600"/>
+              </a:spcAft>
+              <a:buSzPct val="100000"/>
+              <a:buChar char="•"/>
+            </a:pPr>
+            <a:r>
+              <a:rPr lang="en-US" sz="1500" dirty="0">
+                <a:solidFill>
+                  <a:srgbClr val="212121"/>
+                </a:solidFill>
+                <a:latin typeface="Calibri" pitchFamily="34" charset="0"/>
+                <a:ea typeface="Calibri" pitchFamily="34" charset="-122"/>
+                <a:cs typeface="Calibri" pitchFamily="34" charset="-120"/>
+              </a:rPr>
+              <a:t>Want managed indexing, chunking, embeddings, refresh</a:t>
+            </a:r>
+            <a:endParaRPr lang="en-US" sz="1500" dirty="0"/>
+          </a:p>
+          <a:p>
+            <a:pPr marL="342900" indent="-342900">
+              <a:spcAft>
+                <a:spcPts val="600"/>
+              </a:spcAft>
+              <a:buSzPct val="100000"/>
+              <a:buChar char="•"/>
+            </a:pPr>
+            <a:r>
+              <a:rPr lang="en-US" sz="1500" dirty="0">
+                <a:solidFill>
+                  <a:srgbClr val="212121"/>
+                </a:solidFill>
+                <a:latin typeface="Calibri" pitchFamily="34" charset="0"/>
+                <a:ea typeface="Calibri" pitchFamily="34" charset="-122"/>
+                <a:cs typeface="Calibri" pitchFamily="34" charset="-120"/>
+              </a:rPr>
+              <a:t>Want the agentic retrieval pipeline without writing it</a:t>
+            </a:r>
+            <a:endParaRPr lang="en-US" sz="1500" dirty="0"/>
           </a:p>
         </p:txBody>
       </p:sp>
       <p:sp>
         <p:nvSpPr>
-          <p:cNvPr id="6" name="Text 4"/>
+          <p:cNvPr id="8" name="Text 6"/>
           <p:cNvSpPr/>
           <p:nvPr/>
         </p:nvSpPr>
         <p:spPr>
           <a:xfrm>
-            <a:off x="365760" y="1691640"/>
-            <a:ext cx="8412480" cy="2377440"/>
+            <a:off x="4709160" y="1554480"/>
+            <a:ext cx="4069080" cy="3291840"/>
           </a:xfrm>
           <a:prstGeom prst="rect">
             <a:avLst/>
@@ -3395,7 +3465,7 @@
                 <a:ea typeface="Calibri" pitchFamily="34" charset="-122"/>
                 <a:cs typeface="Calibri" pitchFamily="34" charset="-120"/>
               </a:rPr>
-              <a:t>Azure CLI — az search knowledge-source create ... (verify current command surface)</a:t>
+              <a:t>Need control IQ doesn't yet give you (custom re-rankers, unusual chunk sizes, novel embeddings)</a:t>
             </a:r>
             <a:endParaRPr lang="en-US" sz="1500" dirty="0"/>
           </a:p>
@@ -3416,7 +3486,7 @@
                 <a:ea typeface="Calibri" pitchFamily="34" charset="-122"/>
                 <a:cs typeface="Calibri" pitchFamily="34" charset="-120"/>
               </a:rPr>
-              <a:t>REST — PUT https://&lt;search&gt;.search.windows.net/knowledgeSources/&lt;name&gt;?api-version=2026-04-01</a:t>
+              <a:t>Your source isn't a supported connector</a:t>
             </a:r>
             <a:endParaRPr lang="en-US" sz="1500" dirty="0"/>
           </a:p>
@@ -3437,7 +3507,7 @@
                 <a:ea typeface="Calibri" pitchFamily="34" charset="-122"/>
                 <a:cs typeface="Calibri" pitchFamily="34" charset="-120"/>
               </a:rPr>
-              <a:t>Python SDK — azure-search-documents client</a:t>
+              <a:t>Already invested in an AI Search index with heavy customization</a:t>
             </a:r>
             <a:endParaRPr lang="en-US" sz="1500" dirty="0"/>
           </a:p>
@@ -3458,48 +3528,9 @@
                 <a:ea typeface="Calibri" pitchFamily="34" charset="-122"/>
                 <a:cs typeface="Calibri" pitchFamily="34" charset="-120"/>
               </a:rPr>
-              <a:t>Portal — fine for exploration; use it for today's lab so we don't spend the workshop on IaC</a:t>
+              <a:t>Latency SLA below what IQ's pipeline delivers</a:t>
             </a:r>
             <a:endParaRPr lang="en-US" sz="1500" dirty="0"/>
-          </a:p>
-        </p:txBody>
-      </p:sp>
-      <p:sp>
-        <p:nvSpPr>
-          <p:cNvPr id="7" name="Text 5"/>
-          <p:cNvSpPr/>
-          <p:nvPr/>
-        </p:nvSpPr>
-        <p:spPr>
-          <a:xfrm>
-            <a:off x="365760" y="4160520"/>
-            <a:ext cx="8412480" cy="640080"/>
-          </a:xfrm>
-          <a:prstGeom prst="rect">
-            <a:avLst/>
-          </a:prstGeom>
-          <a:noFill/>
-          <a:ln/>
-        </p:spPr>
-        <p:txBody>
-          <a:bodyPr wrap="square" rtlCol="0" anchor="ctr"/>
-          <a:lstStyle/>
-          <a:p>
-            <a:pPr indent="0" marL="0">
-              <a:buNone/>
-            </a:pPr>
-            <a:r>
-              <a:rPr lang="en-US" sz="1200" b="1" i="1" dirty="0">
-                <a:solidFill>
-                  <a:srgbClr val="1E2761"/>
-                </a:solidFill>
-                <a:latin typeface="Calibri" pitchFamily="34" charset="0"/>
-                <a:ea typeface="Calibri" pitchFamily="34" charset="-122"/>
-                <a:cs typeface="Calibri" pitchFamily="34" charset="-120"/>
-              </a:rPr>
-              <a:t>Today's lab uses the portal for the KB setup so you can focus on retrieval quality and agent behavior. Real production paths belong in IaC — that's the norm we set on Day 1.</a:t>
-            </a:r>
-            <a:endParaRPr lang="en-US" sz="1200" dirty="0"/>
           </a:p>
         </p:txBody>
       </p:sp>
@@ -3627,6 +3658,734 @@
                 <a:ea typeface="Calibri" pitchFamily="34" charset="-122"/>
                 <a:cs typeface="Calibri" pitchFamily="34" charset="-120"/>
               </a:rPr>
+              <a:t>Working with knowledge bases in MAF</a:t>
+            </a:r>
+            <a:endParaRPr lang="en-US" sz="2800" dirty="0"/>
+          </a:p>
+        </p:txBody>
+      </p:sp>
+      <p:sp>
+        <p:nvSpPr>
+          <p:cNvPr id="5" name="Text 3"/>
+          <p:cNvSpPr/>
+          <p:nvPr/>
+        </p:nvSpPr>
+        <p:spPr>
+          <a:xfrm>
+            <a:off x="365760" y="1051560"/>
+            <a:ext cx="8412480" cy="548640"/>
+          </a:xfrm>
+          <a:prstGeom prst="rect">
+            <a:avLst/>
+          </a:prstGeom>
+          <a:noFill/>
+          <a:ln/>
+        </p:spPr>
+        <p:txBody>
+          <a:bodyPr wrap="square" rtlCol="0" anchor="ctr"/>
+          <a:lstStyle/>
+          <a:p>
+            <a:pPr indent="0" marL="0">
+              <a:buNone/>
+            </a:pPr>
+            <a:r>
+              <a:rPr lang="en-US" sz="1300" dirty="0">
+                <a:solidFill>
+                  <a:srgbClr val="212121"/>
+                </a:solidFill>
+                <a:latin typeface="Calibri" pitchFamily="34" charset="0"/>
+                <a:ea typeface="Calibri" pitchFamily="34" charset="-122"/>
+                <a:cs typeface="Calibri" pitchFamily="34" charset="-120"/>
+              </a:rPr>
+              <a:t>From your MAF app, the knowledge base is just another dependency — no retrieval code in your agent:</a:t>
+            </a:r>
+            <a:endParaRPr lang="en-US" sz="1300" dirty="0"/>
+          </a:p>
+        </p:txBody>
+      </p:sp>
+      <p:sp>
+        <p:nvSpPr>
+          <p:cNvPr id="6" name="Shape 4"/>
+          <p:cNvSpPr/>
+          <p:nvPr/>
+        </p:nvSpPr>
+        <p:spPr>
+          <a:xfrm>
+            <a:off x="365760" y="1691640"/>
+            <a:ext cx="8412480" cy="2468880"/>
+          </a:xfrm>
+          <a:prstGeom prst="rect">
+            <a:avLst/>
+          </a:prstGeom>
+          <a:solidFill>
+            <a:srgbClr val="F3F4F6"/>
+          </a:solidFill>
+          <a:ln w="6350">
+            <a:solidFill>
+              <a:srgbClr val="D1D5DB"/>
+            </a:solidFill>
+            <a:prstDash val="solid"/>
+          </a:ln>
+        </p:spPr>
+      </p:sp>
+      <p:sp>
+        <p:nvSpPr>
+          <p:cNvPr id="7" name="Text 5"/>
+          <p:cNvSpPr/>
+          <p:nvPr/>
+        </p:nvSpPr>
+        <p:spPr>
+          <a:xfrm>
+            <a:off x="502920" y="1783080"/>
+            <a:ext cx="8138160" cy="2286000"/>
+          </a:xfrm>
+          <a:prstGeom prst="rect">
+            <a:avLst/>
+          </a:prstGeom>
+          <a:noFill/>
+          <a:ln/>
+        </p:spPr>
+        <p:txBody>
+          <a:bodyPr wrap="square" lIns="0" tIns="0" rIns="0" bIns="0" rtlCol="0" anchor="t"/>
+          <a:lstStyle/>
+          <a:p>
+            <a:pPr indent="0" marL="0">
+              <a:buNone/>
+            </a:pPr>
+            <a:r>
+              <a:rPr lang="en-US" sz="1300" dirty="0">
+                <a:solidFill>
+                  <a:srgbClr val="212121"/>
+                </a:solidFill>
+                <a:latin typeface="Consolas" pitchFamily="34" charset="0"/>
+                <a:ea typeface="Consolas" pitchFamily="34" charset="-122"/>
+                <a:cs typeface="Consolas" pitchFamily="34" charset="-120"/>
+              </a:rPr>
+              <a:t>from agent_framework import Agent</a:t>
+            </a:r>
+            <a:endParaRPr lang="en-US" sz="1300" dirty="0"/>
+          </a:p>
+          <a:p>
+            <a:pPr indent="0" marL="0">
+              <a:buNone/>
+            </a:pPr>
+            <a:r>
+              <a:rPr lang="en-US" sz="1300" dirty="0">
+                <a:solidFill>
+                  <a:srgbClr val="212121"/>
+                </a:solidFill>
+                <a:latin typeface="Consolas" pitchFamily="34" charset="0"/>
+                <a:ea typeface="Consolas" pitchFamily="34" charset="-122"/>
+                <a:cs typeface="Consolas" pitchFamily="34" charset="-120"/>
+              </a:rPr>
+              <a:t>from agent_framework.foundry import FoundryChatClient</a:t>
+            </a:r>
+            <a:endParaRPr lang="en-US" sz="1300" dirty="0"/>
+          </a:p>
+          <a:p>
+            <a:pPr indent="0" marL="0">
+              <a:buNone/>
+            </a:pPr>
+            <a:r>
+              <a:rPr lang="en-US" sz="1300" dirty="0">
+                <a:solidFill>
+                  <a:srgbClr val="212121"/>
+                </a:solidFill>
+                <a:latin typeface="Consolas" pitchFamily="34" charset="0"/>
+                <a:ea typeface="Consolas" pitchFamily="34" charset="-122"/>
+                <a:cs typeface="Consolas" pitchFamily="34" charset="-120"/>
+              </a:rPr>
+              <a:t>from azure.identity import AzureCliCredential</a:t>
+            </a:r>
+            <a:endParaRPr lang="en-US" sz="1300" dirty="0"/>
+          </a:p>
+          <a:p>
+            <a:pPr indent="0" marL="0">
+              <a:buNone/>
+            </a:pPr>
+            <a:endParaRPr lang="en-US" sz="1300" dirty="0"/>
+          </a:p>
+          <a:p>
+            <a:pPr indent="0" marL="0">
+              <a:buNone/>
+            </a:pPr>
+            <a:r>
+              <a:rPr lang="en-US" sz="1300" dirty="0">
+                <a:solidFill>
+                  <a:srgbClr val="212121"/>
+                </a:solidFill>
+                <a:latin typeface="Consolas" pitchFamily="34" charset="0"/>
+                <a:ea typeface="Consolas" pitchFamily="34" charset="-122"/>
+                <a:cs typeface="Consolas" pitchFamily="34" charset="-120"/>
+              </a:rPr>
+              <a:t>agent = Agent(</a:t>
+            </a:r>
+            <a:endParaRPr lang="en-US" sz="1300" dirty="0"/>
+          </a:p>
+          <a:p>
+            <a:pPr indent="0" marL="0">
+              <a:buNone/>
+            </a:pPr>
+            <a:r>
+              <a:rPr lang="en-US" sz="1300" dirty="0">
+                <a:solidFill>
+                  <a:srgbClr val="212121"/>
+                </a:solidFill>
+                <a:latin typeface="Consolas" pitchFamily="34" charset="0"/>
+                <a:ea typeface="Consolas" pitchFamily="34" charset="-122"/>
+                <a:cs typeface="Consolas" pitchFamily="34" charset="-120"/>
+              </a:rPr>
+              <a:t>    client=FoundryChatClient(credential=AzureCliCredential()),</a:t>
+            </a:r>
+            <a:endParaRPr lang="en-US" sz="1300" dirty="0"/>
+          </a:p>
+          <a:p>
+            <a:pPr indent="0" marL="0">
+              <a:buNone/>
+            </a:pPr>
+            <a:r>
+              <a:rPr lang="en-US" sz="1300" dirty="0">
+                <a:solidFill>
+                  <a:srgbClr val="212121"/>
+                </a:solidFill>
+                <a:latin typeface="Consolas" pitchFamily="34" charset="0"/>
+                <a:ea typeface="Consolas" pitchFamily="34" charset="-122"/>
+                <a:cs typeface="Consolas" pitchFamily="34" charset="-120"/>
+              </a:rPr>
+              <a:t>    name="DocsAssistant",</a:t>
+            </a:r>
+            <a:endParaRPr lang="en-US" sz="1300" dirty="0"/>
+          </a:p>
+          <a:p>
+            <a:pPr indent="0" marL="0">
+              <a:buNone/>
+            </a:pPr>
+            <a:r>
+              <a:rPr lang="en-US" sz="1300" dirty="0">
+                <a:solidFill>
+                  <a:srgbClr val="212121"/>
+                </a:solidFill>
+                <a:latin typeface="Consolas" pitchFamily="34" charset="0"/>
+                <a:ea typeface="Consolas" pitchFamily="34" charset="-122"/>
+                <a:cs typeface="Consolas" pitchFamily="34" charset="-120"/>
+              </a:rPr>
+              <a:t>    instructions="Answer with citations from the docs knowledge base.",</a:t>
+            </a:r>
+            <a:endParaRPr lang="en-US" sz="1300" dirty="0"/>
+          </a:p>
+          <a:p>
+            <a:pPr indent="0" marL="0">
+              <a:buNone/>
+            </a:pPr>
+            <a:r>
+              <a:rPr lang="en-US" sz="1300" dirty="0">
+                <a:solidFill>
+                  <a:srgbClr val="212121"/>
+                </a:solidFill>
+                <a:latin typeface="Consolas" pitchFamily="34" charset="0"/>
+                <a:ea typeface="Consolas" pitchFamily="34" charset="-122"/>
+                <a:cs typeface="Consolas" pitchFamily="34" charset="-120"/>
+              </a:rPr>
+              <a:t>    # knowledge_base_id wired via Foundry project configuration</a:t>
+            </a:r>
+            <a:endParaRPr lang="en-US" sz="1300" dirty="0"/>
+          </a:p>
+          <a:p>
+            <a:pPr indent="0" marL="0">
+              <a:buNone/>
+            </a:pPr>
+            <a:r>
+              <a:rPr lang="en-US" sz="1300" dirty="0">
+                <a:solidFill>
+                  <a:srgbClr val="212121"/>
+                </a:solidFill>
+                <a:latin typeface="Consolas" pitchFamily="34" charset="0"/>
+                <a:ea typeface="Consolas" pitchFamily="34" charset="-122"/>
+                <a:cs typeface="Consolas" pitchFamily="34" charset="-120"/>
+              </a:rPr>
+              <a:t>)</a:t>
+            </a:r>
+            <a:endParaRPr lang="en-US" sz="1300" dirty="0"/>
+          </a:p>
+        </p:txBody>
+      </p:sp>
+      <p:sp>
+        <p:nvSpPr>
+          <p:cNvPr id="8" name="Text 6"/>
+          <p:cNvSpPr/>
+          <p:nvPr/>
+        </p:nvSpPr>
+        <p:spPr>
+          <a:xfrm>
+            <a:off x="365760" y="4343400"/>
+            <a:ext cx="8412480" cy="457200"/>
+          </a:xfrm>
+          <a:prstGeom prst="rect">
+            <a:avLst/>
+          </a:prstGeom>
+          <a:noFill/>
+          <a:ln/>
+        </p:spPr>
+        <p:txBody>
+          <a:bodyPr wrap="square" rtlCol="0" anchor="ctr"/>
+          <a:lstStyle/>
+          <a:p>
+            <a:pPr indent="0" marL="0">
+              <a:buNone/>
+            </a:pPr>
+            <a:r>
+              <a:rPr lang="en-US" sz="1200" i="1" dirty="0">
+                <a:solidFill>
+                  <a:srgbClr val="6B7280"/>
+                </a:solidFill>
+                <a:latin typeface="Calibri" pitchFamily="34" charset="0"/>
+                <a:ea typeface="Calibri" pitchFamily="34" charset="-122"/>
+                <a:cs typeface="Calibri" pitchFamily="34" charset="-120"/>
+              </a:rPr>
+              <a:t>Prompt / Hosted agents: KB attached in agent config. Path C: call the knowledge-base REST API or AI Search SDK.</a:t>
+            </a:r>
+            <a:endParaRPr lang="en-US" sz="1200" dirty="0"/>
+          </a:p>
+        </p:txBody>
+      </p:sp>
+    </p:spTree>
+  </p:cSld>
+  <p:clrMapOvr>
+    <a:masterClrMapping/>
+  </p:clrMapOvr>
+</p:sld>
+</file>
+
+<file path=ppt/slides/slide14.xml><?xml version="1.0" encoding="utf-8"?>
+<p:sld xmlns:a="http://schemas.openxmlformats.org/drawingml/2006/main" xmlns:r="http://schemas.openxmlformats.org/officeDocument/2006/relationships" xmlns:p="http://schemas.openxmlformats.org/presentationml/2006/main">
+  <p:cSld name="Slide 14">
+    <p:bg>
+      <p:bgPr>
+        <a:solidFill>
+          <a:srgbClr val="FFFFFF"/>
+        </a:solidFill>
+      </p:bgPr>
+    </p:bg>
+    <p:spTree>
+      <p:nvGrpSpPr>
+        <p:cNvPr id="1" name=""/>
+        <p:cNvGrpSpPr/>
+        <p:nvPr/>
+      </p:nvGrpSpPr>
+      <p:grpSpPr>
+        <a:xfrm>
+          <a:off x="0" y="0"/>
+          <a:ext cx="0" cy="0"/>
+          <a:chOff x="0" y="0"/>
+          <a:chExt cx="0" cy="0"/>
+        </a:xfrm>
+      </p:grpSpPr>
+      <p:sp>
+        <p:nvSpPr>
+          <p:cNvPr id="2" name="Shape 0"/>
+          <p:cNvSpPr/>
+          <p:nvPr/>
+        </p:nvSpPr>
+        <p:spPr>
+          <a:xfrm>
+            <a:off x="0" y="0"/>
+            <a:ext cx="54864" cy="5143500"/>
+          </a:xfrm>
+          <a:prstGeom prst="rect">
+            <a:avLst/>
+          </a:prstGeom>
+          <a:solidFill>
+            <a:srgbClr val="1E2761"/>
+          </a:solidFill>
+          <a:ln/>
+        </p:spPr>
+      </p:sp>
+      <p:sp>
+        <p:nvSpPr>
+          <p:cNvPr id="3" name="Text 1"/>
+          <p:cNvSpPr/>
+          <p:nvPr/>
+        </p:nvSpPr>
+        <p:spPr>
+          <a:xfrm>
+            <a:off x="5669280" y="274320"/>
+            <a:ext cx="3291840" cy="274320"/>
+          </a:xfrm>
+          <a:prstGeom prst="rect">
+            <a:avLst/>
+          </a:prstGeom>
+          <a:noFill/>
+          <a:ln/>
+        </p:spPr>
+        <p:txBody>
+          <a:bodyPr wrap="square" lIns="0" tIns="0" rIns="0" bIns="0" rtlCol="0" anchor="ctr"/>
+          <a:lstStyle/>
+          <a:p>
+            <a:pPr algn="r" indent="0" marL="0">
+              <a:buNone/>
+            </a:pPr>
+            <a:r>
+              <a:rPr lang="en-US" sz="1000" dirty="0">
+                <a:solidFill>
+                  <a:srgbClr val="6B7280"/>
+                </a:solidFill>
+                <a:latin typeface="Calibri" pitchFamily="34" charset="0"/>
+                <a:ea typeface="Calibri" pitchFamily="34" charset="-122"/>
+                <a:cs typeface="Calibri" pitchFamily="34" charset="-120"/>
+              </a:rPr>
+              <a:t>Day 2 · Module 1</a:t>
+            </a:r>
+            <a:endParaRPr lang="en-US" sz="1000" dirty="0"/>
+          </a:p>
+        </p:txBody>
+      </p:sp>
+      <p:sp>
+        <p:nvSpPr>
+          <p:cNvPr id="4" name="Text 2"/>
+          <p:cNvSpPr/>
+          <p:nvPr/>
+        </p:nvSpPr>
+        <p:spPr>
+          <a:xfrm>
+            <a:off x="365760" y="320040"/>
+            <a:ext cx="6217920" cy="640080"/>
+          </a:xfrm>
+          <a:prstGeom prst="rect">
+            <a:avLst/>
+          </a:prstGeom>
+          <a:noFill/>
+          <a:ln/>
+        </p:spPr>
+        <p:txBody>
+          <a:bodyPr wrap="square" lIns="0" tIns="0" rIns="0" bIns="0" rtlCol="0" anchor="ctr"/>
+          <a:lstStyle/>
+          <a:p>
+            <a:pPr indent="0" marL="0">
+              <a:buNone/>
+            </a:pPr>
+            <a:r>
+              <a:rPr lang="en-US" sz="2800" b="1" dirty="0">
+                <a:solidFill>
+                  <a:srgbClr val="1E2761"/>
+                </a:solidFill>
+                <a:latin typeface="Calibri" pitchFamily="34" charset="0"/>
+                <a:ea typeface="Calibri" pitchFamily="34" charset="-122"/>
+                <a:cs typeface="Calibri" pitchFamily="34" charset="-120"/>
+              </a:rPr>
+              <a:t>Portal for learning, IaC for production</a:t>
+            </a:r>
+            <a:endParaRPr lang="en-US" sz="2800" dirty="0"/>
+          </a:p>
+        </p:txBody>
+      </p:sp>
+      <p:sp>
+        <p:nvSpPr>
+          <p:cNvPr id="5" name="Text 3"/>
+          <p:cNvSpPr/>
+          <p:nvPr/>
+        </p:nvSpPr>
+        <p:spPr>
+          <a:xfrm>
+            <a:off x="365760" y="1051560"/>
+            <a:ext cx="8412480" cy="457200"/>
+          </a:xfrm>
+          <a:prstGeom prst="rect">
+            <a:avLst/>
+          </a:prstGeom>
+          <a:noFill/>
+          <a:ln/>
+        </p:spPr>
+        <p:txBody>
+          <a:bodyPr wrap="square" rtlCol="0" anchor="ctr"/>
+          <a:lstStyle/>
+          <a:p>
+            <a:pPr indent="0" marL="0">
+              <a:buNone/>
+            </a:pPr>
+            <a:r>
+              <a:rPr lang="en-US" sz="1400" i="1" dirty="0">
+                <a:solidFill>
+                  <a:srgbClr val="212121"/>
+                </a:solidFill>
+                <a:latin typeface="Calibri" pitchFamily="34" charset="0"/>
+                <a:ea typeface="Calibri" pitchFamily="34" charset="-122"/>
+                <a:cs typeface="Calibri" pitchFamily="34" charset="-120"/>
+              </a:rPr>
+              <a:t>Same operating norm as Day 1 — production resource creation lives in code, not the portal.</a:t>
+            </a:r>
+            <a:endParaRPr lang="en-US" sz="1400" dirty="0"/>
+          </a:p>
+        </p:txBody>
+      </p:sp>
+      <p:sp>
+        <p:nvSpPr>
+          <p:cNvPr id="6" name="Text 4"/>
+          <p:cNvSpPr/>
+          <p:nvPr/>
+        </p:nvSpPr>
+        <p:spPr>
+          <a:xfrm>
+            <a:off x="365760" y="1691640"/>
+            <a:ext cx="8412480" cy="2377440"/>
+          </a:xfrm>
+          <a:prstGeom prst="rect">
+            <a:avLst/>
+          </a:prstGeom>
+          <a:noFill/>
+          <a:ln/>
+        </p:spPr>
+        <p:txBody>
+          <a:bodyPr wrap="square" rtlCol="0" anchor="ctr"/>
+          <a:lstStyle/>
+          <a:p>
+            <a:pPr marL="342900" indent="-342900">
+              <a:spcAft>
+                <a:spcPts val="600"/>
+              </a:spcAft>
+              <a:buSzPct val="100000"/>
+              <a:buChar char="•"/>
+            </a:pPr>
+            <a:r>
+              <a:rPr lang="en-US" sz="1500" dirty="0">
+                <a:solidFill>
+                  <a:srgbClr val="212121"/>
+                </a:solidFill>
+                <a:latin typeface="Calibri" pitchFamily="34" charset="0"/>
+                <a:ea typeface="Calibri" pitchFamily="34" charset="-122"/>
+                <a:cs typeface="Calibri" pitchFamily="34" charset="-120"/>
+              </a:rPr>
+              <a:t>Azure CLI — az search knowledge-source create ... (verify current command surface)</a:t>
+            </a:r>
+            <a:endParaRPr lang="en-US" sz="1500" dirty="0"/>
+          </a:p>
+          <a:p>
+            <a:pPr marL="342900" indent="-342900">
+              <a:spcAft>
+                <a:spcPts val="600"/>
+              </a:spcAft>
+              <a:buSzPct val="100000"/>
+              <a:buChar char="•"/>
+            </a:pPr>
+            <a:r>
+              <a:rPr lang="en-US" sz="1500" dirty="0">
+                <a:solidFill>
+                  <a:srgbClr val="212121"/>
+                </a:solidFill>
+                <a:latin typeface="Calibri" pitchFamily="34" charset="0"/>
+                <a:ea typeface="Calibri" pitchFamily="34" charset="-122"/>
+                <a:cs typeface="Calibri" pitchFamily="34" charset="-120"/>
+              </a:rPr>
+              <a:t>REST — PUT https://&lt;search&gt;.search.windows.net/knowledgeSources/&lt;name&gt;?api-version=2026-04-01</a:t>
+            </a:r>
+            <a:endParaRPr lang="en-US" sz="1500" dirty="0"/>
+          </a:p>
+          <a:p>
+            <a:pPr marL="342900" indent="-342900">
+              <a:spcAft>
+                <a:spcPts val="600"/>
+              </a:spcAft>
+              <a:buSzPct val="100000"/>
+              <a:buChar char="•"/>
+            </a:pPr>
+            <a:r>
+              <a:rPr lang="en-US" sz="1500" dirty="0">
+                <a:solidFill>
+                  <a:srgbClr val="212121"/>
+                </a:solidFill>
+                <a:latin typeface="Calibri" pitchFamily="34" charset="0"/>
+                <a:ea typeface="Calibri" pitchFamily="34" charset="-122"/>
+                <a:cs typeface="Calibri" pitchFamily="34" charset="-120"/>
+              </a:rPr>
+              <a:t>Python SDK — azure-search-documents client</a:t>
+            </a:r>
+            <a:endParaRPr lang="en-US" sz="1500" dirty="0"/>
+          </a:p>
+          <a:p>
+            <a:pPr marL="342900" indent="-342900">
+              <a:spcAft>
+                <a:spcPts val="600"/>
+              </a:spcAft>
+              <a:buSzPct val="100000"/>
+              <a:buChar char="•"/>
+            </a:pPr>
+            <a:r>
+              <a:rPr lang="en-US" sz="1500" dirty="0">
+                <a:solidFill>
+                  <a:srgbClr val="212121"/>
+                </a:solidFill>
+                <a:latin typeface="Calibri" pitchFamily="34" charset="0"/>
+                <a:ea typeface="Calibri" pitchFamily="34" charset="-122"/>
+                <a:cs typeface="Calibri" pitchFamily="34" charset="-120"/>
+              </a:rPr>
+              <a:t>Portal — fine for exploration; use it for today's lab so we don't spend the workshop on IaC</a:t>
+            </a:r>
+            <a:endParaRPr lang="en-US" sz="1500" dirty="0"/>
+          </a:p>
+        </p:txBody>
+      </p:sp>
+      <p:sp>
+        <p:nvSpPr>
+          <p:cNvPr id="7" name="Text 5"/>
+          <p:cNvSpPr/>
+          <p:nvPr/>
+        </p:nvSpPr>
+        <p:spPr>
+          <a:xfrm>
+            <a:off x="365760" y="4160520"/>
+            <a:ext cx="8412480" cy="640080"/>
+          </a:xfrm>
+          <a:prstGeom prst="rect">
+            <a:avLst/>
+          </a:prstGeom>
+          <a:noFill/>
+          <a:ln/>
+        </p:spPr>
+        <p:txBody>
+          <a:bodyPr wrap="square" rtlCol="0" anchor="ctr"/>
+          <a:lstStyle/>
+          <a:p>
+            <a:pPr indent="0" marL="0">
+              <a:buNone/>
+            </a:pPr>
+            <a:r>
+              <a:rPr lang="en-US" sz="1200" b="1" i="1" dirty="0">
+                <a:solidFill>
+                  <a:srgbClr val="1E2761"/>
+                </a:solidFill>
+                <a:latin typeface="Calibri" pitchFamily="34" charset="0"/>
+                <a:ea typeface="Calibri" pitchFamily="34" charset="-122"/>
+                <a:cs typeface="Calibri" pitchFamily="34" charset="-120"/>
+              </a:rPr>
+              <a:t>Today's lab uses the portal for the KB setup so you can focus on retrieval quality and agent behavior. Real production paths belong in IaC — that's the norm we set on Day 1.</a:t>
+            </a:r>
+            <a:endParaRPr lang="en-US" sz="1200" dirty="0"/>
+          </a:p>
+        </p:txBody>
+      </p:sp>
+    </p:spTree>
+  </p:cSld>
+  <p:clrMapOvr>
+    <a:masterClrMapping/>
+  </p:clrMapOvr>
+</p:sld>
+</file>
+
+<file path=ppt/slides/slide15.xml><?xml version="1.0" encoding="utf-8"?>
+<p:sld xmlns:a="http://schemas.openxmlformats.org/drawingml/2006/main" xmlns:r="http://schemas.openxmlformats.org/officeDocument/2006/relationships" xmlns:p="http://schemas.openxmlformats.org/presentationml/2006/main">
+  <p:cSld name="Slide 15">
+    <p:bg>
+      <p:bgPr>
+        <a:solidFill>
+          <a:srgbClr val="FFFFFF"/>
+        </a:solidFill>
+      </p:bgPr>
+    </p:bg>
+    <p:spTree>
+      <p:nvGrpSpPr>
+        <p:cNvPr id="1" name=""/>
+        <p:cNvGrpSpPr/>
+        <p:nvPr/>
+      </p:nvGrpSpPr>
+      <p:grpSpPr>
+        <a:xfrm>
+          <a:off x="0" y="0"/>
+          <a:ext cx="0" cy="0"/>
+          <a:chOff x="0" y="0"/>
+          <a:chExt cx="0" cy="0"/>
+        </a:xfrm>
+      </p:grpSpPr>
+      <p:sp>
+        <p:nvSpPr>
+          <p:cNvPr id="2" name="Shape 0"/>
+          <p:cNvSpPr/>
+          <p:nvPr/>
+        </p:nvSpPr>
+        <p:spPr>
+          <a:xfrm>
+            <a:off x="0" y="0"/>
+            <a:ext cx="54864" cy="5143500"/>
+          </a:xfrm>
+          <a:prstGeom prst="rect">
+            <a:avLst/>
+          </a:prstGeom>
+          <a:solidFill>
+            <a:srgbClr val="1E2761"/>
+          </a:solidFill>
+          <a:ln/>
+        </p:spPr>
+      </p:sp>
+      <p:sp>
+        <p:nvSpPr>
+          <p:cNvPr id="3" name="Text 1"/>
+          <p:cNvSpPr/>
+          <p:nvPr/>
+        </p:nvSpPr>
+        <p:spPr>
+          <a:xfrm>
+            <a:off x="5669280" y="274320"/>
+            <a:ext cx="3291840" cy="274320"/>
+          </a:xfrm>
+          <a:prstGeom prst="rect">
+            <a:avLst/>
+          </a:prstGeom>
+          <a:noFill/>
+          <a:ln/>
+        </p:spPr>
+        <p:txBody>
+          <a:bodyPr wrap="square" lIns="0" tIns="0" rIns="0" bIns="0" rtlCol="0" anchor="ctr"/>
+          <a:lstStyle/>
+          <a:p>
+            <a:pPr algn="r" indent="0" marL="0">
+              <a:buNone/>
+            </a:pPr>
+            <a:r>
+              <a:rPr lang="en-US" sz="1000" dirty="0">
+                <a:solidFill>
+                  <a:srgbClr val="6B7280"/>
+                </a:solidFill>
+                <a:latin typeface="Calibri" pitchFamily="34" charset="0"/>
+                <a:ea typeface="Calibri" pitchFamily="34" charset="-122"/>
+                <a:cs typeface="Calibri" pitchFamily="34" charset="-120"/>
+              </a:rPr>
+              <a:t>Day 2 · Module 1</a:t>
+            </a:r>
+            <a:endParaRPr lang="en-US" sz="1000" dirty="0"/>
+          </a:p>
+        </p:txBody>
+      </p:sp>
+      <p:sp>
+        <p:nvSpPr>
+          <p:cNvPr id="4" name="Text 2"/>
+          <p:cNvSpPr/>
+          <p:nvPr/>
+        </p:nvSpPr>
+        <p:spPr>
+          <a:xfrm>
+            <a:off x="365760" y="320040"/>
+            <a:ext cx="6217920" cy="640080"/>
+          </a:xfrm>
+          <a:prstGeom prst="rect">
+            <a:avLst/>
+          </a:prstGeom>
+          <a:noFill/>
+          <a:ln/>
+        </p:spPr>
+        <p:txBody>
+          <a:bodyPr wrap="square" lIns="0" tIns="0" rIns="0" bIns="0" rtlCol="0" anchor="ctr"/>
+          <a:lstStyle/>
+          <a:p>
+            <a:pPr indent="0" marL="0">
+              <a:buNone/>
+            </a:pPr>
+            <a:r>
+              <a:rPr lang="en-US" sz="2800" b="1" dirty="0">
+                <a:solidFill>
+                  <a:srgbClr val="1E2761"/>
+                </a:solidFill>
+                <a:latin typeface="Calibri" pitchFamily="34" charset="0"/>
+                <a:ea typeface="Calibri" pitchFamily="34" charset="-122"/>
+                <a:cs typeface="Calibri" pitchFamily="34" charset="-120"/>
+              </a:rPr>
               <a:t>Adjacent IQ workloads</a:t>
             </a:r>
             <a:endParaRPr lang="en-US" sz="2800" dirty="0"/>
@@ -3674,7 +4433,7 @@
       </p:sp>
       <p:graphicFrame>
         <p:nvGraphicFramePr>
-          <p:cNvPr id="14" name="Table 0"/>
+          <p:cNvPr id="16" name="Table 0"/>
           <p:cNvGraphicFramePr>
             <a:graphicFrameLocks noGrp="1"/>
           </p:cNvGraphicFramePr>
@@ -4574,9 +5333,9 @@
 </p:sld>
 </file>
 
-<file path=ppt/slides/slide14.xml><?xml version="1.0" encoding="utf-8"?>
+<file path=ppt/slides/slide16.xml><?xml version="1.0" encoding="utf-8"?>
 <p:sld xmlns:a="http://schemas.openxmlformats.org/drawingml/2006/main" xmlns:r="http://schemas.openxmlformats.org/officeDocument/2006/relationships" xmlns:p="http://schemas.openxmlformats.org/presentationml/2006/main">
-  <p:cSld name="Slide 14">
+  <p:cSld name="Slide 16">
     <p:bg>
       <p:bgPr>
         <a:solidFill>
@@ -4831,9 +5590,9 @@
 </p:sld>
 </file>
 
-<file path=ppt/slides/slide15.xml><?xml version="1.0" encoding="utf-8"?>
+<file path=ppt/slides/slide17.xml><?xml version="1.0" encoding="utf-8"?>
 <p:sld xmlns:a="http://schemas.openxmlformats.org/drawingml/2006/main" xmlns:r="http://schemas.openxmlformats.org/officeDocument/2006/relationships" xmlns:p="http://schemas.openxmlformats.org/presentationml/2006/main">
-  <p:cSld name="Slide 15">
+  <p:cSld name="Slide 17">
     <p:bg>
       <p:bgPr>
         <a:solidFill>
@@ -6489,7 +7248,7 @@
     <p:bg>
       <p:bgPr>
         <a:solidFill>
-          <a:srgbClr val="FFFFFF"/>
+          <a:srgbClr val="CADCFC"/>
         </a:solidFill>
       </p:bgPr>
     </p:bg>
@@ -6516,7 +7275,7 @@
         <p:spPr>
           <a:xfrm>
             <a:off x="0" y="0"/>
-            <a:ext cx="54864" cy="5143500"/>
+            <a:ext cx="146304" cy="5143500"/>
           </a:xfrm>
           <a:prstGeom prst="rect">
             <a:avLst/>
@@ -6560,7 +7319,7 @@
                 <a:ea typeface="Calibri" pitchFamily="34" charset="-122"/>
                 <a:cs typeface="Calibri" pitchFamily="34" charset="-120"/>
               </a:rPr>
-              <a:t>Day 2 · Module 1</a:t>
+              <a:t>Day 2 · Module 1 · Demo</a:t>
             </a:r>
             <a:endParaRPr lang="en-US" sz="1000" dirty="0"/>
           </a:p>
@@ -6574,8 +7333,8 @@
         </p:nvSpPr>
         <p:spPr>
           <a:xfrm>
-            <a:off x="365760" y="320040"/>
-            <a:ext cx="6217920" cy="640080"/>
+            <a:off x="548640" y="1051560"/>
+            <a:ext cx="5486400" cy="502920"/>
           </a:xfrm>
           <a:prstGeom prst="rect">
             <a:avLst/>
@@ -6591,7 +7350,7 @@
               <a:buNone/>
             </a:pPr>
             <a:r>
-              <a:rPr lang="en-US" sz="2800" b="1" dirty="0">
+              <a:rPr lang="en-US" sz="3200" b="1" spc="800" kern="0" dirty="0">
                 <a:solidFill>
                   <a:srgbClr val="1E2761"/>
                 </a:solidFill>
@@ -6599,9 +7358,9 @@
                 <a:ea typeface="Calibri" pitchFamily="34" charset="-122"/>
                 <a:cs typeface="Calibri" pitchFamily="34" charset="-120"/>
               </a:rPr>
-              <a:t>Supported knowledge sources</a:t>
-            </a:r>
-            <a:endParaRPr lang="en-US" sz="2800" dirty="0"/>
+              <a:t>DEMO</a:t>
+            </a:r>
+            <a:endParaRPr lang="en-US" sz="3200" dirty="0"/>
           </a:p>
         </p:txBody>
       </p:sp>
@@ -6613,8 +7372,8 @@
         </p:nvSpPr>
         <p:spPr>
           <a:xfrm>
-            <a:off x="365760" y="1097280"/>
-            <a:ext cx="4069080" cy="365760"/>
+            <a:off x="548640" y="1691640"/>
+            <a:ext cx="8046720" cy="914400"/>
           </a:xfrm>
           <a:prstGeom prst="rect">
             <a:avLst/>
@@ -6630,7 +7389,7 @@
               <a:buNone/>
             </a:pPr>
             <a:r>
-              <a:rPr lang="en-US" sz="2000" b="1" dirty="0">
+              <a:rPr lang="en-US" sz="3000" b="1" dirty="0">
                 <a:solidFill>
                   <a:srgbClr val="1E2761"/>
                 </a:solidFill>
@@ -6638,9 +7397,9 @@
                 <a:ea typeface="Calibri" pitchFamily="34" charset="-122"/>
                 <a:cs typeface="Calibri" pitchFamily="34" charset="-120"/>
               </a:rPr>
-              <a:t>Indexed</a:t>
-            </a:r>
-            <a:endParaRPr lang="en-US" sz="2000" dirty="0"/>
+              <a:t>Attach an IQ knowledge source, portal-first</a:t>
+            </a:r>
+            <a:endParaRPr lang="en-US" sz="3000" dirty="0"/>
           </a:p>
         </p:txBody>
       </p:sp>
@@ -6652,8 +7411,8 @@
         </p:nvSpPr>
         <p:spPr>
           <a:xfrm>
-            <a:off x="4709160" y="1097280"/>
-            <a:ext cx="4069080" cy="365760"/>
+            <a:off x="6583680" y="1051560"/>
+            <a:ext cx="2194560" cy="502920"/>
           </a:xfrm>
           <a:prstGeom prst="rect">
             <a:avLst/>
@@ -6665,21 +7424,21 @@
           <a:bodyPr wrap="square" lIns="0" tIns="0" rIns="0" bIns="0" rtlCol="0" anchor="ctr"/>
           <a:lstStyle/>
           <a:p>
-            <a:pPr indent="0" marL="0">
+            <a:pPr algn="r" indent="0" marL="0">
               <a:buNone/>
             </a:pPr>
             <a:r>
-              <a:rPr lang="en-US" sz="2000" b="1" dirty="0">
-                <a:solidFill>
-                  <a:srgbClr val="1E2761"/>
-                </a:solidFill>
-                <a:latin typeface="Calibri" pitchFamily="34" charset="0"/>
-                <a:ea typeface="Calibri" pitchFamily="34" charset="-122"/>
-                <a:cs typeface="Calibri" pitchFamily="34" charset="-120"/>
-              </a:rPr>
-              <a:t>Remote</a:t>
-            </a:r>
-            <a:endParaRPr lang="en-US" sz="2000" dirty="0"/>
+              <a:rPr lang="en-US" sz="1800" i="1" dirty="0">
+                <a:solidFill>
+                  <a:srgbClr val="6B7280"/>
+                </a:solidFill>
+                <a:latin typeface="Calibri" pitchFamily="34" charset="0"/>
+                <a:ea typeface="Calibri" pitchFamily="34" charset="-122"/>
+                <a:cs typeface="Calibri" pitchFamily="34" charset="-120"/>
+              </a:rPr>
+              <a:t>~4 min</a:t>
+            </a:r>
+            <a:endParaRPr lang="en-US" sz="1800" dirty="0"/>
           </a:p>
         </p:txBody>
       </p:sp>
@@ -6691,8 +7450,8 @@
         </p:nvSpPr>
         <p:spPr>
           <a:xfrm>
-            <a:off x="365760" y="1554480"/>
-            <a:ext cx="4069080" cy="3291840"/>
+            <a:off x="548640" y="2788920"/>
+            <a:ext cx="8046720" cy="1371600"/>
           </a:xfrm>
           <a:prstGeom prst="rect">
             <a:avLst/>
@@ -6701,18 +7460,17 @@
           <a:ln/>
         </p:spPr>
         <p:txBody>
-          <a:bodyPr wrap="square" rtlCol="0" anchor="ctr"/>
+          <a:bodyPr wrap="square" lIns="0" tIns="0" rIns="0" bIns="0" rtlCol="0" anchor="ctr"/>
           <a:lstStyle/>
           <a:p>
-            <a:pPr marL="342900" indent="-342900">
+            <a:pPr indent="0" marL="0">
               <a:spcAft>
                 <a:spcPts val="600"/>
               </a:spcAft>
-              <a:buSzPct val="100000"/>
-              <a:buChar char="•"/>
-            </a:pPr>
-            <a:r>
-              <a:rPr lang="en-US" sz="1500" dirty="0">
+              <a:buNone/>
+            </a:pPr>
+            <a:r>
+              <a:rPr lang="en-US" sz="1600" dirty="0">
                 <a:solidFill>
                   <a:srgbClr val="212121"/>
                 </a:solidFill>
@@ -6720,114 +7478,9 @@
                 <a:ea typeface="Calibri" pitchFamily="34" charset="-122"/>
                 <a:cs typeface="Calibri" pitchFamily="34" charset="-120"/>
               </a:rPr>
-              <a:t>Search index (wrap an existing one)</a:t>
-            </a:r>
-            <a:endParaRPr lang="en-US" sz="1500" dirty="0"/>
-          </a:p>
-          <a:p>
-            <a:pPr marL="342900" indent="-342900">
-              <a:spcAft>
-                <a:spcPts val="600"/>
-              </a:spcAft>
-              <a:buSzPct val="100000"/>
-              <a:buChar char="•"/>
-            </a:pPr>
-            <a:r>
-              <a:rPr lang="en-US" sz="1500" dirty="0">
-                <a:solidFill>
-                  <a:srgbClr val="212121"/>
-                </a:solidFill>
-                <a:latin typeface="Calibri" pitchFamily="34" charset="0"/>
-                <a:ea typeface="Calibri" pitchFamily="34" charset="-122"/>
-                <a:cs typeface="Calibri" pitchFamily="34" charset="-120"/>
-              </a:rPr>
-              <a:t>Azure Blob</a:t>
-            </a:r>
-            <a:endParaRPr lang="en-US" sz="1500" dirty="0"/>
-          </a:p>
-          <a:p>
-            <a:pPr marL="342900" indent="-342900">
-              <a:spcAft>
-                <a:spcPts val="600"/>
-              </a:spcAft>
-              <a:buSzPct val="100000"/>
-              <a:buChar char="•"/>
-            </a:pPr>
-            <a:r>
-              <a:rPr lang="en-US" sz="1500" dirty="0">
-                <a:solidFill>
-                  <a:srgbClr val="212121"/>
-                </a:solidFill>
-                <a:latin typeface="Calibri" pitchFamily="34" charset="0"/>
-                <a:ea typeface="Calibri" pitchFamily="34" charset="-122"/>
-                <a:cs typeface="Calibri" pitchFamily="34" charset="-120"/>
-              </a:rPr>
-              <a:t>OneLake</a:t>
-            </a:r>
-            <a:endParaRPr lang="en-US" sz="1500" dirty="0"/>
-          </a:p>
-          <a:p>
-            <a:pPr marL="342900" indent="-342900">
-              <a:spcAft>
-                <a:spcPts val="600"/>
-              </a:spcAft>
-              <a:buSzPct val="100000"/>
-              <a:buChar char="•"/>
-            </a:pPr>
-            <a:r>
-              <a:rPr lang="en-US" sz="1500" dirty="0">
-                <a:solidFill>
-                  <a:srgbClr val="212121"/>
-                </a:solidFill>
-                <a:latin typeface="Calibri" pitchFamily="34" charset="0"/>
-                <a:ea typeface="Calibri" pitchFamily="34" charset="-122"/>
-                <a:cs typeface="Calibri" pitchFamily="34" charset="-120"/>
-              </a:rPr>
-              <a:t>Azure SQL (preview)</a:t>
-            </a:r>
-            <a:endParaRPr lang="en-US" sz="1500" dirty="0"/>
-          </a:p>
-          <a:p>
-            <a:pPr marL="342900" indent="-342900">
-              <a:spcAft>
-                <a:spcPts val="600"/>
-              </a:spcAft>
-              <a:buSzPct val="100000"/>
-              <a:buChar char="•"/>
-            </a:pPr>
-            <a:r>
-              <a:rPr lang="en-US" sz="1500" dirty="0">
-                <a:solidFill>
-                  <a:srgbClr val="212121"/>
-                </a:solidFill>
-                <a:latin typeface="Calibri" pitchFamily="34" charset="0"/>
-                <a:ea typeface="Calibri" pitchFamily="34" charset="-122"/>
-                <a:cs typeface="Calibri" pitchFamily="34" charset="-120"/>
-              </a:rPr>
-              <a:t>Indexed SharePoint (preview)</a:t>
-            </a:r>
-            <a:endParaRPr lang="en-US" sz="1500" dirty="0"/>
-          </a:p>
-          <a:p>
-            <a:pPr marL="342900" indent="-342900">
-              <a:spcAft>
-                <a:spcPts val="600"/>
-              </a:spcAft>
-              <a:buSzPct val="100000"/>
-              <a:buChar char="•"/>
-            </a:pPr>
-            <a:r>
-              <a:rPr lang="en-US" sz="1500" dirty="0">
-                <a:solidFill>
-                  <a:srgbClr val="212121"/>
-                </a:solidFill>
-                <a:latin typeface="Calibri" pitchFamily="34" charset="0"/>
-                <a:ea typeface="Calibri" pitchFamily="34" charset="-122"/>
-                <a:cs typeface="Calibri" pitchFamily="34" charset="-120"/>
-              </a:rPr>
-              <a:t>File upload (preview)</a:t>
-            </a:r>
-            <a:endParaRPr lang="en-US" sz="1500" dirty="0"/>
+              <a:t>Foundry portal walkthrough: create a Foundry IQ knowledge base backed by a pre-uploaded blob container, then attach it to a docs-assistant agent. Same three objects the slide just described — knowledge source, knowledge base, agent that consumes them — but click-through instead of code. Sets attendees up for the portal setup they'll do themselves in the lab.</a:t>
+            </a:r>
+            <a:endParaRPr lang="en-US" sz="1600" dirty="0"/>
           </a:p>
         </p:txBody>
       </p:sp>
@@ -6839,8 +7492,8 @@
         </p:nvSpPr>
         <p:spPr>
           <a:xfrm>
-            <a:off x="4709160" y="1554480"/>
-            <a:ext cx="4069080" cy="3291840"/>
+            <a:off x="548640" y="4434840"/>
+            <a:ext cx="8046720" cy="320040"/>
           </a:xfrm>
           <a:prstGeom prst="rect">
             <a:avLst/>
@@ -6849,162 +7502,14 @@
           <a:ln/>
         </p:spPr>
         <p:txBody>
-          <a:bodyPr wrap="square" rtlCol="0" anchor="ctr"/>
-          <a:lstStyle/>
-          <a:p>
-            <a:pPr marL="342900" indent="-342900">
-              <a:spcAft>
-                <a:spcPts val="600"/>
-              </a:spcAft>
-              <a:buSzPct val="100000"/>
-              <a:buChar char="•"/>
-            </a:pPr>
-            <a:r>
-              <a:rPr lang="en-US" sz="1500" dirty="0">
-                <a:solidFill>
-                  <a:srgbClr val="212121"/>
-                </a:solidFill>
-                <a:latin typeface="Calibri" pitchFamily="34" charset="0"/>
-                <a:ea typeface="Calibri" pitchFamily="34" charset="-122"/>
-                <a:cs typeface="Calibri" pitchFamily="34" charset="-120"/>
-              </a:rPr>
-              <a:t>Web (Bing) — public</a:t>
-            </a:r>
-            <a:endParaRPr lang="en-US" sz="1500" dirty="0"/>
-          </a:p>
-          <a:p>
-            <a:pPr marL="342900" indent="-342900">
-              <a:spcAft>
-                <a:spcPts val="600"/>
-              </a:spcAft>
-              <a:buSzPct val="100000"/>
-              <a:buChar char="•"/>
-            </a:pPr>
-            <a:r>
-              <a:rPr lang="en-US" sz="1500" dirty="0">
-                <a:solidFill>
-                  <a:srgbClr val="212121"/>
-                </a:solidFill>
-                <a:latin typeface="Calibri" pitchFamily="34" charset="0"/>
-                <a:ea typeface="Calibri" pitchFamily="34" charset="-122"/>
-                <a:cs typeface="Calibri" pitchFamily="34" charset="-120"/>
-              </a:rPr>
-              <a:t>Remote SharePoint (preview)</a:t>
-            </a:r>
-            <a:endParaRPr lang="en-US" sz="1500" dirty="0"/>
-          </a:p>
-          <a:p>
-            <a:pPr marL="342900" indent="-342900">
-              <a:spcAft>
-                <a:spcPts val="600"/>
-              </a:spcAft>
-              <a:buSzPct val="100000"/>
-              <a:buChar char="•"/>
-            </a:pPr>
-            <a:r>
-              <a:rPr lang="en-US" sz="1500" dirty="0">
-                <a:solidFill>
-                  <a:srgbClr val="212121"/>
-                </a:solidFill>
-                <a:latin typeface="Calibri" pitchFamily="34" charset="0"/>
-                <a:ea typeface="Calibri" pitchFamily="34" charset="-122"/>
-                <a:cs typeface="Calibri" pitchFamily="34" charset="-120"/>
-              </a:rPr>
-              <a:t>Fabric Data Agent (preview)</a:t>
-            </a:r>
-            <a:endParaRPr lang="en-US" sz="1500" dirty="0"/>
-          </a:p>
-          <a:p>
-            <a:pPr marL="342900" indent="-342900">
-              <a:spcAft>
-                <a:spcPts val="600"/>
-              </a:spcAft>
-              <a:buSzPct val="100000"/>
-              <a:buChar char="•"/>
-            </a:pPr>
-            <a:r>
-              <a:rPr lang="en-US" sz="1500" dirty="0">
-                <a:solidFill>
-                  <a:srgbClr val="212121"/>
-                </a:solidFill>
-                <a:latin typeface="Calibri" pitchFamily="34" charset="0"/>
-                <a:ea typeface="Calibri" pitchFamily="34" charset="-122"/>
-                <a:cs typeface="Calibri" pitchFamily="34" charset="-120"/>
-              </a:rPr>
-              <a:t>Fabric Ontology (preview)</a:t>
-            </a:r>
-            <a:endParaRPr lang="en-US" sz="1500" dirty="0"/>
-          </a:p>
-          <a:p>
-            <a:pPr marL="342900" indent="-342900">
-              <a:spcAft>
-                <a:spcPts val="600"/>
-              </a:spcAft>
-              <a:buSzPct val="100000"/>
-              <a:buChar char="•"/>
-            </a:pPr>
-            <a:r>
-              <a:rPr lang="en-US" sz="1500" dirty="0">
-                <a:solidFill>
-                  <a:srgbClr val="212121"/>
-                </a:solidFill>
-                <a:latin typeface="Calibri" pitchFamily="34" charset="0"/>
-                <a:ea typeface="Calibri" pitchFamily="34" charset="-122"/>
-                <a:cs typeface="Calibri" pitchFamily="34" charset="-120"/>
-              </a:rPr>
-              <a:t>Work IQ (preview)</a:t>
-            </a:r>
-            <a:endParaRPr lang="en-US" sz="1500" dirty="0"/>
-          </a:p>
-          <a:p>
-            <a:pPr marL="342900" indent="-342900">
-              <a:spcAft>
-                <a:spcPts val="600"/>
-              </a:spcAft>
-              <a:buSzPct val="100000"/>
-              <a:buChar char="•"/>
-            </a:pPr>
-            <a:r>
-              <a:rPr lang="en-US" sz="1500" dirty="0">
-                <a:solidFill>
-                  <a:srgbClr val="212121"/>
-                </a:solidFill>
-                <a:latin typeface="Calibri" pitchFamily="34" charset="0"/>
-                <a:ea typeface="Calibri" pitchFamily="34" charset="-122"/>
-                <a:cs typeface="Calibri" pitchFamily="34" charset="-120"/>
-              </a:rPr>
-              <a:t>MCP server (preview)</a:t>
-            </a:r>
-            <a:endParaRPr lang="en-US" sz="1500" dirty="0"/>
-          </a:p>
-        </p:txBody>
-      </p:sp>
-      <p:sp>
-        <p:nvSpPr>
-          <p:cNvPr id="9" name="Text 7"/>
-          <p:cNvSpPr/>
-          <p:nvPr/>
-        </p:nvSpPr>
-        <p:spPr>
-          <a:xfrm>
-            <a:off x="365760" y="4434840"/>
-            <a:ext cx="8412480" cy="365760"/>
-          </a:xfrm>
-          <a:prstGeom prst="rect">
-            <a:avLst/>
-          </a:prstGeom>
-          <a:noFill/>
-          <a:ln/>
-        </p:spPr>
-        <p:txBody>
-          <a:bodyPr wrap="square" rtlCol="0" anchor="ctr"/>
+          <a:bodyPr wrap="square" lIns="0" tIns="0" rIns="0" bIns="0" rtlCol="0" anchor="ctr"/>
           <a:lstStyle/>
           <a:p>
             <a:pPr indent="0" marL="0">
               <a:buNone/>
             </a:pPr>
             <a:r>
-              <a:rPr lang="en-US" sz="1300" i="1" dirty="0">
+              <a:rPr lang="en-US" sz="1100" i="1" dirty="0">
                 <a:solidFill>
                   <a:srgbClr val="6B7280"/>
                 </a:solidFill>
@@ -7012,9 +7517,9 @@
                 <a:ea typeface="Calibri" pitchFamily="34" charset="-122"/>
                 <a:cs typeface="Calibri" pitchFamily="34" charset="-120"/>
               </a:rPr>
-              <a:t>Both flow through the same ranking pipeline. You mix indexed and remote in one knowledge base.</a:t>
-            </a:r>
-            <a:endParaRPr lang="en-US" sz="1300" dirty="0"/>
+              <a:t>Runbook: demos/day2/module-1-demo-1-iq-attach-portal.md</a:t>
+            </a:r>
+            <a:endParaRPr lang="en-US" sz="1100" dirty="0"/>
           </a:p>
         </p:txBody>
       </p:sp>
@@ -7142,6 +7647,549 @@
                 <a:ea typeface="Calibri" pitchFamily="34" charset="-122"/>
                 <a:cs typeface="Calibri" pitchFamily="34" charset="-120"/>
               </a:rPr>
+              <a:t>Supported knowledge sources</a:t>
+            </a:r>
+            <a:endParaRPr lang="en-US" sz="2800" dirty="0"/>
+          </a:p>
+        </p:txBody>
+      </p:sp>
+      <p:sp>
+        <p:nvSpPr>
+          <p:cNvPr id="5" name="Text 3"/>
+          <p:cNvSpPr/>
+          <p:nvPr/>
+        </p:nvSpPr>
+        <p:spPr>
+          <a:xfrm>
+            <a:off x="365760" y="1097280"/>
+            <a:ext cx="4069080" cy="365760"/>
+          </a:xfrm>
+          <a:prstGeom prst="rect">
+            <a:avLst/>
+          </a:prstGeom>
+          <a:noFill/>
+          <a:ln/>
+        </p:spPr>
+        <p:txBody>
+          <a:bodyPr wrap="square" lIns="0" tIns="0" rIns="0" bIns="0" rtlCol="0" anchor="ctr"/>
+          <a:lstStyle/>
+          <a:p>
+            <a:pPr indent="0" marL="0">
+              <a:buNone/>
+            </a:pPr>
+            <a:r>
+              <a:rPr lang="en-US" sz="2000" b="1" dirty="0">
+                <a:solidFill>
+                  <a:srgbClr val="1E2761"/>
+                </a:solidFill>
+                <a:latin typeface="Calibri" pitchFamily="34" charset="0"/>
+                <a:ea typeface="Calibri" pitchFamily="34" charset="-122"/>
+                <a:cs typeface="Calibri" pitchFamily="34" charset="-120"/>
+              </a:rPr>
+              <a:t>Indexed</a:t>
+            </a:r>
+            <a:endParaRPr lang="en-US" sz="2000" dirty="0"/>
+          </a:p>
+        </p:txBody>
+      </p:sp>
+      <p:sp>
+        <p:nvSpPr>
+          <p:cNvPr id="6" name="Text 4"/>
+          <p:cNvSpPr/>
+          <p:nvPr/>
+        </p:nvSpPr>
+        <p:spPr>
+          <a:xfrm>
+            <a:off x="4709160" y="1097280"/>
+            <a:ext cx="4069080" cy="365760"/>
+          </a:xfrm>
+          <a:prstGeom prst="rect">
+            <a:avLst/>
+          </a:prstGeom>
+          <a:noFill/>
+          <a:ln/>
+        </p:spPr>
+        <p:txBody>
+          <a:bodyPr wrap="square" lIns="0" tIns="0" rIns="0" bIns="0" rtlCol="0" anchor="ctr"/>
+          <a:lstStyle/>
+          <a:p>
+            <a:pPr indent="0" marL="0">
+              <a:buNone/>
+            </a:pPr>
+            <a:r>
+              <a:rPr lang="en-US" sz="2000" b="1" dirty="0">
+                <a:solidFill>
+                  <a:srgbClr val="1E2761"/>
+                </a:solidFill>
+                <a:latin typeface="Calibri" pitchFamily="34" charset="0"/>
+                <a:ea typeface="Calibri" pitchFamily="34" charset="-122"/>
+                <a:cs typeface="Calibri" pitchFamily="34" charset="-120"/>
+              </a:rPr>
+              <a:t>Remote</a:t>
+            </a:r>
+            <a:endParaRPr lang="en-US" sz="2000" dirty="0"/>
+          </a:p>
+        </p:txBody>
+      </p:sp>
+      <p:sp>
+        <p:nvSpPr>
+          <p:cNvPr id="7" name="Text 5"/>
+          <p:cNvSpPr/>
+          <p:nvPr/>
+        </p:nvSpPr>
+        <p:spPr>
+          <a:xfrm>
+            <a:off x="365760" y="1554480"/>
+            <a:ext cx="4069080" cy="3291840"/>
+          </a:xfrm>
+          <a:prstGeom prst="rect">
+            <a:avLst/>
+          </a:prstGeom>
+          <a:noFill/>
+          <a:ln/>
+        </p:spPr>
+        <p:txBody>
+          <a:bodyPr wrap="square" rtlCol="0" anchor="ctr"/>
+          <a:lstStyle/>
+          <a:p>
+            <a:pPr marL="342900" indent="-342900">
+              <a:spcAft>
+                <a:spcPts val="600"/>
+              </a:spcAft>
+              <a:buSzPct val="100000"/>
+              <a:buChar char="•"/>
+            </a:pPr>
+            <a:r>
+              <a:rPr lang="en-US" sz="1500" dirty="0">
+                <a:solidFill>
+                  <a:srgbClr val="212121"/>
+                </a:solidFill>
+                <a:latin typeface="Calibri" pitchFamily="34" charset="0"/>
+                <a:ea typeface="Calibri" pitchFamily="34" charset="-122"/>
+                <a:cs typeface="Calibri" pitchFamily="34" charset="-120"/>
+              </a:rPr>
+              <a:t>Search index (wrap an existing one)</a:t>
+            </a:r>
+            <a:endParaRPr lang="en-US" sz="1500" dirty="0"/>
+          </a:p>
+          <a:p>
+            <a:pPr marL="342900" indent="-342900">
+              <a:spcAft>
+                <a:spcPts val="600"/>
+              </a:spcAft>
+              <a:buSzPct val="100000"/>
+              <a:buChar char="•"/>
+            </a:pPr>
+            <a:r>
+              <a:rPr lang="en-US" sz="1500" dirty="0">
+                <a:solidFill>
+                  <a:srgbClr val="212121"/>
+                </a:solidFill>
+                <a:latin typeface="Calibri" pitchFamily="34" charset="0"/>
+                <a:ea typeface="Calibri" pitchFamily="34" charset="-122"/>
+                <a:cs typeface="Calibri" pitchFamily="34" charset="-120"/>
+              </a:rPr>
+              <a:t>Azure Blob</a:t>
+            </a:r>
+            <a:endParaRPr lang="en-US" sz="1500" dirty="0"/>
+          </a:p>
+          <a:p>
+            <a:pPr marL="342900" indent="-342900">
+              <a:spcAft>
+                <a:spcPts val="600"/>
+              </a:spcAft>
+              <a:buSzPct val="100000"/>
+              <a:buChar char="•"/>
+            </a:pPr>
+            <a:r>
+              <a:rPr lang="en-US" sz="1500" dirty="0">
+                <a:solidFill>
+                  <a:srgbClr val="212121"/>
+                </a:solidFill>
+                <a:latin typeface="Calibri" pitchFamily="34" charset="0"/>
+                <a:ea typeface="Calibri" pitchFamily="34" charset="-122"/>
+                <a:cs typeface="Calibri" pitchFamily="34" charset="-120"/>
+              </a:rPr>
+              <a:t>OneLake</a:t>
+            </a:r>
+            <a:endParaRPr lang="en-US" sz="1500" dirty="0"/>
+          </a:p>
+          <a:p>
+            <a:pPr marL="342900" indent="-342900">
+              <a:spcAft>
+                <a:spcPts val="600"/>
+              </a:spcAft>
+              <a:buSzPct val="100000"/>
+              <a:buChar char="•"/>
+            </a:pPr>
+            <a:r>
+              <a:rPr lang="en-US" sz="1500" dirty="0">
+                <a:solidFill>
+                  <a:srgbClr val="212121"/>
+                </a:solidFill>
+                <a:latin typeface="Calibri" pitchFamily="34" charset="0"/>
+                <a:ea typeface="Calibri" pitchFamily="34" charset="-122"/>
+                <a:cs typeface="Calibri" pitchFamily="34" charset="-120"/>
+              </a:rPr>
+              <a:t>Azure SQL (preview)</a:t>
+            </a:r>
+            <a:endParaRPr lang="en-US" sz="1500" dirty="0"/>
+          </a:p>
+          <a:p>
+            <a:pPr marL="342900" indent="-342900">
+              <a:spcAft>
+                <a:spcPts val="600"/>
+              </a:spcAft>
+              <a:buSzPct val="100000"/>
+              <a:buChar char="•"/>
+            </a:pPr>
+            <a:r>
+              <a:rPr lang="en-US" sz="1500" dirty="0">
+                <a:solidFill>
+                  <a:srgbClr val="212121"/>
+                </a:solidFill>
+                <a:latin typeface="Calibri" pitchFamily="34" charset="0"/>
+                <a:ea typeface="Calibri" pitchFamily="34" charset="-122"/>
+                <a:cs typeface="Calibri" pitchFamily="34" charset="-120"/>
+              </a:rPr>
+              <a:t>Indexed SharePoint (preview)</a:t>
+            </a:r>
+            <a:endParaRPr lang="en-US" sz="1500" dirty="0"/>
+          </a:p>
+          <a:p>
+            <a:pPr marL="342900" indent="-342900">
+              <a:spcAft>
+                <a:spcPts val="600"/>
+              </a:spcAft>
+              <a:buSzPct val="100000"/>
+              <a:buChar char="•"/>
+            </a:pPr>
+            <a:r>
+              <a:rPr lang="en-US" sz="1500" dirty="0">
+                <a:solidFill>
+                  <a:srgbClr val="212121"/>
+                </a:solidFill>
+                <a:latin typeface="Calibri" pitchFamily="34" charset="0"/>
+                <a:ea typeface="Calibri" pitchFamily="34" charset="-122"/>
+                <a:cs typeface="Calibri" pitchFamily="34" charset="-120"/>
+              </a:rPr>
+              <a:t>File upload (preview)</a:t>
+            </a:r>
+            <a:endParaRPr lang="en-US" sz="1500" dirty="0"/>
+          </a:p>
+        </p:txBody>
+      </p:sp>
+      <p:sp>
+        <p:nvSpPr>
+          <p:cNvPr id="8" name="Text 6"/>
+          <p:cNvSpPr/>
+          <p:nvPr/>
+        </p:nvSpPr>
+        <p:spPr>
+          <a:xfrm>
+            <a:off x="4709160" y="1554480"/>
+            <a:ext cx="4069080" cy="3291840"/>
+          </a:xfrm>
+          <a:prstGeom prst="rect">
+            <a:avLst/>
+          </a:prstGeom>
+          <a:noFill/>
+          <a:ln/>
+        </p:spPr>
+        <p:txBody>
+          <a:bodyPr wrap="square" rtlCol="0" anchor="ctr"/>
+          <a:lstStyle/>
+          <a:p>
+            <a:pPr marL="342900" indent="-342900">
+              <a:spcAft>
+                <a:spcPts val="600"/>
+              </a:spcAft>
+              <a:buSzPct val="100000"/>
+              <a:buChar char="•"/>
+            </a:pPr>
+            <a:r>
+              <a:rPr lang="en-US" sz="1500" dirty="0">
+                <a:solidFill>
+                  <a:srgbClr val="212121"/>
+                </a:solidFill>
+                <a:latin typeface="Calibri" pitchFamily="34" charset="0"/>
+                <a:ea typeface="Calibri" pitchFamily="34" charset="-122"/>
+                <a:cs typeface="Calibri" pitchFamily="34" charset="-120"/>
+              </a:rPr>
+              <a:t>Web (Bing) — public</a:t>
+            </a:r>
+            <a:endParaRPr lang="en-US" sz="1500" dirty="0"/>
+          </a:p>
+          <a:p>
+            <a:pPr marL="342900" indent="-342900">
+              <a:spcAft>
+                <a:spcPts val="600"/>
+              </a:spcAft>
+              <a:buSzPct val="100000"/>
+              <a:buChar char="•"/>
+            </a:pPr>
+            <a:r>
+              <a:rPr lang="en-US" sz="1500" dirty="0">
+                <a:solidFill>
+                  <a:srgbClr val="212121"/>
+                </a:solidFill>
+                <a:latin typeface="Calibri" pitchFamily="34" charset="0"/>
+                <a:ea typeface="Calibri" pitchFamily="34" charset="-122"/>
+                <a:cs typeface="Calibri" pitchFamily="34" charset="-120"/>
+              </a:rPr>
+              <a:t>Remote SharePoint (preview)</a:t>
+            </a:r>
+            <a:endParaRPr lang="en-US" sz="1500" dirty="0"/>
+          </a:p>
+          <a:p>
+            <a:pPr marL="342900" indent="-342900">
+              <a:spcAft>
+                <a:spcPts val="600"/>
+              </a:spcAft>
+              <a:buSzPct val="100000"/>
+              <a:buChar char="•"/>
+            </a:pPr>
+            <a:r>
+              <a:rPr lang="en-US" sz="1500" dirty="0">
+                <a:solidFill>
+                  <a:srgbClr val="212121"/>
+                </a:solidFill>
+                <a:latin typeface="Calibri" pitchFamily="34" charset="0"/>
+                <a:ea typeface="Calibri" pitchFamily="34" charset="-122"/>
+                <a:cs typeface="Calibri" pitchFamily="34" charset="-120"/>
+              </a:rPr>
+              <a:t>Fabric Data Agent (preview)</a:t>
+            </a:r>
+            <a:endParaRPr lang="en-US" sz="1500" dirty="0"/>
+          </a:p>
+          <a:p>
+            <a:pPr marL="342900" indent="-342900">
+              <a:spcAft>
+                <a:spcPts val="600"/>
+              </a:spcAft>
+              <a:buSzPct val="100000"/>
+              <a:buChar char="•"/>
+            </a:pPr>
+            <a:r>
+              <a:rPr lang="en-US" sz="1500" dirty="0">
+                <a:solidFill>
+                  <a:srgbClr val="212121"/>
+                </a:solidFill>
+                <a:latin typeface="Calibri" pitchFamily="34" charset="0"/>
+                <a:ea typeface="Calibri" pitchFamily="34" charset="-122"/>
+                <a:cs typeface="Calibri" pitchFamily="34" charset="-120"/>
+              </a:rPr>
+              <a:t>Fabric Ontology (preview)</a:t>
+            </a:r>
+            <a:endParaRPr lang="en-US" sz="1500" dirty="0"/>
+          </a:p>
+          <a:p>
+            <a:pPr marL="342900" indent="-342900">
+              <a:spcAft>
+                <a:spcPts val="600"/>
+              </a:spcAft>
+              <a:buSzPct val="100000"/>
+              <a:buChar char="•"/>
+            </a:pPr>
+            <a:r>
+              <a:rPr lang="en-US" sz="1500" dirty="0">
+                <a:solidFill>
+                  <a:srgbClr val="212121"/>
+                </a:solidFill>
+                <a:latin typeface="Calibri" pitchFamily="34" charset="0"/>
+                <a:ea typeface="Calibri" pitchFamily="34" charset="-122"/>
+                <a:cs typeface="Calibri" pitchFamily="34" charset="-120"/>
+              </a:rPr>
+              <a:t>Work IQ (preview)</a:t>
+            </a:r>
+            <a:endParaRPr lang="en-US" sz="1500" dirty="0"/>
+          </a:p>
+          <a:p>
+            <a:pPr marL="342900" indent="-342900">
+              <a:spcAft>
+                <a:spcPts val="600"/>
+              </a:spcAft>
+              <a:buSzPct val="100000"/>
+              <a:buChar char="•"/>
+            </a:pPr>
+            <a:r>
+              <a:rPr lang="en-US" sz="1500" dirty="0">
+                <a:solidFill>
+                  <a:srgbClr val="212121"/>
+                </a:solidFill>
+                <a:latin typeface="Calibri" pitchFamily="34" charset="0"/>
+                <a:ea typeface="Calibri" pitchFamily="34" charset="-122"/>
+                <a:cs typeface="Calibri" pitchFamily="34" charset="-120"/>
+              </a:rPr>
+              <a:t>MCP server (preview)</a:t>
+            </a:r>
+            <a:endParaRPr lang="en-US" sz="1500" dirty="0"/>
+          </a:p>
+        </p:txBody>
+      </p:sp>
+      <p:sp>
+        <p:nvSpPr>
+          <p:cNvPr id="9" name="Text 7"/>
+          <p:cNvSpPr/>
+          <p:nvPr/>
+        </p:nvSpPr>
+        <p:spPr>
+          <a:xfrm>
+            <a:off x="365760" y="4434840"/>
+            <a:ext cx="8412480" cy="365760"/>
+          </a:xfrm>
+          <a:prstGeom prst="rect">
+            <a:avLst/>
+          </a:prstGeom>
+          <a:noFill/>
+          <a:ln/>
+        </p:spPr>
+        <p:txBody>
+          <a:bodyPr wrap="square" rtlCol="0" anchor="ctr"/>
+          <a:lstStyle/>
+          <a:p>
+            <a:pPr indent="0" marL="0">
+              <a:buNone/>
+            </a:pPr>
+            <a:r>
+              <a:rPr lang="en-US" sz="1300" i="1" dirty="0">
+                <a:solidFill>
+                  <a:srgbClr val="6B7280"/>
+                </a:solidFill>
+                <a:latin typeface="Calibri" pitchFamily="34" charset="0"/>
+                <a:ea typeface="Calibri" pitchFamily="34" charset="-122"/>
+                <a:cs typeface="Calibri" pitchFamily="34" charset="-120"/>
+              </a:rPr>
+              <a:t>Both flow through the same ranking pipeline. You mix indexed and remote in one knowledge base.</a:t>
+            </a:r>
+            <a:endParaRPr lang="en-US" sz="1300" dirty="0"/>
+          </a:p>
+        </p:txBody>
+      </p:sp>
+    </p:spTree>
+  </p:cSld>
+  <p:clrMapOvr>
+    <a:masterClrMapping/>
+  </p:clrMapOvr>
+</p:sld>
+</file>
+
+<file path=ppt/slides/slide7.xml><?xml version="1.0" encoding="utf-8"?>
+<p:sld xmlns:a="http://schemas.openxmlformats.org/drawingml/2006/main" xmlns:r="http://schemas.openxmlformats.org/officeDocument/2006/relationships" xmlns:p="http://schemas.openxmlformats.org/presentationml/2006/main">
+  <p:cSld name="Slide 7">
+    <p:bg>
+      <p:bgPr>
+        <a:solidFill>
+          <a:srgbClr val="FFFFFF"/>
+        </a:solidFill>
+      </p:bgPr>
+    </p:bg>
+    <p:spTree>
+      <p:nvGrpSpPr>
+        <p:cNvPr id="1" name=""/>
+        <p:cNvGrpSpPr/>
+        <p:nvPr/>
+      </p:nvGrpSpPr>
+      <p:grpSpPr>
+        <a:xfrm>
+          <a:off x="0" y="0"/>
+          <a:ext cx="0" cy="0"/>
+          <a:chOff x="0" y="0"/>
+          <a:chExt cx="0" cy="0"/>
+        </a:xfrm>
+      </p:grpSpPr>
+      <p:sp>
+        <p:nvSpPr>
+          <p:cNvPr id="2" name="Shape 0"/>
+          <p:cNvSpPr/>
+          <p:nvPr/>
+        </p:nvSpPr>
+        <p:spPr>
+          <a:xfrm>
+            <a:off x="0" y="0"/>
+            <a:ext cx="54864" cy="5143500"/>
+          </a:xfrm>
+          <a:prstGeom prst="rect">
+            <a:avLst/>
+          </a:prstGeom>
+          <a:solidFill>
+            <a:srgbClr val="1E2761"/>
+          </a:solidFill>
+          <a:ln/>
+        </p:spPr>
+      </p:sp>
+      <p:sp>
+        <p:nvSpPr>
+          <p:cNvPr id="3" name="Text 1"/>
+          <p:cNvSpPr/>
+          <p:nvPr/>
+        </p:nvSpPr>
+        <p:spPr>
+          <a:xfrm>
+            <a:off x="5669280" y="274320"/>
+            <a:ext cx="3291840" cy="274320"/>
+          </a:xfrm>
+          <a:prstGeom prst="rect">
+            <a:avLst/>
+          </a:prstGeom>
+          <a:noFill/>
+          <a:ln/>
+        </p:spPr>
+        <p:txBody>
+          <a:bodyPr wrap="square" lIns="0" tIns="0" rIns="0" bIns="0" rtlCol="0" anchor="ctr"/>
+          <a:lstStyle/>
+          <a:p>
+            <a:pPr algn="r" indent="0" marL="0">
+              <a:buNone/>
+            </a:pPr>
+            <a:r>
+              <a:rPr lang="en-US" sz="1000" dirty="0">
+                <a:solidFill>
+                  <a:srgbClr val="6B7280"/>
+                </a:solidFill>
+                <a:latin typeface="Calibri" pitchFamily="34" charset="0"/>
+                <a:ea typeface="Calibri" pitchFamily="34" charset="-122"/>
+                <a:cs typeface="Calibri" pitchFamily="34" charset="-120"/>
+              </a:rPr>
+              <a:t>Day 2 · Module 1</a:t>
+            </a:r>
+            <a:endParaRPr lang="en-US" sz="1000" dirty="0"/>
+          </a:p>
+        </p:txBody>
+      </p:sp>
+      <p:sp>
+        <p:nvSpPr>
+          <p:cNvPr id="4" name="Text 2"/>
+          <p:cNvSpPr/>
+          <p:nvPr/>
+        </p:nvSpPr>
+        <p:spPr>
+          <a:xfrm>
+            <a:off x="365760" y="320040"/>
+            <a:ext cx="6217920" cy="640080"/>
+          </a:xfrm>
+          <a:prstGeom prst="rect">
+            <a:avLst/>
+          </a:prstGeom>
+          <a:noFill/>
+          <a:ln/>
+        </p:spPr>
+        <p:txBody>
+          <a:bodyPr wrap="square" lIns="0" tIns="0" rIns="0" bIns="0" rtlCol="0" anchor="ctr"/>
+          <a:lstStyle/>
+          <a:p>
+            <a:pPr indent="0" marL="0">
+              <a:buNone/>
+            </a:pPr>
+            <a:r>
+              <a:rPr lang="en-US" sz="2800" b="1" dirty="0">
+                <a:solidFill>
+                  <a:srgbClr val="1E2761"/>
+                </a:solidFill>
+                <a:latin typeface="Calibri" pitchFamily="34" charset="0"/>
+                <a:ea typeface="Calibri" pitchFamily="34" charset="-122"/>
+                <a:cs typeface="Calibri" pitchFamily="34" charset="-120"/>
+              </a:rPr>
               <a:t>Indexed vs. remote — trade-offs</a:t>
             </a:r>
             <a:endParaRPr lang="en-US" sz="2800" dirty="0"/>
@@ -7150,7 +8198,7 @@
       </p:sp>
       <p:graphicFrame>
         <p:nvGraphicFramePr>
-          <p:cNvPr id="7" name="Table 0"/>
+          <p:cNvPr id="8" name="Table 0"/>
           <p:cNvGraphicFramePr>
             <a:graphicFrameLocks noGrp="1"/>
           </p:cNvGraphicFramePr>
@@ -8657,281 +9705,6 @@
 </p:sld>
 </file>
 
-<file path=ppt/slides/slide7.xml><?xml version="1.0" encoding="utf-8"?>
-<p:sld xmlns:a="http://schemas.openxmlformats.org/drawingml/2006/main" xmlns:r="http://schemas.openxmlformats.org/officeDocument/2006/relationships" xmlns:p="http://schemas.openxmlformats.org/presentationml/2006/main">
-  <p:cSld name="Slide 7">
-    <p:bg>
-      <p:bgPr>
-        <a:solidFill>
-          <a:srgbClr val="FFFFFF"/>
-        </a:solidFill>
-      </p:bgPr>
-    </p:bg>
-    <p:spTree>
-      <p:nvGrpSpPr>
-        <p:cNvPr id="1" name=""/>
-        <p:cNvGrpSpPr/>
-        <p:nvPr/>
-      </p:nvGrpSpPr>
-      <p:grpSpPr>
-        <a:xfrm>
-          <a:off x="0" y="0"/>
-          <a:ext cx="0" cy="0"/>
-          <a:chOff x="0" y="0"/>
-          <a:chExt cx="0" cy="0"/>
-        </a:xfrm>
-      </p:grpSpPr>
-      <p:sp>
-        <p:nvSpPr>
-          <p:cNvPr id="2" name="Shape 0"/>
-          <p:cNvSpPr/>
-          <p:nvPr/>
-        </p:nvSpPr>
-        <p:spPr>
-          <a:xfrm>
-            <a:off x="0" y="0"/>
-            <a:ext cx="54864" cy="5143500"/>
-          </a:xfrm>
-          <a:prstGeom prst="rect">
-            <a:avLst/>
-          </a:prstGeom>
-          <a:solidFill>
-            <a:srgbClr val="1E2761"/>
-          </a:solidFill>
-          <a:ln/>
-        </p:spPr>
-      </p:sp>
-      <p:sp>
-        <p:nvSpPr>
-          <p:cNvPr id="3" name="Text 1"/>
-          <p:cNvSpPr/>
-          <p:nvPr/>
-        </p:nvSpPr>
-        <p:spPr>
-          <a:xfrm>
-            <a:off x="5669280" y="274320"/>
-            <a:ext cx="3291840" cy="274320"/>
-          </a:xfrm>
-          <a:prstGeom prst="rect">
-            <a:avLst/>
-          </a:prstGeom>
-          <a:noFill/>
-          <a:ln/>
-        </p:spPr>
-        <p:txBody>
-          <a:bodyPr wrap="square" lIns="0" tIns="0" rIns="0" bIns="0" rtlCol="0" anchor="ctr"/>
-          <a:lstStyle/>
-          <a:p>
-            <a:pPr algn="r" indent="0" marL="0">
-              <a:buNone/>
-            </a:pPr>
-            <a:r>
-              <a:rPr lang="en-US" sz="1000" dirty="0">
-                <a:solidFill>
-                  <a:srgbClr val="6B7280"/>
-                </a:solidFill>
-                <a:latin typeface="Calibri" pitchFamily="34" charset="0"/>
-                <a:ea typeface="Calibri" pitchFamily="34" charset="-122"/>
-                <a:cs typeface="Calibri" pitchFamily="34" charset="-120"/>
-              </a:rPr>
-              <a:t>Day 2 · Module 1</a:t>
-            </a:r>
-            <a:endParaRPr lang="en-US" sz="1000" dirty="0"/>
-          </a:p>
-        </p:txBody>
-      </p:sp>
-      <p:sp>
-        <p:nvSpPr>
-          <p:cNvPr id="4" name="Text 2"/>
-          <p:cNvSpPr/>
-          <p:nvPr/>
-        </p:nvSpPr>
-        <p:spPr>
-          <a:xfrm>
-            <a:off x="365760" y="320040"/>
-            <a:ext cx="6217920" cy="640080"/>
-          </a:xfrm>
-          <a:prstGeom prst="rect">
-            <a:avLst/>
-          </a:prstGeom>
-          <a:noFill/>
-          <a:ln/>
-        </p:spPr>
-        <p:txBody>
-          <a:bodyPr wrap="square" lIns="0" tIns="0" rIns="0" bIns="0" rtlCol="0" anchor="ctr"/>
-          <a:lstStyle/>
-          <a:p>
-            <a:pPr indent="0" marL="0">
-              <a:buNone/>
-            </a:pPr>
-            <a:r>
-              <a:rPr lang="en-US" sz="2800" b="1" dirty="0">
-                <a:solidFill>
-                  <a:srgbClr val="1E2761"/>
-                </a:solidFill>
-                <a:latin typeface="Calibri" pitchFamily="34" charset="0"/>
-                <a:ea typeface="Calibri" pitchFamily="34" charset="-122"/>
-                <a:cs typeface="Calibri" pitchFamily="34" charset="-120"/>
-              </a:rPr>
-              <a:t>Agentic retrieval — what happens on a query</a:t>
-            </a:r>
-            <a:endParaRPr lang="en-US" sz="2800" dirty="0"/>
-          </a:p>
-        </p:txBody>
-      </p:sp>
-      <p:sp>
-        <p:nvSpPr>
-          <p:cNvPr id="5" name="Text 3"/>
-          <p:cNvSpPr/>
-          <p:nvPr/>
-        </p:nvSpPr>
-        <p:spPr>
-          <a:xfrm>
-            <a:off x="365760" y="1097280"/>
-            <a:ext cx="8412480" cy="2926080"/>
-          </a:xfrm>
-          <a:prstGeom prst="rect">
-            <a:avLst/>
-          </a:prstGeom>
-          <a:noFill/>
-          <a:ln/>
-        </p:spPr>
-        <p:txBody>
-          <a:bodyPr wrap="square" rtlCol="0" anchor="ctr"/>
-          <a:lstStyle/>
-          <a:p>
-            <a:pPr marL="342900" indent="-342900">
-              <a:spcAft>
-                <a:spcPts val="600"/>
-              </a:spcAft>
-              <a:buSzPct val="100000"/>
-              <a:buChar char="•"/>
-            </a:pPr>
-            <a:r>
-              <a:rPr lang="en-US" sz="1500" dirty="0">
-                <a:solidFill>
-                  <a:srgbClr val="212121"/>
-                </a:solidFill>
-                <a:latin typeface="Calibri" pitchFamily="34" charset="0"/>
-                <a:ea typeface="Calibri" pitchFamily="34" charset="-122"/>
-                <a:cs typeface="Calibri" pitchFamily="34" charset="-120"/>
-              </a:rPr>
-              <a:t>Plan — at Low or Medium effort, an LLM decomposes the question into sub-queries and picks which sources to hit. At Minimal, this step is skipped and the raw query goes straight to every source.</a:t>
-            </a:r>
-            <a:endParaRPr lang="en-US" sz="1500" dirty="0"/>
-          </a:p>
-          <a:p>
-            <a:pPr marL="342900" indent="-342900">
-              <a:spcAft>
-                <a:spcPts val="600"/>
-              </a:spcAft>
-              <a:buSzPct val="100000"/>
-              <a:buChar char="•"/>
-            </a:pPr>
-            <a:r>
-              <a:rPr lang="en-US" sz="1500" dirty="0">
-                <a:solidFill>
-                  <a:srgbClr val="212121"/>
-                </a:solidFill>
-                <a:latin typeface="Calibri" pitchFamily="34" charset="0"/>
-                <a:ea typeface="Calibri" pitchFamily="34" charset="-122"/>
-                <a:cs typeface="Calibri" pitchFamily="34" charset="-120"/>
-              </a:rPr>
-              <a:t>Execute — sub-queries run in parallel (keyword, vector, or hybrid per source)</a:t>
-            </a:r>
-            <a:endParaRPr lang="en-US" sz="1500" dirty="0"/>
-          </a:p>
-          <a:p>
-            <a:pPr marL="342900" indent="-342900">
-              <a:spcAft>
-                <a:spcPts val="600"/>
-              </a:spcAft>
-              <a:buSzPct val="100000"/>
-              <a:buChar char="•"/>
-            </a:pPr>
-            <a:r>
-              <a:rPr lang="en-US" sz="1500" dirty="0">
-                <a:solidFill>
-                  <a:srgbClr val="212121"/>
-                </a:solidFill>
-                <a:latin typeface="Calibri" pitchFamily="34" charset="0"/>
-                <a:ea typeface="Calibri" pitchFamily="34" charset="-122"/>
-                <a:cs typeface="Calibri" pitchFamily="34" charset="-120"/>
-              </a:rPr>
-              <a:t>Rank — unified reranker scores results across sources</a:t>
-            </a:r>
-            <a:endParaRPr lang="en-US" sz="1500" dirty="0"/>
-          </a:p>
-          <a:p>
-            <a:pPr marL="342900" indent="-342900">
-              <a:spcAft>
-                <a:spcPts val="600"/>
-              </a:spcAft>
-              <a:buSzPct val="100000"/>
-              <a:buChar char="•"/>
-            </a:pPr>
-            <a:r>
-              <a:rPr lang="en-US" sz="1500" dirty="0">
-                <a:solidFill>
-                  <a:srgbClr val="212121"/>
-                </a:solidFill>
-                <a:latin typeface="Calibri" pitchFamily="34" charset="0"/>
-                <a:ea typeface="Calibri" pitchFamily="34" charset="-122"/>
-                <a:cs typeface="Calibri" pitchFamily="34" charset="-120"/>
-              </a:rPr>
-              <a:t>Return — top results plus source citations</a:t>
-            </a:r>
-            <a:endParaRPr lang="en-US" sz="1500" dirty="0"/>
-          </a:p>
-        </p:txBody>
-      </p:sp>
-      <p:sp>
-        <p:nvSpPr>
-          <p:cNvPr id="6" name="Text 4"/>
-          <p:cNvSpPr/>
-          <p:nvPr/>
-        </p:nvSpPr>
-        <p:spPr>
-          <a:xfrm>
-            <a:off x="365760" y="4343400"/>
-            <a:ext cx="8412480" cy="365760"/>
-          </a:xfrm>
-          <a:prstGeom prst="rect">
-            <a:avLst/>
-          </a:prstGeom>
-          <a:noFill/>
-          <a:ln/>
-        </p:spPr>
-        <p:txBody>
-          <a:bodyPr wrap="square" rtlCol="0" anchor="ctr"/>
-          <a:lstStyle/>
-          <a:p>
-            <a:pPr indent="0" marL="0">
-              <a:buNone/>
-            </a:pPr>
-            <a:r>
-              <a:rPr lang="en-US" sz="1300" b="1" i="1" dirty="0">
-                <a:solidFill>
-                  <a:srgbClr val="1E2761"/>
-                </a:solidFill>
-                <a:latin typeface="Calibri" pitchFamily="34" charset="0"/>
-                <a:ea typeface="Calibri" pitchFamily="34" charset="-122"/>
-                <a:cs typeface="Calibri" pitchFamily="34" charset="-120"/>
-              </a:rPr>
-              <a:t>This is more than 'vector search + LLM.' It's a small pipeline you get for free.</a:t>
-            </a:r>
-            <a:endParaRPr lang="en-US" sz="1300" dirty="0"/>
-          </a:p>
-        </p:txBody>
-      </p:sp>
-    </p:spTree>
-  </p:cSld>
-  <p:clrMapOvr>
-    <a:masterClrMapping/>
-  </p:clrMapOvr>
-</p:sld>
-</file>
-
 <file path=ppt/slides/slide8.xml><?xml version="1.0" encoding="utf-8"?>
 <p:sld xmlns:a="http://schemas.openxmlformats.org/drawingml/2006/main" xmlns:r="http://schemas.openxmlformats.org/officeDocument/2006/relationships" xmlns:p="http://schemas.openxmlformats.org/presentationml/2006/main">
   <p:cSld name="Slide 8">
@@ -9048,6 +9821,281 @@
                 <a:ea typeface="Calibri" pitchFamily="34" charset="-122"/>
                 <a:cs typeface="Calibri" pitchFamily="34" charset="-120"/>
               </a:rPr>
+              <a:t>Agentic retrieval — what happens on a query</a:t>
+            </a:r>
+            <a:endParaRPr lang="en-US" sz="2800" dirty="0"/>
+          </a:p>
+        </p:txBody>
+      </p:sp>
+      <p:sp>
+        <p:nvSpPr>
+          <p:cNvPr id="5" name="Text 3"/>
+          <p:cNvSpPr/>
+          <p:nvPr/>
+        </p:nvSpPr>
+        <p:spPr>
+          <a:xfrm>
+            <a:off x="365760" y="1097280"/>
+            <a:ext cx="8412480" cy="2926080"/>
+          </a:xfrm>
+          <a:prstGeom prst="rect">
+            <a:avLst/>
+          </a:prstGeom>
+          <a:noFill/>
+          <a:ln/>
+        </p:spPr>
+        <p:txBody>
+          <a:bodyPr wrap="square" rtlCol="0" anchor="ctr"/>
+          <a:lstStyle/>
+          <a:p>
+            <a:pPr marL="342900" indent="-342900">
+              <a:spcAft>
+                <a:spcPts val="600"/>
+              </a:spcAft>
+              <a:buSzPct val="100000"/>
+              <a:buChar char="•"/>
+            </a:pPr>
+            <a:r>
+              <a:rPr lang="en-US" sz="1500" dirty="0">
+                <a:solidFill>
+                  <a:srgbClr val="212121"/>
+                </a:solidFill>
+                <a:latin typeface="Calibri" pitchFamily="34" charset="0"/>
+                <a:ea typeface="Calibri" pitchFamily="34" charset="-122"/>
+                <a:cs typeface="Calibri" pitchFamily="34" charset="-120"/>
+              </a:rPr>
+              <a:t>Plan — at Low or Medium effort, an LLM decomposes the question into sub-queries and picks which sources to hit. At Minimal, this step is skipped and the raw query goes straight to every source.</a:t>
+            </a:r>
+            <a:endParaRPr lang="en-US" sz="1500" dirty="0"/>
+          </a:p>
+          <a:p>
+            <a:pPr marL="342900" indent="-342900">
+              <a:spcAft>
+                <a:spcPts val="600"/>
+              </a:spcAft>
+              <a:buSzPct val="100000"/>
+              <a:buChar char="•"/>
+            </a:pPr>
+            <a:r>
+              <a:rPr lang="en-US" sz="1500" dirty="0">
+                <a:solidFill>
+                  <a:srgbClr val="212121"/>
+                </a:solidFill>
+                <a:latin typeface="Calibri" pitchFamily="34" charset="0"/>
+                <a:ea typeface="Calibri" pitchFamily="34" charset="-122"/>
+                <a:cs typeface="Calibri" pitchFamily="34" charset="-120"/>
+              </a:rPr>
+              <a:t>Execute — sub-queries run in parallel (keyword, vector, or hybrid per source)</a:t>
+            </a:r>
+            <a:endParaRPr lang="en-US" sz="1500" dirty="0"/>
+          </a:p>
+          <a:p>
+            <a:pPr marL="342900" indent="-342900">
+              <a:spcAft>
+                <a:spcPts val="600"/>
+              </a:spcAft>
+              <a:buSzPct val="100000"/>
+              <a:buChar char="•"/>
+            </a:pPr>
+            <a:r>
+              <a:rPr lang="en-US" sz="1500" dirty="0">
+                <a:solidFill>
+                  <a:srgbClr val="212121"/>
+                </a:solidFill>
+                <a:latin typeface="Calibri" pitchFamily="34" charset="0"/>
+                <a:ea typeface="Calibri" pitchFamily="34" charset="-122"/>
+                <a:cs typeface="Calibri" pitchFamily="34" charset="-120"/>
+              </a:rPr>
+              <a:t>Rank — unified reranker scores results across sources</a:t>
+            </a:r>
+            <a:endParaRPr lang="en-US" sz="1500" dirty="0"/>
+          </a:p>
+          <a:p>
+            <a:pPr marL="342900" indent="-342900">
+              <a:spcAft>
+                <a:spcPts val="600"/>
+              </a:spcAft>
+              <a:buSzPct val="100000"/>
+              <a:buChar char="•"/>
+            </a:pPr>
+            <a:r>
+              <a:rPr lang="en-US" sz="1500" dirty="0">
+                <a:solidFill>
+                  <a:srgbClr val="212121"/>
+                </a:solidFill>
+                <a:latin typeface="Calibri" pitchFamily="34" charset="0"/>
+                <a:ea typeface="Calibri" pitchFamily="34" charset="-122"/>
+                <a:cs typeface="Calibri" pitchFamily="34" charset="-120"/>
+              </a:rPr>
+              <a:t>Return — top results plus source citations</a:t>
+            </a:r>
+            <a:endParaRPr lang="en-US" sz="1500" dirty="0"/>
+          </a:p>
+        </p:txBody>
+      </p:sp>
+      <p:sp>
+        <p:nvSpPr>
+          <p:cNvPr id="6" name="Text 4"/>
+          <p:cNvSpPr/>
+          <p:nvPr/>
+        </p:nvSpPr>
+        <p:spPr>
+          <a:xfrm>
+            <a:off x="365760" y="4343400"/>
+            <a:ext cx="8412480" cy="365760"/>
+          </a:xfrm>
+          <a:prstGeom prst="rect">
+            <a:avLst/>
+          </a:prstGeom>
+          <a:noFill/>
+          <a:ln/>
+        </p:spPr>
+        <p:txBody>
+          <a:bodyPr wrap="square" rtlCol="0" anchor="ctr"/>
+          <a:lstStyle/>
+          <a:p>
+            <a:pPr indent="0" marL="0">
+              <a:buNone/>
+            </a:pPr>
+            <a:r>
+              <a:rPr lang="en-US" sz="1300" b="1" i="1" dirty="0">
+                <a:solidFill>
+                  <a:srgbClr val="1E2761"/>
+                </a:solidFill>
+                <a:latin typeface="Calibri" pitchFamily="34" charset="0"/>
+                <a:ea typeface="Calibri" pitchFamily="34" charset="-122"/>
+                <a:cs typeface="Calibri" pitchFamily="34" charset="-120"/>
+              </a:rPr>
+              <a:t>This is more than 'vector search + LLM.' It's a small pipeline you get for free.</a:t>
+            </a:r>
+            <a:endParaRPr lang="en-US" sz="1300" dirty="0"/>
+          </a:p>
+        </p:txBody>
+      </p:sp>
+    </p:spTree>
+  </p:cSld>
+  <p:clrMapOvr>
+    <a:masterClrMapping/>
+  </p:clrMapOvr>
+</p:sld>
+</file>
+
+<file path=ppt/slides/slide9.xml><?xml version="1.0" encoding="utf-8"?>
+<p:sld xmlns:a="http://schemas.openxmlformats.org/drawingml/2006/main" xmlns:r="http://schemas.openxmlformats.org/officeDocument/2006/relationships" xmlns:p="http://schemas.openxmlformats.org/presentationml/2006/main">
+  <p:cSld name="Slide 9">
+    <p:bg>
+      <p:bgPr>
+        <a:solidFill>
+          <a:srgbClr val="FFFFFF"/>
+        </a:solidFill>
+      </p:bgPr>
+    </p:bg>
+    <p:spTree>
+      <p:nvGrpSpPr>
+        <p:cNvPr id="1" name=""/>
+        <p:cNvGrpSpPr/>
+        <p:nvPr/>
+      </p:nvGrpSpPr>
+      <p:grpSpPr>
+        <a:xfrm>
+          <a:off x="0" y="0"/>
+          <a:ext cx="0" cy="0"/>
+          <a:chOff x="0" y="0"/>
+          <a:chExt cx="0" cy="0"/>
+        </a:xfrm>
+      </p:grpSpPr>
+      <p:sp>
+        <p:nvSpPr>
+          <p:cNvPr id="2" name="Shape 0"/>
+          <p:cNvSpPr/>
+          <p:nvPr/>
+        </p:nvSpPr>
+        <p:spPr>
+          <a:xfrm>
+            <a:off x="0" y="0"/>
+            <a:ext cx="54864" cy="5143500"/>
+          </a:xfrm>
+          <a:prstGeom prst="rect">
+            <a:avLst/>
+          </a:prstGeom>
+          <a:solidFill>
+            <a:srgbClr val="1E2761"/>
+          </a:solidFill>
+          <a:ln/>
+        </p:spPr>
+      </p:sp>
+      <p:sp>
+        <p:nvSpPr>
+          <p:cNvPr id="3" name="Text 1"/>
+          <p:cNvSpPr/>
+          <p:nvPr/>
+        </p:nvSpPr>
+        <p:spPr>
+          <a:xfrm>
+            <a:off x="5669280" y="274320"/>
+            <a:ext cx="3291840" cy="274320"/>
+          </a:xfrm>
+          <a:prstGeom prst="rect">
+            <a:avLst/>
+          </a:prstGeom>
+          <a:noFill/>
+          <a:ln/>
+        </p:spPr>
+        <p:txBody>
+          <a:bodyPr wrap="square" lIns="0" tIns="0" rIns="0" bIns="0" rtlCol="0" anchor="ctr"/>
+          <a:lstStyle/>
+          <a:p>
+            <a:pPr algn="r" indent="0" marL="0">
+              <a:buNone/>
+            </a:pPr>
+            <a:r>
+              <a:rPr lang="en-US" sz="1000" dirty="0">
+                <a:solidFill>
+                  <a:srgbClr val="6B7280"/>
+                </a:solidFill>
+                <a:latin typeface="Calibri" pitchFamily="34" charset="0"/>
+                <a:ea typeface="Calibri" pitchFamily="34" charset="-122"/>
+                <a:cs typeface="Calibri" pitchFamily="34" charset="-120"/>
+              </a:rPr>
+              <a:t>Day 2 · Module 1</a:t>
+            </a:r>
+            <a:endParaRPr lang="en-US" sz="1000" dirty="0"/>
+          </a:p>
+        </p:txBody>
+      </p:sp>
+      <p:sp>
+        <p:nvSpPr>
+          <p:cNvPr id="4" name="Text 2"/>
+          <p:cNvSpPr/>
+          <p:nvPr/>
+        </p:nvSpPr>
+        <p:spPr>
+          <a:xfrm>
+            <a:off x="365760" y="320040"/>
+            <a:ext cx="6217920" cy="640080"/>
+          </a:xfrm>
+          <a:prstGeom prst="rect">
+            <a:avLst/>
+          </a:prstGeom>
+          <a:noFill/>
+          <a:ln/>
+        </p:spPr>
+        <p:txBody>
+          <a:bodyPr wrap="square" lIns="0" tIns="0" rIns="0" bIns="0" rtlCol="0" anchor="ctr"/>
+          <a:lstStyle/>
+          <a:p>
+            <a:pPr indent="0" marL="0">
+              <a:buNone/>
+            </a:pPr>
+            <a:r>
+              <a:rPr lang="en-US" sz="2800" b="1" dirty="0">
+                <a:solidFill>
+                  <a:srgbClr val="1E2761"/>
+                </a:solidFill>
+                <a:latin typeface="Calibri" pitchFamily="34" charset="0"/>
+                <a:ea typeface="Calibri" pitchFamily="34" charset="-122"/>
+                <a:cs typeface="Calibri" pitchFamily="34" charset="-120"/>
+              </a:rPr>
               <a:t>Retrieval reasoning effort — pick the level per question</a:t>
             </a:r>
             <a:endParaRPr lang="en-US" sz="2800" dirty="0"/>
@@ -9056,7 +10104,7 @@
       </p:sp>
       <p:graphicFrame>
         <p:nvGraphicFramePr>
-          <p:cNvPr id="9" name="Table 0"/>
+          <p:cNvPr id="10" name="Table 0"/>
           <p:cNvGraphicFramePr>
             <a:graphicFrameLocks noGrp="1"/>
           </p:cNvGraphicFramePr>
@@ -10296,281 +11344,6 @@
               <a:t>Source: learn.microsoft.com/azure/search/agentic-retrieval-how-to-set-retrieval-reasoning-effort</a:t>
             </a:r>
             <a:endParaRPr lang="en-US" sz="1000" dirty="0"/>
-          </a:p>
-        </p:txBody>
-      </p:sp>
-    </p:spTree>
-  </p:cSld>
-  <p:clrMapOvr>
-    <a:masterClrMapping/>
-  </p:clrMapOvr>
-</p:sld>
-</file>
-
-<file path=ppt/slides/slide9.xml><?xml version="1.0" encoding="utf-8"?>
-<p:sld xmlns:a="http://schemas.openxmlformats.org/drawingml/2006/main" xmlns:r="http://schemas.openxmlformats.org/officeDocument/2006/relationships" xmlns:p="http://schemas.openxmlformats.org/presentationml/2006/main">
-  <p:cSld name="Slide 9">
-    <p:bg>
-      <p:bgPr>
-        <a:solidFill>
-          <a:srgbClr val="FFFFFF"/>
-        </a:solidFill>
-      </p:bgPr>
-    </p:bg>
-    <p:spTree>
-      <p:nvGrpSpPr>
-        <p:cNvPr id="1" name=""/>
-        <p:cNvGrpSpPr/>
-        <p:nvPr/>
-      </p:nvGrpSpPr>
-      <p:grpSpPr>
-        <a:xfrm>
-          <a:off x="0" y="0"/>
-          <a:ext cx="0" cy="0"/>
-          <a:chOff x="0" y="0"/>
-          <a:chExt cx="0" cy="0"/>
-        </a:xfrm>
-      </p:grpSpPr>
-      <p:sp>
-        <p:nvSpPr>
-          <p:cNvPr id="2" name="Shape 0"/>
-          <p:cNvSpPr/>
-          <p:nvPr/>
-        </p:nvSpPr>
-        <p:spPr>
-          <a:xfrm>
-            <a:off x="0" y="0"/>
-            <a:ext cx="54864" cy="5143500"/>
-          </a:xfrm>
-          <a:prstGeom prst="rect">
-            <a:avLst/>
-          </a:prstGeom>
-          <a:solidFill>
-            <a:srgbClr val="1E2761"/>
-          </a:solidFill>
-          <a:ln/>
-        </p:spPr>
-      </p:sp>
-      <p:sp>
-        <p:nvSpPr>
-          <p:cNvPr id="3" name="Text 1"/>
-          <p:cNvSpPr/>
-          <p:nvPr/>
-        </p:nvSpPr>
-        <p:spPr>
-          <a:xfrm>
-            <a:off x="5669280" y="274320"/>
-            <a:ext cx="3291840" cy="274320"/>
-          </a:xfrm>
-          <a:prstGeom prst="rect">
-            <a:avLst/>
-          </a:prstGeom>
-          <a:noFill/>
-          <a:ln/>
-        </p:spPr>
-        <p:txBody>
-          <a:bodyPr wrap="square" lIns="0" tIns="0" rIns="0" bIns="0" rtlCol="0" anchor="ctr"/>
-          <a:lstStyle/>
-          <a:p>
-            <a:pPr algn="r" indent="0" marL="0">
-              <a:buNone/>
-            </a:pPr>
-            <a:r>
-              <a:rPr lang="en-US" sz="1000" dirty="0">
-                <a:solidFill>
-                  <a:srgbClr val="6B7280"/>
-                </a:solidFill>
-                <a:latin typeface="Calibri" pitchFamily="34" charset="0"/>
-                <a:ea typeface="Calibri" pitchFamily="34" charset="-122"/>
-                <a:cs typeface="Calibri" pitchFamily="34" charset="-120"/>
-              </a:rPr>
-              <a:t>Day 2 · Module 1</a:t>
-            </a:r>
-            <a:endParaRPr lang="en-US" sz="1000" dirty="0"/>
-          </a:p>
-        </p:txBody>
-      </p:sp>
-      <p:sp>
-        <p:nvSpPr>
-          <p:cNvPr id="4" name="Text 2"/>
-          <p:cNvSpPr/>
-          <p:nvPr/>
-        </p:nvSpPr>
-        <p:spPr>
-          <a:xfrm>
-            <a:off x="365760" y="320040"/>
-            <a:ext cx="6217920" cy="640080"/>
-          </a:xfrm>
-          <a:prstGeom prst="rect">
-            <a:avLst/>
-          </a:prstGeom>
-          <a:noFill/>
-          <a:ln/>
-        </p:spPr>
-        <p:txBody>
-          <a:bodyPr wrap="square" lIns="0" tIns="0" rIns="0" bIns="0" rtlCol="0" anchor="ctr"/>
-          <a:lstStyle/>
-          <a:p>
-            <a:pPr indent="0" marL="0">
-              <a:buNone/>
-            </a:pPr>
-            <a:r>
-              <a:rPr lang="en-US" sz="2800" b="1" dirty="0">
-                <a:solidFill>
-                  <a:srgbClr val="1E2761"/>
-                </a:solidFill>
-                <a:latin typeface="Calibri" pitchFamily="34" charset="0"/>
-                <a:ea typeface="Calibri" pitchFamily="34" charset="-122"/>
-                <a:cs typeface="Calibri" pitchFamily="34" charset="-120"/>
-              </a:rPr>
-              <a:t>Permission-aware retrieval</a:t>
-            </a:r>
-            <a:endParaRPr lang="en-US" sz="2800" dirty="0"/>
-          </a:p>
-        </p:txBody>
-      </p:sp>
-      <p:sp>
-        <p:nvSpPr>
-          <p:cNvPr id="5" name="Text 3"/>
-          <p:cNvSpPr/>
-          <p:nvPr/>
-        </p:nvSpPr>
-        <p:spPr>
-          <a:xfrm>
-            <a:off x="365760" y="1097280"/>
-            <a:ext cx="8412480" cy="2926080"/>
-          </a:xfrm>
-          <a:prstGeom prst="rect">
-            <a:avLst/>
-          </a:prstGeom>
-          <a:noFill/>
-          <a:ln/>
-        </p:spPr>
-        <p:txBody>
-          <a:bodyPr wrap="square" rtlCol="0" anchor="ctr"/>
-          <a:lstStyle/>
-          <a:p>
-            <a:pPr marL="342900" indent="-342900">
-              <a:spcAft>
-                <a:spcPts val="600"/>
-              </a:spcAft>
-              <a:buSzPct val="100000"/>
-              <a:buChar char="•"/>
-            </a:pPr>
-            <a:r>
-              <a:rPr lang="en-US" sz="1500" dirty="0">
-                <a:solidFill>
-                  <a:srgbClr val="212121"/>
-                </a:solidFill>
-                <a:latin typeface="Calibri" pitchFamily="34" charset="0"/>
-                <a:ea typeface="Calibri" pitchFamily="34" charset="-122"/>
-                <a:cs typeface="Calibri" pitchFamily="34" charset="-120"/>
-              </a:rPr>
-              <a:t>ACL sync — indexed sources pull access control lists from the source (SharePoint, OneLake) into the index</a:t>
-            </a:r>
-            <a:endParaRPr lang="en-US" sz="1500" dirty="0"/>
-          </a:p>
-          <a:p>
-            <a:pPr marL="342900" indent="-342900">
-              <a:spcAft>
-                <a:spcPts val="600"/>
-              </a:spcAft>
-              <a:buSzPct val="100000"/>
-              <a:buChar char="•"/>
-            </a:pPr>
-            <a:r>
-              <a:rPr lang="en-US" sz="1500" dirty="0">
-                <a:solidFill>
-                  <a:srgbClr val="212121"/>
-                </a:solidFill>
-                <a:latin typeface="Calibri" pitchFamily="34" charset="0"/>
-                <a:ea typeface="Calibri" pitchFamily="34" charset="-122"/>
-                <a:cs typeface="Calibri" pitchFamily="34" charset="-120"/>
-              </a:rPr>
-              <a:t>Sensitivity labels — Microsoft Purview labels flow through blob / OneLake / indexed SharePoint (preview)</a:t>
-            </a:r>
-            <a:endParaRPr lang="en-US" sz="1500" dirty="0"/>
-          </a:p>
-          <a:p>
-            <a:pPr marL="342900" indent="-342900">
-              <a:spcAft>
-                <a:spcPts val="600"/>
-              </a:spcAft>
-              <a:buSzPct val="100000"/>
-              <a:buChar char="•"/>
-            </a:pPr>
-            <a:r>
-              <a:rPr lang="en-US" sz="1500" dirty="0">
-                <a:solidFill>
-                  <a:srgbClr val="212121"/>
-                </a:solidFill>
-                <a:latin typeface="Calibri" pitchFamily="34" charset="0"/>
-                <a:ea typeface="Calibri" pitchFamily="34" charset="-122"/>
-                <a:cs typeface="Calibri" pitchFamily="34" charset="-120"/>
-              </a:rPr>
-              <a:t>Query-time enforcement — retrieval runs under the caller's Entra identity; only content the user is authorized to see comes back</a:t>
-            </a:r>
-            <a:endParaRPr lang="en-US" sz="1500" dirty="0"/>
-          </a:p>
-          <a:p>
-            <a:pPr marL="342900" indent="-342900">
-              <a:spcAft>
-                <a:spcPts val="600"/>
-              </a:spcAft>
-              <a:buSzPct val="100000"/>
-              <a:buChar char="•"/>
-            </a:pPr>
-            <a:r>
-              <a:rPr lang="en-US" sz="1500" dirty="0">
-                <a:solidFill>
-                  <a:srgbClr val="212121"/>
-                </a:solidFill>
-                <a:latin typeface="Calibri" pitchFamily="34" charset="0"/>
-                <a:ea typeface="Calibri" pitchFamily="34" charset="-122"/>
-                <a:cs typeface="Calibri" pitchFamily="34" charset="-120"/>
-              </a:rPr>
-              <a:t>Same knowledge base, different answers per user — no per-tenant infrastructure</a:t>
-            </a:r>
-            <a:endParaRPr lang="en-US" sz="1500" dirty="0"/>
-          </a:p>
-        </p:txBody>
-      </p:sp>
-      <p:sp>
-        <p:nvSpPr>
-          <p:cNvPr id="6" name="Text 4"/>
-          <p:cNvSpPr/>
-          <p:nvPr/>
-        </p:nvSpPr>
-        <p:spPr>
-          <a:xfrm>
-            <a:off x="365760" y="4343400"/>
-            <a:ext cx="8412480" cy="365760"/>
-          </a:xfrm>
-          <a:prstGeom prst="rect">
-            <a:avLst/>
-          </a:prstGeom>
-          <a:noFill/>
-          <a:ln/>
-        </p:spPr>
-        <p:txBody>
-          <a:bodyPr wrap="square" rtlCol="0" anchor="ctr"/>
-          <a:lstStyle/>
-          <a:p>
-            <a:pPr indent="0" marL="0">
-              <a:buNone/>
-            </a:pPr>
-            <a:r>
-              <a:rPr lang="en-US" sz="1300" b="1" i="1" dirty="0">
-                <a:solidFill>
-                  <a:srgbClr val="1E2761"/>
-                </a:solidFill>
-                <a:latin typeface="Calibri" pitchFamily="34" charset="0"/>
-                <a:ea typeface="Calibri" pitchFamily="34" charset="-122"/>
-                <a:cs typeface="Calibri" pitchFamily="34" charset="-120"/>
-              </a:rPr>
-              <a:t>Single biggest reason to prefer Foundry IQ over hand-rolling RAG on AI Search for enterprise content.</a:t>
-            </a:r>
-            <a:endParaRPr lang="en-US" sz="1300" dirty="0"/>
           </a:p>
         </p:txBody>
       </p:sp>
